--- a/docs/mcr_necessity_kv.pptx
+++ b/docs/mcr_necessity_kv.pptx
@@ -1413,7 +1413,7 @@
               <a:buNone/>
             </a:pPr>
             <a:r>
-              <a:rPr lang="en-US" sz="1200" b="1" dirty="0">
+              <a:rPr lang="en-US" sz="1150" b="1" dirty="0">
                 <a:solidFill>
                   <a:srgbClr val="FFFFFF"/>
                 </a:solidFill>
@@ -1421,9 +1421,9 @@
                 <a:ea typeface="Malgun Gothic" pitchFamily="34" charset="-122"/>
                 <a:cs typeface="Malgun Gothic" pitchFamily="34" charset="-120"/>
               </a:rPr>
-              <a:t>문제 정의 — 현재 런타임의 KV 캐시 운용 3대 공백 (우선순위 순)</a:t>
-            </a:r>
-            <a:endParaRPr lang="en-US" sz="1200" dirty="0"/>
+              <a:t>문제 정의 Ⅰ — 물리 병목: KV cache가 용량·대역폭을 동시에 압박</a:t>
+            </a:r>
+            <a:endParaRPr lang="en-US" sz="1150" dirty="0"/>
           </a:p>
         </p:txBody>
       </p:sp>
@@ -1472,7 +1472,7 @@
               <a:buNone/>
             </a:pPr>
             <a:r>
-              <a:rPr lang="en-US" sz="1200" b="1" dirty="0">
+              <a:rPr lang="en-US" sz="1150" b="1" dirty="0">
                 <a:solidFill>
                   <a:srgbClr val="FFFFFF"/>
                 </a:solidFill>
@@ -1482,7 +1482,7 @@
               </a:rPr>
               <a:t>과제 목표 — KV 캐시 최적 운용 AI 런타임 (MCR 1단계)</a:t>
             </a:r>
-            <a:endParaRPr lang="en-US" sz="1200" dirty="0"/>
+            <a:endParaRPr lang="en-US" sz="1150" dirty="0"/>
           </a:p>
         </p:txBody>
       </p:sp>
@@ -1494,8 +1494,8 @@
         </p:nvSpPr>
         <p:spPr>
           <a:xfrm>
-            <a:off x="320040" y="1481328"/>
-            <a:ext cx="5559552" cy="1338072"/>
+            <a:off x="320040" y="1463040"/>
+            <a:ext cx="2715768" cy="1298448"/>
           </a:xfrm>
           <a:prstGeom prst="rect">
             <a:avLst/>
@@ -1513,34 +1513,14 @@
       </p:sp>
       <p:sp>
         <p:nvSpPr>
-          <p:cNvPr id="24" name="Shape 22"/>
-          <p:cNvSpPr/>
-          <p:nvPr/>
-        </p:nvSpPr>
-        <p:spPr>
-          <a:xfrm>
-            <a:off x="411480" y="1563624"/>
-            <a:ext cx="274320" cy="274320"/>
-          </a:xfrm>
-          <a:prstGeom prst="ellipse">
-            <a:avLst/>
-          </a:prstGeom>
-          <a:solidFill>
-            <a:srgbClr val="1F3864"/>
-          </a:solidFill>
-          <a:ln/>
-        </p:spPr>
-      </p:sp>
-      <p:sp>
-        <p:nvSpPr>
-          <p:cNvPr id="25" name="Text 23"/>
-          <p:cNvSpPr/>
-          <p:nvPr/>
-        </p:nvSpPr>
-        <p:spPr>
-          <a:xfrm>
-            <a:off x="411480" y="1563624"/>
-            <a:ext cx="274320" cy="274320"/>
+          <p:cNvPr id="24" name="Text 22"/>
+          <p:cNvSpPr/>
+          <p:nvPr/>
+        </p:nvSpPr>
+        <p:spPr>
+          <a:xfrm>
+            <a:off x="393192" y="1499616"/>
+            <a:ext cx="2569464" cy="237744"/>
           </a:xfrm>
           <a:prstGeom prst="rect">
             <a:avLst/>
@@ -1552,50 +1532,11 @@
           <a:bodyPr wrap="square" rtlCol="0" anchor="ctr"/>
           <a:lstStyle/>
           <a:p>
-            <a:pPr algn="ctr" indent="0" marL="0">
-              <a:buNone/>
-            </a:pPr>
-            <a:r>
-              <a:rPr lang="en-US" sz="1200" b="1" dirty="0">
-                <a:solidFill>
-                  <a:srgbClr val="FFFFFF"/>
-                </a:solidFill>
-                <a:latin typeface="Malgun Gothic" pitchFamily="34" charset="0"/>
-                <a:ea typeface="Malgun Gothic" pitchFamily="34" charset="-122"/>
-                <a:cs typeface="Malgun Gothic" pitchFamily="34" charset="-120"/>
-              </a:rPr>
-              <a:t>1</a:t>
-            </a:r>
-            <a:endParaRPr lang="en-US" sz="1200" dirty="0"/>
-          </a:p>
-        </p:txBody>
-      </p:sp>
-      <p:sp>
-        <p:nvSpPr>
-          <p:cNvPr id="26" name="Text 24"/>
-          <p:cNvSpPr/>
-          <p:nvPr/>
-        </p:nvSpPr>
-        <p:spPr>
-          <a:xfrm>
-            <a:off x="758952" y="1536192"/>
-            <a:ext cx="5029200" cy="310896"/>
-          </a:xfrm>
-          <a:prstGeom prst="rect">
-            <a:avLst/>
-          </a:prstGeom>
-          <a:noFill/>
-          <a:ln/>
-        </p:spPr>
-        <p:txBody>
-          <a:bodyPr wrap="square" rtlCol="0" anchor="ctr"/>
-          <a:lstStyle/>
-          <a:p>
             <a:pPr indent="0" marL="0">
               <a:buNone/>
             </a:pPr>
             <a:r>
-              <a:rPr lang="en-US" sz="1150" b="1" dirty="0">
+              <a:rPr lang="en-US" sz="1030" b="1" dirty="0">
                 <a:solidFill>
                   <a:srgbClr val="1F3864"/>
                 </a:solidFill>
@@ -1603,22 +1544,22 @@
                 <a:ea typeface="Malgun Gothic" pitchFamily="34" charset="-122"/>
                 <a:cs typeface="Malgun Gothic" pitchFamily="34" charset="-120"/>
               </a:rPr>
-              <a:t>KV 재사용 공백 — prefix 일치·일회성 버퍼에 갇힘</a:t>
-            </a:r>
-            <a:endParaRPr lang="en-US" sz="1150" dirty="0"/>
-          </a:p>
-        </p:txBody>
-      </p:sp>
-      <p:sp>
-        <p:nvSpPr>
-          <p:cNvPr id="27" name="Text 25"/>
-          <p:cNvSpPr/>
-          <p:nvPr/>
-        </p:nvSpPr>
-        <p:spPr>
-          <a:xfrm>
-            <a:off x="466344" y="1847088"/>
-            <a:ext cx="5285232" cy="899160"/>
+              <a:t>용량 — KV가 HBM을 넘는다</a:t>
+            </a:r>
+            <a:endParaRPr lang="en-US" sz="1030" dirty="0"/>
+          </a:p>
+        </p:txBody>
+      </p:sp>
+      <p:sp>
+        <p:nvSpPr>
+          <p:cNvPr id="25" name="Text 23"/>
+          <p:cNvSpPr/>
+          <p:nvPr/>
+        </p:nvSpPr>
+        <p:spPr>
+          <a:xfrm>
+            <a:off x="411480" y="1737360"/>
+            <a:ext cx="2551176" cy="969264"/>
           </a:xfrm>
           <a:prstGeom prst="rect">
             <a:avLst/>
@@ -1630,15 +1571,15 @@
           <a:bodyPr wrap="square" rtlCol="0" anchor="t"/>
           <a:lstStyle/>
           <a:p>
-            <a:pPr marL="127000" indent="-127000">
+            <a:pPr marL="101600" indent="-101600">
               <a:spcAft>
-                <a:spcPts val="300"/>
+                <a:spcPts val="200"/>
               </a:spcAft>
               <a:buSzPct val="100000"/>
               <a:buChar char="◆"/>
             </a:pPr>
             <a:r>
-              <a:rPr lang="en-US" sz="930" dirty="0">
+              <a:rPr lang="en-US" sz="820" dirty="0">
                 <a:solidFill>
                   <a:srgbClr val="262626"/>
                 </a:solidFill>
@@ -1646,20 +1587,20 @@
                 <a:ea typeface="Malgun Gothic" pitchFamily="34" charset="-122"/>
                 <a:cs typeface="Malgun Gothic" pitchFamily="34" charset="-120"/>
               </a:rPr>
-              <a:t>prefix 정확 일치 시에만 재사용(vLLM·SGLang) — RAG chunk 순서·프롬프트 변경에 hit 0, 비접두 재사용 부재</a:t>
-            </a:r>
-            <a:endParaRPr lang="en-US" sz="930" dirty="0"/>
-          </a:p>
-          <a:p>
-            <a:pPr marL="127000" indent="-127000">
+              <a:t>KV ∝ 컨텍스트 × 동시 세션 — 32k 1세션 ≈ 10.5 GB (토큰당 320 KB, Llama-2-70B)</a:t>
+            </a:r>
+            <a:endParaRPr lang="en-US" sz="820" dirty="0"/>
+          </a:p>
+          <a:p>
+            <a:pPr marL="101600" indent="-101600">
               <a:spcAft>
-                <a:spcPts val="300"/>
+                <a:spcPts val="200"/>
               </a:spcAft>
               <a:buSzPct val="100000"/>
               <a:buChar char="◆"/>
             </a:pPr>
             <a:r>
-              <a:rPr lang="en-US" sz="930" dirty="0">
+              <a:rPr lang="en-US" sz="820" dirty="0">
                 <a:solidFill>
                   <a:srgbClr val="262626"/>
                 </a:solidFill>
@@ -1667,65 +1608,49 @@
                 <a:ea typeface="Malgun Gothic" pitchFamily="34" charset="-122"/>
                 <a:cs typeface="Malgun Gothic" pitchFamily="34" charset="-120"/>
               </a:rPr>
-              <a:t>요청 종료 시 폐기 — 세션·사용자 영속 자산 아님, 하위 tier 복원 vs 재계산의 비용 판단도 없음</a:t>
-            </a:r>
-            <a:endParaRPr lang="en-US" sz="930" dirty="0"/>
-          </a:p>
-          <a:p>
-            <a:pPr indent="0" marL="0">
-              <a:buNone/>
-            </a:pPr>
-            <a:r>
-              <a:rPr lang="en-US" sz="960" b="1" dirty="0">
-                <a:solidFill>
-                  <a:srgbClr val="B3402A"/>
-                </a:solidFill>
-                <a:latin typeface="Malgun Gothic" pitchFamily="34" charset="0"/>
-                <a:ea typeface="Malgun Gothic" pitchFamily="34" charset="-122"/>
-                <a:cs typeface="Malgun Gothic" pitchFamily="34" charset="-120"/>
-              </a:rPr>
-              <a:t>⇒ 수십 k 토큰을 매 요청 전체 re-prefill — TTFT 지배 (R-03·04·05)</a:t>
-            </a:r>
-            <a:endParaRPr lang="en-US" sz="930" dirty="0"/>
-          </a:p>
-        </p:txBody>
-      </p:sp>
-      <p:sp>
-        <p:nvSpPr>
-          <p:cNvPr id="28" name="Shape 26"/>
-          <p:cNvSpPr/>
-          <p:nvPr/>
-        </p:nvSpPr>
-        <p:spPr>
-          <a:xfrm>
-            <a:off x="5934456" y="2022348"/>
-            <a:ext cx="393192" cy="256032"/>
-          </a:xfrm>
-          <a:prstGeom prst="rightArrow">
-            <a:avLst/>
-          </a:prstGeom>
-          <a:solidFill>
-            <a:srgbClr val="FFC000"/>
-          </a:solidFill>
-          <a:ln/>
-        </p:spPr>
-      </p:sp>
-      <p:sp>
-        <p:nvSpPr>
-          <p:cNvPr id="29" name="Shape 27"/>
-          <p:cNvSpPr/>
-          <p:nvPr/>
-        </p:nvSpPr>
-        <p:spPr>
-          <a:xfrm>
-            <a:off x="6382512" y="1481328"/>
-            <a:ext cx="5489143" cy="1338072"/>
-          </a:xfrm>
-          <a:prstGeom prst="rect">
-            <a:avLst/>
-          </a:prstGeom>
-          <a:solidFill>
-            <a:srgbClr val="F3F7F0"/>
+              <a:t>용량 = batch(동시성)의 상한 = 처리량의 상한</a:t>
+            </a:r>
+            <a:endParaRPr lang="en-US" sz="820" dirty="0"/>
+          </a:p>
+          <a:p>
+            <a:pPr marL="101600" indent="-101600">
+              <a:spcAft>
+                <a:spcPts val="200"/>
+              </a:spcAft>
+              <a:buSzPct val="100000"/>
+              <a:buChar char="◆"/>
+            </a:pPr>
+            <a:r>
+              <a:rPr lang="en-US" sz="820" dirty="0">
+                <a:solidFill>
+                  <a:srgbClr val="262626"/>
+                </a:solidFill>
+                <a:latin typeface="Malgun Gothic" pitchFamily="34" charset="0"/>
+                <a:ea typeface="Malgun Gothic" pitchFamily="34" charset="-122"/>
+                <a:cs typeface="Malgun Gothic" pitchFamily="34" charset="-120"/>
+              </a:rPr>
+              <a:t>초과 시 대기 또는 preemption·전체 재계산뿐 → 지연·처리량 악화 직결</a:t>
+            </a:r>
+            <a:endParaRPr lang="en-US" sz="820" dirty="0"/>
+          </a:p>
+        </p:txBody>
+      </p:sp>
+      <p:sp>
+        <p:nvSpPr>
+          <p:cNvPr id="26" name="Shape 24"/>
+          <p:cNvSpPr/>
+          <p:nvPr/>
+        </p:nvSpPr>
+        <p:spPr>
+          <a:xfrm>
+            <a:off x="3163824" y="1463040"/>
+            <a:ext cx="2715768" cy="1298448"/>
+          </a:xfrm>
+          <a:prstGeom prst="rect">
+            <a:avLst/>
+          </a:prstGeom>
+          <a:solidFill>
+            <a:srgbClr val="F5F6F8"/>
           </a:solidFill>
           <a:ln w="12700">
             <a:solidFill>
@@ -1737,36 +1662,14 @@
       </p:sp>
       <p:sp>
         <p:nvSpPr>
-          <p:cNvPr id="30" name="Shape 28"/>
-          <p:cNvSpPr/>
-          <p:nvPr/>
-        </p:nvSpPr>
-        <p:spPr>
-          <a:xfrm>
-            <a:off x="6473952" y="1563624"/>
-            <a:ext cx="658368" cy="274320"/>
-          </a:xfrm>
-          <a:prstGeom prst="roundRect">
-            <a:avLst>
-              <a:gd name="adj" fmla="val 20000"/>
-            </a:avLst>
-          </a:prstGeom>
-          <a:solidFill>
-            <a:srgbClr val="4E7C3A"/>
-          </a:solidFill>
-          <a:ln/>
-        </p:spPr>
-      </p:sp>
-      <p:sp>
-        <p:nvSpPr>
-          <p:cNvPr id="31" name="Text 29"/>
-          <p:cNvSpPr/>
-          <p:nvPr/>
-        </p:nvSpPr>
-        <p:spPr>
-          <a:xfrm>
-            <a:off x="6473952" y="1563624"/>
-            <a:ext cx="658368" cy="274320"/>
+          <p:cNvPr id="27" name="Text 25"/>
+          <p:cNvSpPr/>
+          <p:nvPr/>
+        </p:nvSpPr>
+        <p:spPr>
+          <a:xfrm>
+            <a:off x="3236976" y="1499616"/>
+            <a:ext cx="2569464" cy="237744"/>
           </a:xfrm>
           <a:prstGeom prst="rect">
             <a:avLst/>
@@ -1778,73 +1681,34 @@
           <a:bodyPr wrap="square" rtlCol="0" anchor="ctr"/>
           <a:lstStyle/>
           <a:p>
-            <a:pPr algn="ctr" indent="0" marL="0">
-              <a:buNone/>
-            </a:pPr>
-            <a:r>
-              <a:rPr lang="en-US" sz="1000" b="1" dirty="0">
-                <a:solidFill>
-                  <a:srgbClr val="FFFFFF"/>
-                </a:solidFill>
-                <a:latin typeface="Malgun Gothic" pitchFamily="34" charset="0"/>
-                <a:ea typeface="Malgun Gothic" pitchFamily="34" charset="-122"/>
-                <a:cs typeface="Malgun Gothic" pitchFamily="34" charset="-120"/>
-              </a:rPr>
-              <a:t>목표 1</a:t>
-            </a:r>
-            <a:endParaRPr lang="en-US" sz="1000" dirty="0"/>
-          </a:p>
-        </p:txBody>
-      </p:sp>
-      <p:sp>
-        <p:nvSpPr>
-          <p:cNvPr id="32" name="Text 30"/>
-          <p:cNvSpPr/>
-          <p:nvPr/>
-        </p:nvSpPr>
-        <p:spPr>
-          <a:xfrm>
-            <a:off x="7223760" y="1536192"/>
-            <a:ext cx="4556455" cy="310896"/>
-          </a:xfrm>
-          <a:prstGeom prst="rect">
-            <a:avLst/>
-          </a:prstGeom>
-          <a:noFill/>
-          <a:ln/>
-        </p:spPr>
-        <p:txBody>
-          <a:bodyPr wrap="square" rtlCol="0" anchor="ctr"/>
-          <a:lstStyle/>
-          <a:p>
             <a:pPr indent="0" marL="0">
               <a:buNone/>
             </a:pPr>
             <a:r>
-              <a:rPr lang="en-US" sz="1150" b="1" dirty="0">
-                <a:solidFill>
-                  <a:srgbClr val="3C5F2C"/>
-                </a:solidFill>
-                <a:latin typeface="Malgun Gothic" pitchFamily="34" charset="0"/>
-                <a:ea typeface="Malgun Gothic" pitchFamily="34" charset="-122"/>
-                <a:cs typeface="Malgun Gothic" pitchFamily="34" charset="-120"/>
-              </a:rPr>
-              <a:t>KV 재사용성 제고 → 지연시간(TTFT) 개선</a:t>
-            </a:r>
-            <a:endParaRPr lang="en-US" sz="1150" dirty="0"/>
-          </a:p>
-        </p:txBody>
-      </p:sp>
-      <p:sp>
-        <p:nvSpPr>
-          <p:cNvPr id="33" name="Text 31"/>
-          <p:cNvSpPr/>
-          <p:nvPr/>
-        </p:nvSpPr>
-        <p:spPr>
-          <a:xfrm>
-            <a:off x="6528816" y="1847088"/>
-            <a:ext cx="5214823" cy="899160"/>
+              <a:rPr lang="en-US" sz="1030" b="1" dirty="0">
+                <a:solidFill>
+                  <a:srgbClr val="1F3864"/>
+                </a:solidFill>
+                <a:latin typeface="Malgun Gothic" pitchFamily="34" charset="0"/>
+                <a:ea typeface="Malgun Gothic" pitchFamily="34" charset="-122"/>
+                <a:cs typeface="Malgun Gothic" pitchFamily="34" charset="-120"/>
+              </a:rPr>
+              <a:t>대역폭 — 매 토큰 KV 전체를 읽는다</a:t>
+            </a:r>
+            <a:endParaRPr lang="en-US" sz="1030" dirty="0"/>
+          </a:p>
+        </p:txBody>
+      </p:sp>
+      <p:sp>
+        <p:nvSpPr>
+          <p:cNvPr id="28" name="Text 26"/>
+          <p:cNvSpPr/>
+          <p:nvPr/>
+        </p:nvSpPr>
+        <p:spPr>
+          <a:xfrm>
+            <a:off x="3255264" y="1737360"/>
+            <a:ext cx="2551176" cy="969264"/>
           </a:xfrm>
           <a:prstGeom prst="rect">
             <a:avLst/>
@@ -1856,15 +1720,15 @@
           <a:bodyPr wrap="square" rtlCol="0" anchor="t"/>
           <a:lstStyle/>
           <a:p>
-            <a:pPr marL="127000" indent="-127000">
+            <a:pPr marL="101600" indent="-101600">
               <a:spcAft>
-                <a:spcPts val="300"/>
+                <a:spcPts val="200"/>
               </a:spcAft>
               <a:buSzPct val="100000"/>
               <a:buChar char="◆"/>
             </a:pPr>
             <a:r>
-              <a:rPr lang="en-US" sz="930" dirty="0">
+              <a:rPr lang="en-US" sz="820" dirty="0">
                 <a:solidFill>
                   <a:srgbClr val="262626"/>
                 </a:solidFill>
@@ -1872,16 +1736,105 @@
                 <a:ea typeface="Malgun Gothic" pitchFamily="34" charset="-122"/>
                 <a:cs typeface="Malgun Gothic" pitchFamily="34" charset="-120"/>
               </a:rPr>
-              <a:t>prefix + 비접두(chunk) 재사용, 세션·사용자 단위 영속화, 복원 vs 재계산 비용 판단 (FR-02)</a:t>
-            </a:r>
-            <a:endParaRPr lang="en-US" sz="930" dirty="0"/>
-          </a:p>
+              <a:t>decode = memory-bandwidth-bound — 대기가 E2E의 70–85%(A), 컨텍스트↑ = TPOT↑</a:t>
+            </a:r>
+            <a:endParaRPr lang="en-US" sz="820" dirty="0"/>
+          </a:p>
+          <a:p>
+            <a:pPr marL="101600" indent="-101600">
+              <a:spcAft>
+                <a:spcPts val="200"/>
+              </a:spcAft>
+              <a:buSzPct val="100000"/>
+              <a:buChar char="◆"/>
+            </a:pPr>
+            <a:r>
+              <a:rPr lang="en-US" sz="820" dirty="0">
+                <a:solidFill>
+                  <a:srgbClr val="262626"/>
+                </a:solidFill>
+                <a:latin typeface="Malgun Gothic" pitchFamily="34" charset="0"/>
+                <a:ea typeface="Malgun Gothic" pitchFamily="34" charset="-122"/>
+                <a:cs typeface="Malgun Gothic" pitchFamily="34" charset="-120"/>
+              </a:rPr>
+              <a:t>대역폭 포화 시 용량 남아도 연산기 유휴 — 처리량 정체</a:t>
+            </a:r>
+            <a:endParaRPr lang="en-US" sz="820" dirty="0"/>
+          </a:p>
+          <a:p>
+            <a:pPr marL="101600" indent="-101600">
+              <a:spcAft>
+                <a:spcPts val="200"/>
+              </a:spcAft>
+              <a:buSzPct val="100000"/>
+              <a:buChar char="◆"/>
+            </a:pPr>
+            <a:r>
+              <a:rPr lang="en-US" sz="820" dirty="0">
+                <a:solidFill>
+                  <a:srgbClr val="262626"/>
+                </a:solidFill>
+                <a:latin typeface="Malgun Gothic" pitchFamily="34" charset="0"/>
+                <a:ea typeface="Malgun Gothic" pitchFamily="34" charset="-122"/>
+                <a:cs typeface="Malgun Gothic" pitchFamily="34" charset="-120"/>
+              </a:rPr>
+              <a:t>tier 계단 ~10×씩(HBM→DRAM→SSD) — 복원이 재계산보다 느릴 수도</a:t>
+            </a:r>
+            <a:endParaRPr lang="en-US" sz="820" dirty="0"/>
+          </a:p>
+        </p:txBody>
+      </p:sp>
+      <p:sp>
+        <p:nvSpPr>
+          <p:cNvPr id="29" name="Shape 27"/>
+          <p:cNvSpPr/>
+          <p:nvPr/>
+        </p:nvSpPr>
+        <p:spPr>
+          <a:xfrm>
+            <a:off x="320040" y="2807208"/>
+            <a:ext cx="5559552" cy="274320"/>
+          </a:xfrm>
+          <a:prstGeom prst="rect">
+            <a:avLst/>
+          </a:prstGeom>
+          <a:solidFill>
+            <a:srgbClr val="EDEFF4"/>
+          </a:solidFill>
+          <a:ln w="9525">
+            <a:solidFill>
+              <a:srgbClr val="1F3864"/>
+            </a:solidFill>
+            <a:prstDash val="solid"/>
+          </a:ln>
+        </p:spPr>
+      </p:sp>
+      <p:sp>
+        <p:nvSpPr>
+          <p:cNvPr id="30" name="Text 28"/>
+          <p:cNvSpPr/>
+          <p:nvPr/>
+        </p:nvSpPr>
+        <p:spPr>
+          <a:xfrm>
+            <a:off x="393192" y="2807208"/>
+            <a:ext cx="5413248" cy="274320"/>
+          </a:xfrm>
+          <a:prstGeom prst="rect">
+            <a:avLst/>
+          </a:prstGeom>
+          <a:noFill/>
+          <a:ln/>
+        </p:spPr>
+        <p:txBody>
+          <a:bodyPr wrap="square" rtlCol="0" anchor="ctr"/>
+          <a:lstStyle/>
           <a:p>
             <a:pPr indent="0" marL="0">
               <a:buNone/>
             </a:pPr>
             <a:r>
-              <a:rPr lang="en-US" sz="960" b="1" dirty="0">
+              <a:rPr lang="en-US" sz="880" b="1" dirty="0">
                 <a:solidFill>
                   <a:srgbClr val="1F3864"/>
                 </a:solidFill>
@@ -1889,13 +1842,27 @@
                 <a:ea typeface="Malgun Gothic" pitchFamily="34" charset="-122"/>
                 <a:cs typeface="Malgun Gothic" pitchFamily="34" charset="-120"/>
               </a:rPr>
-              <a:t>판정: </a:t>
+              <a:t>결합 구조: </a:t>
             </a:r>
             <a:pPr indent="0" marL="0">
               <a:buNone/>
             </a:pPr>
             <a:r>
-              <a:rPr lang="en-US" sz="960" dirty="0">
+              <a:rPr lang="en-US" sz="880" dirty="0">
+                <a:solidFill>
+                  <a:srgbClr val="262626"/>
+                </a:solidFill>
+                <a:latin typeface="Malgun Gothic" pitchFamily="34" charset="0"/>
+                <a:ea typeface="Malgun Gothic" pitchFamily="34" charset="-122"/>
+                <a:cs typeface="Malgun Gothic" pitchFamily="34" charset="-120"/>
+              </a:rPr>
+              <a:t>offload로 용량을 풀면 대역폭 계단에 부딪힌다(용량 ↔ 대역폭 트레이드오프) — 어디에 두고·얼마나 줄이고·언제 다시 만들지의 </a:t>
+            </a:r>
+            <a:pPr indent="0" marL="0">
+              <a:buNone/>
+            </a:pPr>
+            <a:r>
+              <a:rPr lang="en-US" sz="880" b="1" dirty="0">
                 <a:solidFill>
                   <a:srgbClr val="1F3864"/>
                 </a:solidFill>
@@ -1903,28 +1870,28 @@
                 <a:ea typeface="Malgun Gothic" pitchFamily="34" charset="-122"/>
                 <a:cs typeface="Malgun Gothic" pitchFamily="34" charset="-120"/>
               </a:rPr>
-              <a:t>TTFT ≥ 2× (QA1) — CacheBlend 2.2–3.3×(B) 앵커</a:t>
-            </a:r>
-            <a:endParaRPr lang="en-US" sz="930" dirty="0"/>
-          </a:p>
-        </p:txBody>
-      </p:sp>
-      <p:sp>
-        <p:nvSpPr>
-          <p:cNvPr id="34" name="Shape 32"/>
-          <p:cNvSpPr/>
-          <p:nvPr/>
-        </p:nvSpPr>
-        <p:spPr>
-          <a:xfrm>
-            <a:off x="320040" y="2938272"/>
-            <a:ext cx="5559552" cy="1338072"/>
-          </a:xfrm>
-          <a:prstGeom prst="rect">
-            <a:avLst/>
-          </a:prstGeom>
-          <a:solidFill>
-            <a:srgbClr val="F5F6F8"/>
+              <a:t>운용 결정이 성능을 결정</a:t>
+            </a:r>
+            <a:endParaRPr lang="en-US" sz="880" dirty="0"/>
+          </a:p>
+        </p:txBody>
+      </p:sp>
+      <p:sp>
+        <p:nvSpPr>
+          <p:cNvPr id="31" name="Shape 29"/>
+          <p:cNvSpPr/>
+          <p:nvPr/>
+        </p:nvSpPr>
+        <p:spPr>
+          <a:xfrm>
+            <a:off x="6382512" y="1463040"/>
+            <a:ext cx="5489143" cy="1618488"/>
+          </a:xfrm>
+          <a:prstGeom prst="rect">
+            <a:avLst/>
+          </a:prstGeom>
+          <a:solidFill>
+            <a:srgbClr val="F3F7F0"/>
           </a:solidFill>
           <a:ln w="12700">
             <a:solidFill>
@@ -1936,34 +1903,14 @@
       </p:sp>
       <p:sp>
         <p:nvSpPr>
-          <p:cNvPr id="35" name="Shape 33"/>
-          <p:cNvSpPr/>
-          <p:nvPr/>
-        </p:nvSpPr>
-        <p:spPr>
-          <a:xfrm>
-            <a:off x="411480" y="3020568"/>
-            <a:ext cx="274320" cy="274320"/>
-          </a:xfrm>
-          <a:prstGeom prst="ellipse">
-            <a:avLst/>
-          </a:prstGeom>
-          <a:solidFill>
-            <a:srgbClr val="1F3864"/>
-          </a:solidFill>
-          <a:ln/>
-        </p:spPr>
-      </p:sp>
-      <p:sp>
-        <p:nvSpPr>
-          <p:cNvPr id="36" name="Text 34"/>
-          <p:cNvSpPr/>
-          <p:nvPr/>
-        </p:nvSpPr>
-        <p:spPr>
-          <a:xfrm>
-            <a:off x="411480" y="3020568"/>
-            <a:ext cx="274320" cy="274320"/>
+          <p:cNvPr id="32" name="Text 30"/>
+          <p:cNvSpPr/>
+          <p:nvPr/>
+        </p:nvSpPr>
+        <p:spPr>
+          <a:xfrm>
+            <a:off x="6473952" y="1508760"/>
+            <a:ext cx="5306263" cy="246888"/>
           </a:xfrm>
           <a:prstGeom prst="rect">
             <a:avLst/>
@@ -1975,73 +1922,34 @@
           <a:bodyPr wrap="square" rtlCol="0" anchor="ctr"/>
           <a:lstStyle/>
           <a:p>
-            <a:pPr algn="ctr" indent="0" marL="0">
-              <a:buNone/>
-            </a:pPr>
-            <a:r>
-              <a:rPr lang="en-US" sz="1200" b="1" dirty="0">
-                <a:solidFill>
-                  <a:srgbClr val="FFFFFF"/>
-                </a:solidFill>
-                <a:latin typeface="Malgun Gothic" pitchFamily="34" charset="0"/>
-                <a:ea typeface="Malgun Gothic" pitchFamily="34" charset="-122"/>
-                <a:cs typeface="Malgun Gothic" pitchFamily="34" charset="-120"/>
-              </a:rPr>
-              <a:t>2</a:t>
-            </a:r>
-            <a:endParaRPr lang="en-US" sz="1200" dirty="0"/>
-          </a:p>
-        </p:txBody>
-      </p:sp>
-      <p:sp>
-        <p:nvSpPr>
-          <p:cNvPr id="37" name="Text 35"/>
-          <p:cNvSpPr/>
-          <p:nvPr/>
-        </p:nvSpPr>
-        <p:spPr>
-          <a:xfrm>
-            <a:off x="758952" y="2993136"/>
-            <a:ext cx="5029200" cy="310896"/>
-          </a:xfrm>
-          <a:prstGeom prst="rect">
-            <a:avLst/>
-          </a:prstGeom>
-          <a:noFill/>
-          <a:ln/>
-        </p:spPr>
-        <p:txBody>
-          <a:bodyPr wrap="square" rtlCol="0" anchor="ctr"/>
-          <a:lstStyle/>
-          <a:p>
             <a:pPr indent="0" marL="0">
               <a:buNone/>
             </a:pPr>
             <a:r>
-              <a:rPr lang="en-US" sz="1150" b="1" dirty="0">
-                <a:solidFill>
-                  <a:srgbClr val="1F3864"/>
-                </a:solidFill>
-                <a:latin typeface="Malgun Gothic" pitchFamily="34" charset="0"/>
-                <a:ea typeface="Malgun Gothic" pitchFamily="34" charset="-122"/>
-                <a:cs typeface="Malgun Gothic" pitchFamily="34" charset="-120"/>
-              </a:rPr>
-              <a:t>KV 압축 공백 — 정적·일률 적용, 품질과 피드백 없음</a:t>
-            </a:r>
-            <a:endParaRPr lang="en-US" sz="1150" dirty="0"/>
-          </a:p>
-        </p:txBody>
-      </p:sp>
-      <p:sp>
-        <p:nvSpPr>
-          <p:cNvPr id="38" name="Text 36"/>
-          <p:cNvSpPr/>
-          <p:nvPr/>
-        </p:nvSpPr>
-        <p:spPr>
-          <a:xfrm>
-            <a:off x="466344" y="3304032"/>
-            <a:ext cx="5285232" cy="899160"/>
+              <a:rPr lang="en-US" sz="1050" b="1" dirty="0">
+                <a:solidFill>
+                  <a:srgbClr val="3C5F2C"/>
+                </a:solidFill>
+                <a:latin typeface="Malgun Gothic" pitchFamily="34" charset="0"/>
+                <a:ea typeface="Malgun Gothic" pitchFamily="34" charset="-122"/>
+                <a:cs typeface="Malgun Gothic" pitchFamily="34" charset="-120"/>
+              </a:rPr>
+              <a:t>해법 공간 — 병목을 푸는 지렛대는 셋뿐이다</a:t>
+            </a:r>
+            <a:endParaRPr lang="en-US" sz="1050" dirty="0"/>
+          </a:p>
+        </p:txBody>
+      </p:sp>
+      <p:sp>
+        <p:nvSpPr>
+          <p:cNvPr id="33" name="Text 31"/>
+          <p:cNvSpPr/>
+          <p:nvPr/>
+        </p:nvSpPr>
+        <p:spPr>
+          <a:xfrm>
+            <a:off x="6492240" y="1773936"/>
+            <a:ext cx="5269687" cy="1234440"/>
           </a:xfrm>
           <a:prstGeom prst="rect">
             <a:avLst/>
@@ -2053,36 +1961,67 @@
           <a:bodyPr wrap="square" rtlCol="0" anchor="t"/>
           <a:lstStyle/>
           <a:p>
-            <a:pPr marL="127000" indent="-127000">
+            <a:pPr indent="0" marL="0">
+              <a:buNone/>
+            </a:pPr>
+            <a:r>
+              <a:rPr lang="en-US" sz="920" dirty="0">
+                <a:solidFill>
+                  <a:srgbClr val="262626"/>
+                </a:solidFill>
+                <a:latin typeface="Malgun Gothic" pitchFamily="34" charset="0"/>
+                <a:ea typeface="Malgun Gothic" pitchFamily="34" charset="-122"/>
+                <a:cs typeface="Malgun Gothic" pitchFamily="34" charset="-120"/>
+              </a:rPr>
+              <a:t>KV 총량·이동량 = </a:t>
+            </a:r>
+            <a:pPr indent="0" marL="0">
               <a:spcAft>
-                <a:spcPts val="300"/>
+                <a:spcPts val="400"/>
+              </a:spcAft>
+              <a:buNone/>
+            </a:pPr>
+            <a:r>
+              <a:rPr lang="en-US" sz="920" b="1" dirty="0">
+                <a:solidFill>
+                  <a:srgbClr val="1F3864"/>
+                </a:solidFill>
+                <a:latin typeface="Malgun Gothic" pitchFamily="34" charset="0"/>
+                <a:ea typeface="Malgun Gothic" pitchFamily="34" charset="-122"/>
+                <a:cs typeface="Malgun Gothic" pitchFamily="34" charset="-120"/>
+              </a:rPr>
+              <a:t>① 만드는 횟수 × ② 토큰당 바이트 × ③ 두는 위치·처리 순서</a:t>
+            </a:r>
+            <a:endParaRPr lang="en-US" sz="920" dirty="0"/>
+          </a:p>
+          <a:p>
+            <a:pPr marL="101600" indent="-101600">
+              <a:spcAft>
+                <a:spcPts val="400"/>
               </a:spcAft>
               <a:buSzPct val="100000"/>
               <a:buChar char="◆"/>
             </a:pPr>
             <a:r>
-              <a:rPr lang="en-US" sz="930" dirty="0">
-                <a:solidFill>
-                  <a:srgbClr val="262626"/>
-                </a:solidFill>
-                <a:latin typeface="Malgun Gothic" pitchFamily="34" charset="0"/>
-                <a:ea typeface="Malgun Gothic" pitchFamily="34" charset="-122"/>
-                <a:cs typeface="Malgun Gothic" pitchFamily="34" charset="-120"/>
-              </a:rPr>
-              <a:t>KV ∝ 컨텍스트×동시 세션(32k 1세션 ≈ 10.5 GB) — HBM 용량 초과 + decode 대역폭 압박(대기 70–85%(A))</a:t>
-            </a:r>
-            <a:endParaRPr lang="en-US" sz="930" dirty="0"/>
-          </a:p>
-          <a:p>
-            <a:pPr marL="127000" indent="-127000">
-              <a:spcAft>
-                <a:spcPts val="300"/>
-              </a:spcAft>
+              <a:rPr lang="en-US" sz="920" b="1" dirty="0">
+                <a:solidFill>
+                  <a:srgbClr val="3C5F2C"/>
+                </a:solidFill>
+                <a:latin typeface="Malgun Gothic" pitchFamily="34" charset="0"/>
+                <a:ea typeface="Malgun Gothic" pitchFamily="34" charset="-122"/>
+                <a:cs typeface="Malgun Gothic" pitchFamily="34" charset="-120"/>
+              </a:rPr>
+              <a:t>① 다시 만들지 않기 = 재사용   ② 줄이기 = 압축   ③ 잘 두고 잘 고르기 = KV 인지 스케줄링</a:t>
+            </a:r>
+            <a:endParaRPr lang="en-US" sz="920" dirty="0"/>
+          </a:p>
+          <a:p>
+            <a:pPr marL="101600" indent="-101600">
               <a:buSzPct val="100000"/>
               <a:buChar char="◆"/>
             </a:pPr>
             <a:r>
-              <a:rPr lang="en-US" sz="930" dirty="0">
+              <a:rPr lang="en-US" sz="920" dirty="0">
                 <a:solidFill>
                   <a:srgbClr val="262626"/>
                 </a:solidFill>
@@ -2090,26 +2029,147 @@
                 <a:ea typeface="Malgun Gothic" pitchFamily="34" charset="-122"/>
                 <a:cs typeface="Malgun Gothic" pitchFamily="34" charset="-120"/>
               </a:rPr>
-              <a:t>압축(2-bit 양자화·token eviction)은 입증됐으나 전역 고정 설정 — 요청별 품질 예산·차등 집행 부재</a:t>
-            </a:r>
-            <a:endParaRPr lang="en-US" sz="930" dirty="0"/>
-          </a:p>
-          <a:p>
-            <a:pPr indent="0" marL="0">
-              <a:buNone/>
-            </a:pPr>
-            <a:r>
-              <a:rPr lang="en-US" sz="960" b="1" dirty="0">
-                <a:solidFill>
-                  <a:srgbClr val="B3402A"/>
-                </a:solidFill>
-                <a:latin typeface="Malgun Gothic" pitchFamily="34" charset="0"/>
-                <a:ea typeface="Malgun Gothic" pitchFamily="34" charset="-122"/>
-                <a:cs typeface="Malgun Gothic" pitchFamily="34" charset="-120"/>
-              </a:rPr>
-              <a:t>⇒ 용량·대역폭 이중 병목 지속, 품질 리스크 통제 불가 (R-01·02·06)</a:t>
-            </a:r>
-            <a:endParaRPr lang="en-US" sz="930" dirty="0"/>
+              <a:t>그런데 현 런타임에는 세 지렛대가 모두 공백이다(좌측 Ⅱ) → 이를 채우는 것이 과제 목표 3축</a:t>
+            </a:r>
+            <a:endParaRPr lang="en-US" sz="920" dirty="0"/>
+          </a:p>
+        </p:txBody>
+      </p:sp>
+      <p:sp>
+        <p:nvSpPr>
+          <p:cNvPr id="34" name="Shape 32"/>
+          <p:cNvSpPr/>
+          <p:nvPr/>
+        </p:nvSpPr>
+        <p:spPr>
+          <a:xfrm>
+            <a:off x="5934456" y="2144268"/>
+            <a:ext cx="393192" cy="256032"/>
+          </a:xfrm>
+          <a:prstGeom prst="rightArrow">
+            <a:avLst/>
+          </a:prstGeom>
+          <a:solidFill>
+            <a:srgbClr val="9AA0A6"/>
+          </a:solidFill>
+          <a:ln/>
+        </p:spPr>
+      </p:sp>
+      <p:sp>
+        <p:nvSpPr>
+          <p:cNvPr id="35" name="Shape 33"/>
+          <p:cNvSpPr/>
+          <p:nvPr/>
+        </p:nvSpPr>
+        <p:spPr>
+          <a:xfrm>
+            <a:off x="320040" y="3163824"/>
+            <a:ext cx="5559552" cy="310896"/>
+          </a:xfrm>
+          <a:prstGeom prst="rect">
+            <a:avLst/>
+          </a:prstGeom>
+          <a:solidFill>
+            <a:srgbClr val="1F3864"/>
+          </a:solidFill>
+          <a:ln/>
+        </p:spPr>
+      </p:sp>
+      <p:sp>
+        <p:nvSpPr>
+          <p:cNvPr id="36" name="Text 34"/>
+          <p:cNvSpPr/>
+          <p:nvPr/>
+        </p:nvSpPr>
+        <p:spPr>
+          <a:xfrm>
+            <a:off x="365760" y="3163824"/>
+            <a:ext cx="5468112" cy="310896"/>
+          </a:xfrm>
+          <a:prstGeom prst="rect">
+            <a:avLst/>
+          </a:prstGeom>
+          <a:noFill/>
+          <a:ln/>
+        </p:spPr>
+        <p:txBody>
+          <a:bodyPr wrap="square" lIns="0" tIns="0" rIns="0" bIns="0" rtlCol="0" anchor="ctr"/>
+          <a:lstStyle/>
+          <a:p>
+            <a:pPr algn="ctr" indent="0" marL="0">
+              <a:buNone/>
+            </a:pPr>
+            <a:r>
+              <a:rPr lang="en-US" sz="1150" b="1" dirty="0">
+                <a:solidFill>
+                  <a:srgbClr val="FFFFFF"/>
+                </a:solidFill>
+                <a:latin typeface="Malgun Gothic" pitchFamily="34" charset="0"/>
+                <a:ea typeface="Malgun Gothic" pitchFamily="34" charset="-122"/>
+                <a:cs typeface="Malgun Gothic" pitchFamily="34" charset="-120"/>
+              </a:rPr>
+              <a:t>문제 정의 Ⅱ — 운용 공백: 세 지렛대가 현 런타임에 없다 (우선순위 순)</a:t>
+            </a:r>
+            <a:endParaRPr lang="en-US" sz="1150" dirty="0"/>
+          </a:p>
+        </p:txBody>
+      </p:sp>
+      <p:sp>
+        <p:nvSpPr>
+          <p:cNvPr id="37" name="Shape 35"/>
+          <p:cNvSpPr/>
+          <p:nvPr/>
+        </p:nvSpPr>
+        <p:spPr>
+          <a:xfrm>
+            <a:off x="6382512" y="3163824"/>
+            <a:ext cx="5489143" cy="310896"/>
+          </a:xfrm>
+          <a:prstGeom prst="rect">
+            <a:avLst/>
+          </a:prstGeom>
+          <a:solidFill>
+            <a:srgbClr val="4E7C3A"/>
+          </a:solidFill>
+          <a:ln/>
+        </p:spPr>
+      </p:sp>
+      <p:sp>
+        <p:nvSpPr>
+          <p:cNvPr id="38" name="Text 36"/>
+          <p:cNvSpPr/>
+          <p:nvPr/>
+        </p:nvSpPr>
+        <p:spPr>
+          <a:xfrm>
+            <a:off x="6428232" y="3163824"/>
+            <a:ext cx="5397703" cy="310896"/>
+          </a:xfrm>
+          <a:prstGeom prst="rect">
+            <a:avLst/>
+          </a:prstGeom>
+          <a:noFill/>
+          <a:ln/>
+        </p:spPr>
+        <p:txBody>
+          <a:bodyPr wrap="square" lIns="0" tIns="0" rIns="0" bIns="0" rtlCol="0" anchor="ctr"/>
+          <a:lstStyle/>
+          <a:p>
+            <a:pPr algn="ctr" indent="0" marL="0">
+              <a:buNone/>
+            </a:pPr>
+            <a:r>
+              <a:rPr lang="en-US" sz="1150" b="1" dirty="0">
+                <a:solidFill>
+                  <a:srgbClr val="FFFFFF"/>
+                </a:solidFill>
+                <a:latin typeface="Malgun Gothic" pitchFamily="34" charset="0"/>
+                <a:ea typeface="Malgun Gothic" pitchFamily="34" charset="-122"/>
+                <a:cs typeface="Malgun Gothic" pitchFamily="34" charset="-120"/>
+              </a:rPr>
+              <a:t>과제 목표 3축 — 좌측 공백 ①②③과 1:1 대응</a:t>
+            </a:r>
+            <a:endParaRPr lang="en-US" sz="1150" dirty="0"/>
           </a:p>
         </p:txBody>
       </p:sp>
@@ -2121,34 +2181,14 @@
         </p:nvSpPr>
         <p:spPr>
           <a:xfrm>
-            <a:off x="5934456" y="3479292"/>
-            <a:ext cx="393192" cy="256032"/>
-          </a:xfrm>
-          <a:prstGeom prst="rightArrow">
-            <a:avLst/>
-          </a:prstGeom>
-          <a:solidFill>
-            <a:srgbClr val="FFC000"/>
-          </a:solidFill>
-          <a:ln/>
-        </p:spPr>
-      </p:sp>
-      <p:sp>
-        <p:nvSpPr>
-          <p:cNvPr id="40" name="Shape 38"/>
-          <p:cNvSpPr/>
-          <p:nvPr/>
-        </p:nvSpPr>
-        <p:spPr>
-          <a:xfrm>
-            <a:off x="6382512" y="2938272"/>
-            <a:ext cx="5489143" cy="1338072"/>
-          </a:xfrm>
-          <a:prstGeom prst="rect">
-            <a:avLst/>
-          </a:prstGeom>
-          <a:solidFill>
-            <a:srgbClr val="F3F7F0"/>
+            <a:off x="320040" y="3566160"/>
+            <a:ext cx="5559552" cy="691896"/>
+          </a:xfrm>
+          <a:prstGeom prst="rect">
+            <a:avLst/>
+          </a:prstGeom>
+          <a:solidFill>
+            <a:srgbClr val="F5F6F8"/>
           </a:solidFill>
           <a:ln w="12700">
             <a:solidFill>
@@ -2160,36 +2200,34 @@
       </p:sp>
       <p:sp>
         <p:nvSpPr>
-          <p:cNvPr id="41" name="Shape 39"/>
-          <p:cNvSpPr/>
-          <p:nvPr/>
-        </p:nvSpPr>
-        <p:spPr>
-          <a:xfrm>
-            <a:off x="6473952" y="3020568"/>
-            <a:ext cx="658368" cy="274320"/>
-          </a:xfrm>
-          <a:prstGeom prst="roundRect">
-            <a:avLst>
-              <a:gd name="adj" fmla="val 20000"/>
-            </a:avLst>
-          </a:prstGeom>
-          <a:solidFill>
-            <a:srgbClr val="4E7C3A"/>
-          </a:solidFill>
-          <a:ln/>
-        </p:spPr>
-      </p:sp>
-      <p:sp>
-        <p:nvSpPr>
-          <p:cNvPr id="42" name="Text 40"/>
-          <p:cNvSpPr/>
-          <p:nvPr/>
-        </p:nvSpPr>
-        <p:spPr>
-          <a:xfrm>
-            <a:off x="6473952" y="3020568"/>
-            <a:ext cx="658368" cy="274320"/>
+          <p:cNvPr id="40" name="Shape 38"/>
+          <p:cNvSpPr/>
+          <p:nvPr/>
+        </p:nvSpPr>
+        <p:spPr>
+          <a:xfrm>
+            <a:off x="393192" y="3630168"/>
+            <a:ext cx="237744" cy="237744"/>
+          </a:xfrm>
+          <a:prstGeom prst="ellipse">
+            <a:avLst/>
+          </a:prstGeom>
+          <a:solidFill>
+            <a:srgbClr val="1F3864"/>
+          </a:solidFill>
+          <a:ln/>
+        </p:spPr>
+      </p:sp>
+      <p:sp>
+        <p:nvSpPr>
+          <p:cNvPr id="41" name="Text 39"/>
+          <p:cNvSpPr/>
+          <p:nvPr/>
+        </p:nvSpPr>
+        <p:spPr>
+          <a:xfrm>
+            <a:off x="393192" y="3630168"/>
+            <a:ext cx="237744" cy="237744"/>
           </a:xfrm>
           <a:prstGeom prst="rect">
             <a:avLst/>
@@ -2205,7 +2243,7 @@
               <a:buNone/>
             </a:pPr>
             <a:r>
-              <a:rPr lang="en-US" sz="1000" b="1" dirty="0">
+              <a:rPr lang="en-US" sz="1050" b="1" dirty="0">
                 <a:solidFill>
                   <a:srgbClr val="FFFFFF"/>
                 </a:solidFill>
@@ -2213,61 +2251,22 @@
                 <a:ea typeface="Malgun Gothic" pitchFamily="34" charset="-122"/>
                 <a:cs typeface="Malgun Gothic" pitchFamily="34" charset="-120"/>
               </a:rPr>
-              <a:t>목표 2</a:t>
-            </a:r>
-            <a:endParaRPr lang="en-US" sz="1000" dirty="0"/>
-          </a:p>
-        </p:txBody>
-      </p:sp>
-      <p:sp>
-        <p:nvSpPr>
-          <p:cNvPr id="43" name="Text 41"/>
-          <p:cNvSpPr/>
-          <p:nvPr/>
-        </p:nvSpPr>
-        <p:spPr>
-          <a:xfrm>
-            <a:off x="7223760" y="2993136"/>
-            <a:ext cx="4556455" cy="310896"/>
-          </a:xfrm>
-          <a:prstGeom prst="rect">
-            <a:avLst/>
-          </a:prstGeom>
-          <a:noFill/>
-          <a:ln/>
-        </p:spPr>
-        <p:txBody>
-          <a:bodyPr wrap="square" rtlCol="0" anchor="ctr"/>
-          <a:lstStyle/>
-          <a:p>
-            <a:pPr indent="0" marL="0">
-              <a:buNone/>
-            </a:pPr>
-            <a:r>
-              <a:rPr lang="en-US" sz="1150" b="1" dirty="0">
-                <a:solidFill>
-                  <a:srgbClr val="3C5F2C"/>
-                </a:solidFill>
-                <a:latin typeface="Malgun Gothic" pitchFamily="34" charset="0"/>
-                <a:ea typeface="Malgun Gothic" pitchFamily="34" charset="-122"/>
-                <a:cs typeface="Malgun Gothic" pitchFamily="34" charset="-120"/>
-              </a:rPr>
-              <a:t>정확도 유지 KV 압축 → 메모리 병목 해소 → 지연·처리량 개선</a:t>
-            </a:r>
-            <a:endParaRPr lang="en-US" sz="1150" dirty="0"/>
-          </a:p>
-        </p:txBody>
-      </p:sp>
-      <p:sp>
-        <p:nvSpPr>
-          <p:cNvPr id="44" name="Text 42"/>
-          <p:cNvSpPr/>
-          <p:nvPr/>
-        </p:nvSpPr>
-        <p:spPr>
-          <a:xfrm>
-            <a:off x="6528816" y="3304032"/>
-            <a:ext cx="5214823" cy="899160"/>
+              <a:t>1</a:t>
+            </a:r>
+            <a:endParaRPr lang="en-US" sz="1050" dirty="0"/>
+          </a:p>
+        </p:txBody>
+      </p:sp>
+      <p:sp>
+        <p:nvSpPr>
+          <p:cNvPr id="42" name="Text 40"/>
+          <p:cNvSpPr/>
+          <p:nvPr/>
+        </p:nvSpPr>
+        <p:spPr>
+          <a:xfrm>
+            <a:off x="704088" y="3602736"/>
+            <a:ext cx="5065776" cy="618744"/>
           </a:xfrm>
           <a:prstGeom prst="rect">
             <a:avLst/>
@@ -2279,15 +2278,34 @@
           <a:bodyPr wrap="square" rtlCol="0" anchor="t"/>
           <a:lstStyle/>
           <a:p>
-            <a:pPr marL="127000" indent="-127000">
+            <a:pPr indent="0" marL="0">
               <a:spcAft>
-                <a:spcPts val="300"/>
+                <a:spcPts val="200"/>
               </a:spcAft>
-              <a:buSzPct val="100000"/>
-              <a:buChar char="◆"/>
-            </a:pPr>
-            <a:r>
-              <a:rPr lang="en-US" sz="930" dirty="0">
+              <a:buNone/>
+            </a:pPr>
+            <a:r>
+              <a:rPr lang="en-US" sz="980" b="1" dirty="0">
+                <a:solidFill>
+                  <a:srgbClr val="1F3864"/>
+                </a:solidFill>
+                <a:latin typeface="Malgun Gothic" pitchFamily="34" charset="0"/>
+                <a:ea typeface="Malgun Gothic" pitchFamily="34" charset="-122"/>
+                <a:cs typeface="Malgun Gothic" pitchFamily="34" charset="-120"/>
+              </a:rPr>
+              <a:t>재사용 공백 — prefix 일치·일회성 버퍼에 갇힘 (다시 만들지 않기의 부재)</a:t>
+            </a:r>
+            <a:endParaRPr lang="en-US" sz="980" dirty="0"/>
+          </a:p>
+          <a:p>
+            <a:pPr indent="0" marL="0">
+              <a:spcAft>
+                <a:spcPts val="200"/>
+              </a:spcAft>
+              <a:buNone/>
+            </a:pPr>
+            <a:r>
+              <a:rPr lang="en-US" sz="860" dirty="0">
                 <a:solidFill>
                   <a:srgbClr val="262626"/>
                 </a:solidFill>
@@ -2295,59 +2313,65 @@
                 <a:ea typeface="Malgun Gothic" pitchFamily="34" charset="-122"/>
                 <a:cs typeface="Malgun Gothic" pitchFamily="34" charset="-120"/>
               </a:rPr>
-              <a:t>품질 bound(ΔF1 ≤ 1%p, QA3 gate) 안에서 요청별 차등 압축 — training-free(C-03) (FR-03·04)</a:t>
-            </a:r>
-            <a:endParaRPr lang="en-US" sz="930" dirty="0"/>
+              <a:t>prefix 정확 일치 시만 hit(vLLM·SGLang), 요청 종료 시 폐기 — 비접두 재사용·세션/사용자 영속화·복원 vs 재계산 판단 없음</a:t>
+            </a:r>
+            <a:endParaRPr lang="en-US" sz="980" dirty="0"/>
           </a:p>
           <a:p>
             <a:pPr indent="0" marL="0">
               <a:buNone/>
             </a:pPr>
             <a:r>
-              <a:rPr lang="en-US" sz="960" b="1" dirty="0">
-                <a:solidFill>
-                  <a:srgbClr val="1F3864"/>
-                </a:solidFill>
-                <a:latin typeface="Malgun Gothic" pitchFamily="34" charset="0"/>
-                <a:ea typeface="Malgun Gothic" pitchFamily="34" charset="-122"/>
-                <a:cs typeface="Malgun Gothic" pitchFamily="34" charset="-120"/>
-              </a:rPr>
-              <a:t>판정: </a:t>
-            </a:r>
-            <a:pPr indent="0" marL="0">
-              <a:buNone/>
-            </a:pPr>
-            <a:r>
-              <a:rPr lang="en-US" sz="960" dirty="0">
-                <a:solidFill>
-                  <a:srgbClr val="1F3864"/>
-                </a:solidFill>
-                <a:latin typeface="Malgun Gothic" pitchFamily="34" charset="0"/>
-                <a:ea typeface="Malgun Gothic" pitchFamily="34" charset="-122"/>
-                <a:cs typeface="Malgun Gothic" pitchFamily="34" charset="-120"/>
-              </a:rPr>
-              <a:t>유효 KV 용량 ≥ 3× (QA4) · throughput ≥ 2× (QA2)</a:t>
-            </a:r>
-            <a:endParaRPr lang="en-US" sz="930" dirty="0"/>
-          </a:p>
-        </p:txBody>
-      </p:sp>
-      <p:sp>
-        <p:nvSpPr>
-          <p:cNvPr id="45" name="Shape 43"/>
-          <p:cNvSpPr/>
-          <p:nvPr/>
-        </p:nvSpPr>
-        <p:spPr>
-          <a:xfrm>
-            <a:off x="320040" y="4395216"/>
-            <a:ext cx="5559552" cy="1338072"/>
-          </a:xfrm>
-          <a:prstGeom prst="rect">
-            <a:avLst/>
-          </a:prstGeom>
-          <a:solidFill>
-            <a:srgbClr val="F5F6F8"/>
+              <a:rPr lang="en-US" sz="880" b="1" dirty="0">
+                <a:solidFill>
+                  <a:srgbClr val="B3402A"/>
+                </a:solidFill>
+                <a:latin typeface="Malgun Gothic" pitchFamily="34" charset="0"/>
+                <a:ea typeface="Malgun Gothic" pitchFamily="34" charset="-122"/>
+                <a:cs typeface="Malgun Gothic" pitchFamily="34" charset="-120"/>
+              </a:rPr>
+              <a:t>⇒ 수십 k 토큰을 매 요청 전체 re-prefill — TTFT 지배 (R-03·04·05)</a:t>
+            </a:r>
+            <a:endParaRPr lang="en-US" sz="980" dirty="0"/>
+          </a:p>
+        </p:txBody>
+      </p:sp>
+      <p:sp>
+        <p:nvSpPr>
+          <p:cNvPr id="43" name="Shape 41"/>
+          <p:cNvSpPr/>
+          <p:nvPr/>
+        </p:nvSpPr>
+        <p:spPr>
+          <a:xfrm>
+            <a:off x="5934456" y="3793236"/>
+            <a:ext cx="393192" cy="237744"/>
+          </a:xfrm>
+          <a:prstGeom prst="rightArrow">
+            <a:avLst/>
+          </a:prstGeom>
+          <a:solidFill>
+            <a:srgbClr val="FFC000"/>
+          </a:solidFill>
+          <a:ln/>
+        </p:spPr>
+      </p:sp>
+      <p:sp>
+        <p:nvSpPr>
+          <p:cNvPr id="44" name="Shape 42"/>
+          <p:cNvSpPr/>
+          <p:nvPr/>
+        </p:nvSpPr>
+        <p:spPr>
+          <a:xfrm>
+            <a:off x="6382512" y="3566160"/>
+            <a:ext cx="5489143" cy="691896"/>
+          </a:xfrm>
+          <a:prstGeom prst="rect">
+            <a:avLst/>
+          </a:prstGeom>
+          <a:solidFill>
+            <a:srgbClr val="F3F7F0"/>
           </a:solidFill>
           <a:ln w="12700">
             <a:solidFill>
@@ -2359,34 +2383,36 @@
       </p:sp>
       <p:sp>
         <p:nvSpPr>
-          <p:cNvPr id="46" name="Shape 44"/>
-          <p:cNvSpPr/>
-          <p:nvPr/>
-        </p:nvSpPr>
-        <p:spPr>
-          <a:xfrm>
-            <a:off x="411480" y="4477512"/>
-            <a:ext cx="274320" cy="274320"/>
-          </a:xfrm>
-          <a:prstGeom prst="ellipse">
-            <a:avLst/>
-          </a:prstGeom>
-          <a:solidFill>
-            <a:srgbClr val="1F3864"/>
-          </a:solidFill>
-          <a:ln/>
-        </p:spPr>
-      </p:sp>
-      <p:sp>
-        <p:nvSpPr>
-          <p:cNvPr id="47" name="Text 45"/>
-          <p:cNvSpPr/>
-          <p:nvPr/>
-        </p:nvSpPr>
-        <p:spPr>
-          <a:xfrm>
-            <a:off x="411480" y="4477512"/>
-            <a:ext cx="274320" cy="274320"/>
+          <p:cNvPr id="45" name="Shape 43"/>
+          <p:cNvSpPr/>
+          <p:nvPr/>
+        </p:nvSpPr>
+        <p:spPr>
+          <a:xfrm>
+            <a:off x="6455664" y="3630168"/>
+            <a:ext cx="585216" cy="237744"/>
+          </a:xfrm>
+          <a:prstGeom prst="roundRect">
+            <a:avLst>
+              <a:gd name="adj" fmla="val 19231"/>
+            </a:avLst>
+          </a:prstGeom>
+          <a:solidFill>
+            <a:srgbClr val="4E7C3A"/>
+          </a:solidFill>
+          <a:ln/>
+        </p:spPr>
+      </p:sp>
+      <p:sp>
+        <p:nvSpPr>
+          <p:cNvPr id="46" name="Text 44"/>
+          <p:cNvSpPr/>
+          <p:nvPr/>
+        </p:nvSpPr>
+        <p:spPr>
+          <a:xfrm>
+            <a:off x="6455664" y="3630168"/>
+            <a:ext cx="585216" cy="237744"/>
           </a:xfrm>
           <a:prstGeom prst="rect">
             <a:avLst/>
@@ -2402,7 +2428,7 @@
               <a:buNone/>
             </a:pPr>
             <a:r>
-              <a:rPr lang="en-US" sz="1200" b="1" dirty="0">
+              <a:rPr lang="en-US" sz="900" b="1" dirty="0">
                 <a:solidFill>
                   <a:srgbClr val="FFFFFF"/>
                 </a:solidFill>
@@ -2410,61 +2436,22 @@
                 <a:ea typeface="Malgun Gothic" pitchFamily="34" charset="-122"/>
                 <a:cs typeface="Malgun Gothic" pitchFamily="34" charset="-120"/>
               </a:rPr>
-              <a:t>3</a:t>
-            </a:r>
-            <a:endParaRPr lang="en-US" sz="1200" dirty="0"/>
-          </a:p>
-        </p:txBody>
-      </p:sp>
-      <p:sp>
-        <p:nvSpPr>
-          <p:cNvPr id="48" name="Text 46"/>
-          <p:cNvSpPr/>
-          <p:nvPr/>
-        </p:nvSpPr>
-        <p:spPr>
-          <a:xfrm>
-            <a:off x="758952" y="4450080"/>
-            <a:ext cx="5029200" cy="310896"/>
-          </a:xfrm>
-          <a:prstGeom prst="rect">
-            <a:avLst/>
-          </a:prstGeom>
-          <a:noFill/>
-          <a:ln/>
-        </p:spPr>
-        <p:txBody>
-          <a:bodyPr wrap="square" rtlCol="0" anchor="ctr"/>
-          <a:lstStyle/>
-          <a:p>
-            <a:pPr indent="0" marL="0">
-              <a:buNone/>
-            </a:pPr>
-            <a:r>
-              <a:rPr lang="en-US" sz="1150" b="1" dirty="0">
-                <a:solidFill>
-                  <a:srgbClr val="1F3864"/>
-                </a:solidFill>
-                <a:latin typeface="Malgun Gothic" pitchFamily="34" charset="0"/>
-                <a:ea typeface="Malgun Gothic" pitchFamily="34" charset="-122"/>
-                <a:cs typeface="Malgun Gothic" pitchFamily="34" charset="-120"/>
-              </a:rPr>
-              <a:t>스케줄링 공백 — 스케줄러가 KV를 모른다 (KV-blind)</a:t>
-            </a:r>
-            <a:endParaRPr lang="en-US" sz="1150" dirty="0"/>
-          </a:p>
-        </p:txBody>
-      </p:sp>
-      <p:sp>
-        <p:nvSpPr>
-          <p:cNvPr id="49" name="Text 47"/>
-          <p:cNvSpPr/>
-          <p:nvPr/>
-        </p:nvSpPr>
-        <p:spPr>
-          <a:xfrm>
-            <a:off x="466344" y="4760976"/>
-            <a:ext cx="5285232" cy="899160"/>
+              <a:t>목표 1</a:t>
+            </a:r>
+            <a:endParaRPr lang="en-US" sz="900" dirty="0"/>
+          </a:p>
+        </p:txBody>
+      </p:sp>
+      <p:sp>
+        <p:nvSpPr>
+          <p:cNvPr id="47" name="Text 45"/>
+          <p:cNvSpPr/>
+          <p:nvPr/>
+        </p:nvSpPr>
+        <p:spPr>
+          <a:xfrm>
+            <a:off x="7132320" y="3602736"/>
+            <a:ext cx="4629607" cy="618744"/>
           </a:xfrm>
           <a:prstGeom prst="rect">
             <a:avLst/>
@@ -2476,15 +2463,34 @@
           <a:bodyPr wrap="square" rtlCol="0" anchor="t"/>
           <a:lstStyle/>
           <a:p>
-            <a:pPr marL="127000" indent="-127000">
+            <a:pPr indent="0" marL="0">
               <a:spcAft>
-                <a:spcPts val="300"/>
+                <a:spcPts val="200"/>
               </a:spcAft>
-              <a:buSzPct val="100000"/>
-              <a:buChar char="◆"/>
-            </a:pPr>
-            <a:r>
-              <a:rPr lang="en-US" sz="930" dirty="0">
+              <a:buNone/>
+            </a:pPr>
+            <a:r>
+              <a:rPr lang="en-US" sz="980" b="1" dirty="0">
+                <a:solidFill>
+                  <a:srgbClr val="3C5F2C"/>
+                </a:solidFill>
+                <a:latin typeface="Malgun Gothic" pitchFamily="34" charset="0"/>
+                <a:ea typeface="Malgun Gothic" pitchFamily="34" charset="-122"/>
+                <a:cs typeface="Malgun Gothic" pitchFamily="34" charset="-120"/>
+              </a:rPr>
+              <a:t>KV 재사용성 제고 → 지연시간(TTFT) 개선</a:t>
+            </a:r>
+            <a:endParaRPr lang="en-US" sz="980" dirty="0"/>
+          </a:p>
+          <a:p>
+            <a:pPr indent="0" marL="0">
+              <a:spcAft>
+                <a:spcPts val="200"/>
+              </a:spcAft>
+              <a:buNone/>
+            </a:pPr>
+            <a:r>
+              <a:rPr lang="en-US" sz="860" dirty="0">
                 <a:solidFill>
                   <a:srgbClr val="262626"/>
                 </a:solidFill>
@@ -2492,86 +2498,59 @@
                 <a:ea typeface="Malgun Gothic" pitchFamily="34" charset="-122"/>
                 <a:cs typeface="Malgun Gothic" pitchFamily="34" charset="-120"/>
               </a:rPr>
-              <a:t>admission·라우팅이 cache locality 비인지 — 재사용 KV가 있는 노드를 두고 다른 노드로 배정 시 ①의 이득 소실</a:t>
-            </a:r>
-            <a:endParaRPr lang="en-US" sz="930" dirty="0"/>
-          </a:p>
-          <a:p>
-            <a:pPr marL="127000" indent="-127000">
-              <a:spcAft>
-                <a:spcPts val="300"/>
-              </a:spcAft>
-              <a:buSzPct val="100000"/>
-              <a:buChar char="◆"/>
-            </a:pPr>
-            <a:r>
-              <a:rPr lang="en-US" sz="930" dirty="0">
-                <a:solidFill>
-                  <a:srgbClr val="262626"/>
-                </a:solidFill>
-                <a:latin typeface="Malgun Gothic" pitchFamily="34" charset="0"/>
-                <a:ea typeface="Malgun Gothic" pitchFamily="34" charset="-122"/>
-                <a:cs typeface="Malgun Gothic" pitchFamily="34" charset="-120"/>
-              </a:rPr>
-              <a:t>KV 풀 포화 시 preemption·전체 재계산뿐 — 압축/강등/축출 중의 선택이라는 결정 자체가 없음</a:t>
-            </a:r>
-            <a:endParaRPr lang="en-US" sz="930" dirty="0"/>
+              <a:t>prefix + 비접두(chunk) 재사용 · 세션/사용자 영속화 · 복원 vs 재계산 비용 판단 (FR-02)</a:t>
+            </a:r>
+            <a:endParaRPr lang="en-US" sz="980" dirty="0"/>
           </a:p>
           <a:p>
             <a:pPr indent="0" marL="0">
               <a:buNone/>
             </a:pPr>
             <a:r>
-              <a:rPr lang="en-US" sz="960" b="1" dirty="0">
-                <a:solidFill>
-                  <a:srgbClr val="B3402A"/>
-                </a:solidFill>
-                <a:latin typeface="Malgun Gothic" pitchFamily="34" charset="0"/>
-                <a:ea typeface="Malgun Gothic" pitchFamily="34" charset="-122"/>
-                <a:cs typeface="Malgun Gothic" pitchFamily="34" charset="-120"/>
-              </a:rPr>
-              <a:t>⇒ 재사용·압축의 이득이 시스템 처리량으로 전환되지 않음 (R-16)</a:t>
-            </a:r>
-            <a:endParaRPr lang="en-US" sz="930" dirty="0"/>
-          </a:p>
-        </p:txBody>
-      </p:sp>
-      <p:sp>
-        <p:nvSpPr>
-          <p:cNvPr id="50" name="Shape 48"/>
-          <p:cNvSpPr/>
-          <p:nvPr/>
-        </p:nvSpPr>
-        <p:spPr>
-          <a:xfrm>
-            <a:off x="5934456" y="4936236"/>
-            <a:ext cx="393192" cy="256032"/>
-          </a:xfrm>
-          <a:prstGeom prst="rightArrow">
-            <a:avLst/>
-          </a:prstGeom>
-          <a:solidFill>
-            <a:srgbClr val="FFC000"/>
-          </a:solidFill>
-          <a:ln/>
-        </p:spPr>
-      </p:sp>
-      <p:sp>
-        <p:nvSpPr>
-          <p:cNvPr id="51" name="Shape 49"/>
-          <p:cNvSpPr/>
-          <p:nvPr/>
-        </p:nvSpPr>
-        <p:spPr>
-          <a:xfrm>
-            <a:off x="6382512" y="4395216"/>
-            <a:ext cx="5489143" cy="1338072"/>
-          </a:xfrm>
-          <a:prstGeom prst="rect">
-            <a:avLst/>
-          </a:prstGeom>
-          <a:solidFill>
-            <a:srgbClr val="F3F7F0"/>
+              <a:rPr lang="en-US" sz="880" b="1" dirty="0">
+                <a:solidFill>
+                  <a:srgbClr val="1F3864"/>
+                </a:solidFill>
+                <a:latin typeface="Malgun Gothic" pitchFamily="34" charset="0"/>
+                <a:ea typeface="Malgun Gothic" pitchFamily="34" charset="-122"/>
+                <a:cs typeface="Malgun Gothic" pitchFamily="34" charset="-120"/>
+              </a:rPr>
+              <a:t>판정: </a:t>
+            </a:r>
+            <a:pPr indent="0" marL="0">
+              <a:buNone/>
+            </a:pPr>
+            <a:r>
+              <a:rPr lang="en-US" sz="880" dirty="0">
+                <a:solidFill>
+                  <a:srgbClr val="1F3864"/>
+                </a:solidFill>
+                <a:latin typeface="Malgun Gothic" pitchFamily="34" charset="0"/>
+                <a:ea typeface="Malgun Gothic" pitchFamily="34" charset="-122"/>
+                <a:cs typeface="Malgun Gothic" pitchFamily="34" charset="-120"/>
+              </a:rPr>
+              <a:t>TTFT ≥ 2× (QA1) — CacheBlend 2.2–3.3×(B) 앵커</a:t>
+            </a:r>
+            <a:endParaRPr lang="en-US" sz="980" dirty="0"/>
+          </a:p>
+        </p:txBody>
+      </p:sp>
+      <p:sp>
+        <p:nvSpPr>
+          <p:cNvPr id="48" name="Shape 46"/>
+          <p:cNvSpPr/>
+          <p:nvPr/>
+        </p:nvSpPr>
+        <p:spPr>
+          <a:xfrm>
+            <a:off x="320040" y="4349496"/>
+            <a:ext cx="5559552" cy="691896"/>
+          </a:xfrm>
+          <a:prstGeom prst="rect">
+            <a:avLst/>
+          </a:prstGeom>
+          <a:solidFill>
+            <a:srgbClr val="F5F6F8"/>
           </a:solidFill>
           <a:ln w="12700">
             <a:solidFill>
@@ -2583,18 +2562,201 @@
       </p:sp>
       <p:sp>
         <p:nvSpPr>
+          <p:cNvPr id="49" name="Shape 47"/>
+          <p:cNvSpPr/>
+          <p:nvPr/>
+        </p:nvSpPr>
+        <p:spPr>
+          <a:xfrm>
+            <a:off x="393192" y="4413504"/>
+            <a:ext cx="237744" cy="237744"/>
+          </a:xfrm>
+          <a:prstGeom prst="ellipse">
+            <a:avLst/>
+          </a:prstGeom>
+          <a:solidFill>
+            <a:srgbClr val="1F3864"/>
+          </a:solidFill>
+          <a:ln/>
+        </p:spPr>
+      </p:sp>
+      <p:sp>
+        <p:nvSpPr>
+          <p:cNvPr id="50" name="Text 48"/>
+          <p:cNvSpPr/>
+          <p:nvPr/>
+        </p:nvSpPr>
+        <p:spPr>
+          <a:xfrm>
+            <a:off x="393192" y="4413504"/>
+            <a:ext cx="237744" cy="237744"/>
+          </a:xfrm>
+          <a:prstGeom prst="rect">
+            <a:avLst/>
+          </a:prstGeom>
+          <a:noFill/>
+          <a:ln/>
+        </p:spPr>
+        <p:txBody>
+          <a:bodyPr wrap="square" rtlCol="0" anchor="ctr"/>
+          <a:lstStyle/>
+          <a:p>
+            <a:pPr algn="ctr" indent="0" marL="0">
+              <a:buNone/>
+            </a:pPr>
+            <a:r>
+              <a:rPr lang="en-US" sz="1050" b="1" dirty="0">
+                <a:solidFill>
+                  <a:srgbClr val="FFFFFF"/>
+                </a:solidFill>
+                <a:latin typeface="Malgun Gothic" pitchFamily="34" charset="0"/>
+                <a:ea typeface="Malgun Gothic" pitchFamily="34" charset="-122"/>
+                <a:cs typeface="Malgun Gothic" pitchFamily="34" charset="-120"/>
+              </a:rPr>
+              <a:t>2</a:t>
+            </a:r>
+            <a:endParaRPr lang="en-US" sz="1050" dirty="0"/>
+          </a:p>
+        </p:txBody>
+      </p:sp>
+      <p:sp>
+        <p:nvSpPr>
+          <p:cNvPr id="51" name="Text 49"/>
+          <p:cNvSpPr/>
+          <p:nvPr/>
+        </p:nvSpPr>
+        <p:spPr>
+          <a:xfrm>
+            <a:off x="704088" y="4386072"/>
+            <a:ext cx="5065776" cy="618744"/>
+          </a:xfrm>
+          <a:prstGeom prst="rect">
+            <a:avLst/>
+          </a:prstGeom>
+          <a:noFill/>
+          <a:ln/>
+        </p:spPr>
+        <p:txBody>
+          <a:bodyPr wrap="square" rtlCol="0" anchor="t"/>
+          <a:lstStyle/>
+          <a:p>
+            <a:pPr indent="0" marL="0">
+              <a:spcAft>
+                <a:spcPts val="200"/>
+              </a:spcAft>
+              <a:buNone/>
+            </a:pPr>
+            <a:r>
+              <a:rPr lang="en-US" sz="980" b="1" dirty="0">
+                <a:solidFill>
+                  <a:srgbClr val="1F3864"/>
+                </a:solidFill>
+                <a:latin typeface="Malgun Gothic" pitchFamily="34" charset="0"/>
+                <a:ea typeface="Malgun Gothic" pitchFamily="34" charset="-122"/>
+                <a:cs typeface="Malgun Gothic" pitchFamily="34" charset="-120"/>
+              </a:rPr>
+              <a:t>압축 공백 — 정적·일률 적용, 품질과 피드백 없음 (줄이기의 부재)</a:t>
+            </a:r>
+            <a:endParaRPr lang="en-US" sz="980" dirty="0"/>
+          </a:p>
+          <a:p>
+            <a:pPr indent="0" marL="0">
+              <a:spcAft>
+                <a:spcPts val="200"/>
+              </a:spcAft>
+              <a:buNone/>
+            </a:pPr>
+            <a:r>
+              <a:rPr lang="en-US" sz="860" dirty="0">
+                <a:solidFill>
+                  <a:srgbClr val="262626"/>
+                </a:solidFill>
+                <a:latin typeface="Malgun Gothic" pitchFamily="34" charset="0"/>
+                <a:ea typeface="Malgun Gothic" pitchFamily="34" charset="-122"/>
+                <a:cs typeface="Malgun Gothic" pitchFamily="34" charset="-120"/>
+              </a:rPr>
+              <a:t>2-bit 양자화·token eviction은 입증됐으나 전역 고정 설정 — 요청별 품질 예산·차등 집행·품질 피드백 루프 부재</a:t>
+            </a:r>
+            <a:endParaRPr lang="en-US" sz="980" dirty="0"/>
+          </a:p>
+          <a:p>
+            <a:pPr indent="0" marL="0">
+              <a:buNone/>
+            </a:pPr>
+            <a:r>
+              <a:rPr lang="en-US" sz="880" b="1" dirty="0">
+                <a:solidFill>
+                  <a:srgbClr val="B3402A"/>
+                </a:solidFill>
+                <a:latin typeface="Malgun Gothic" pitchFamily="34" charset="0"/>
+                <a:ea typeface="Malgun Gothic" pitchFamily="34" charset="-122"/>
+                <a:cs typeface="Malgun Gothic" pitchFamily="34" charset="-120"/>
+              </a:rPr>
+              <a:t>⇒ 용량·대역폭 이중 병목 지속, 품질 리스크 통제 불가 (R-01·02·06)</a:t>
+            </a:r>
+            <a:endParaRPr lang="en-US" sz="980" dirty="0"/>
+          </a:p>
+        </p:txBody>
+      </p:sp>
+      <p:sp>
+        <p:nvSpPr>
           <p:cNvPr id="52" name="Shape 50"/>
           <p:cNvSpPr/>
           <p:nvPr/>
         </p:nvSpPr>
         <p:spPr>
           <a:xfrm>
-            <a:off x="6473952" y="4477512"/>
-            <a:ext cx="658368" cy="274320"/>
+            <a:off x="5934456" y="4576572"/>
+            <a:ext cx="393192" cy="237744"/>
+          </a:xfrm>
+          <a:prstGeom prst="rightArrow">
+            <a:avLst/>
+          </a:prstGeom>
+          <a:solidFill>
+            <a:srgbClr val="FFC000"/>
+          </a:solidFill>
+          <a:ln/>
+        </p:spPr>
+      </p:sp>
+      <p:sp>
+        <p:nvSpPr>
+          <p:cNvPr id="53" name="Shape 51"/>
+          <p:cNvSpPr/>
+          <p:nvPr/>
+        </p:nvSpPr>
+        <p:spPr>
+          <a:xfrm>
+            <a:off x="6382512" y="4349496"/>
+            <a:ext cx="5489143" cy="691896"/>
+          </a:xfrm>
+          <a:prstGeom prst="rect">
+            <a:avLst/>
+          </a:prstGeom>
+          <a:solidFill>
+            <a:srgbClr val="F3F7F0"/>
+          </a:solidFill>
+          <a:ln w="12700">
+            <a:solidFill>
+              <a:srgbClr val="A6A6A6"/>
+            </a:solidFill>
+            <a:prstDash val="solid"/>
+          </a:ln>
+        </p:spPr>
+      </p:sp>
+      <p:sp>
+        <p:nvSpPr>
+          <p:cNvPr id="54" name="Shape 52"/>
+          <p:cNvSpPr/>
+          <p:nvPr/>
+        </p:nvSpPr>
+        <p:spPr>
+          <a:xfrm>
+            <a:off x="6455664" y="4413504"/>
+            <a:ext cx="585216" cy="237744"/>
           </a:xfrm>
           <a:prstGeom prst="roundRect">
             <a:avLst>
-              <a:gd name="adj" fmla="val 20000"/>
+              <a:gd name="adj" fmla="val 19231"/>
             </a:avLst>
           </a:prstGeom>
           <a:solidFill>
@@ -2605,14 +2767,14 @@
       </p:sp>
       <p:sp>
         <p:nvSpPr>
-          <p:cNvPr id="53" name="Text 51"/>
-          <p:cNvSpPr/>
-          <p:nvPr/>
-        </p:nvSpPr>
-        <p:spPr>
-          <a:xfrm>
-            <a:off x="6473952" y="4477512"/>
-            <a:ext cx="658368" cy="274320"/>
+          <p:cNvPr id="55" name="Text 53"/>
+          <p:cNvSpPr/>
+          <p:nvPr/>
+        </p:nvSpPr>
+        <p:spPr>
+          <a:xfrm>
+            <a:off x="6455664" y="4413504"/>
+            <a:ext cx="585216" cy="237744"/>
           </a:xfrm>
           <a:prstGeom prst="rect">
             <a:avLst/>
@@ -2628,7 +2790,7 @@
               <a:buNone/>
             </a:pPr>
             <a:r>
-              <a:rPr lang="en-US" sz="1000" b="1" dirty="0">
+              <a:rPr lang="en-US" sz="900" b="1" dirty="0">
                 <a:solidFill>
                   <a:srgbClr val="FFFFFF"/>
                 </a:solidFill>
@@ -2636,22 +2798,160 @@
                 <a:ea typeface="Malgun Gothic" pitchFamily="34" charset="-122"/>
                 <a:cs typeface="Malgun Gothic" pitchFamily="34" charset="-120"/>
               </a:rPr>
-              <a:t>목표 3</a:t>
-            </a:r>
-            <a:endParaRPr lang="en-US" sz="1000" dirty="0"/>
-          </a:p>
-        </p:txBody>
-      </p:sp>
-      <p:sp>
-        <p:nvSpPr>
-          <p:cNvPr id="54" name="Text 52"/>
-          <p:cNvSpPr/>
-          <p:nvPr/>
-        </p:nvSpPr>
-        <p:spPr>
-          <a:xfrm>
-            <a:off x="7223760" y="4450080"/>
-            <a:ext cx="4556455" cy="310896"/>
+              <a:t>목표 2</a:t>
+            </a:r>
+            <a:endParaRPr lang="en-US" sz="900" dirty="0"/>
+          </a:p>
+        </p:txBody>
+      </p:sp>
+      <p:sp>
+        <p:nvSpPr>
+          <p:cNvPr id="56" name="Text 54"/>
+          <p:cNvSpPr/>
+          <p:nvPr/>
+        </p:nvSpPr>
+        <p:spPr>
+          <a:xfrm>
+            <a:off x="7132320" y="4386072"/>
+            <a:ext cx="4629607" cy="618744"/>
+          </a:xfrm>
+          <a:prstGeom prst="rect">
+            <a:avLst/>
+          </a:prstGeom>
+          <a:noFill/>
+          <a:ln/>
+        </p:spPr>
+        <p:txBody>
+          <a:bodyPr wrap="square" rtlCol="0" anchor="t"/>
+          <a:lstStyle/>
+          <a:p>
+            <a:pPr indent="0" marL="0">
+              <a:spcAft>
+                <a:spcPts val="200"/>
+              </a:spcAft>
+              <a:buNone/>
+            </a:pPr>
+            <a:r>
+              <a:rPr lang="en-US" sz="980" b="1" dirty="0">
+                <a:solidFill>
+                  <a:srgbClr val="3C5F2C"/>
+                </a:solidFill>
+                <a:latin typeface="Malgun Gothic" pitchFamily="34" charset="0"/>
+                <a:ea typeface="Malgun Gothic" pitchFamily="34" charset="-122"/>
+                <a:cs typeface="Malgun Gothic" pitchFamily="34" charset="-120"/>
+              </a:rPr>
+              <a:t>정확도 유지 KV 압축 → 메모리 병목 해소 → 지연·처리량 개선</a:t>
+            </a:r>
+            <a:endParaRPr lang="en-US" sz="980" dirty="0"/>
+          </a:p>
+          <a:p>
+            <a:pPr indent="0" marL="0">
+              <a:spcAft>
+                <a:spcPts val="200"/>
+              </a:spcAft>
+              <a:buNone/>
+            </a:pPr>
+            <a:r>
+              <a:rPr lang="en-US" sz="860" dirty="0">
+                <a:solidFill>
+                  <a:srgbClr val="262626"/>
+                </a:solidFill>
+                <a:latin typeface="Malgun Gothic" pitchFamily="34" charset="0"/>
+                <a:ea typeface="Malgun Gothic" pitchFamily="34" charset="-122"/>
+                <a:cs typeface="Malgun Gothic" pitchFamily="34" charset="-120"/>
+              </a:rPr>
+              <a:t>품질 bound(ΔF1 ≤ 1%p, QA3 gate) 안에서 요청별 차등 압축 — training-free(C-03) (FR-03·04)</a:t>
+            </a:r>
+            <a:endParaRPr lang="en-US" sz="980" dirty="0"/>
+          </a:p>
+          <a:p>
+            <a:pPr indent="0" marL="0">
+              <a:buNone/>
+            </a:pPr>
+            <a:r>
+              <a:rPr lang="en-US" sz="880" b="1" dirty="0">
+                <a:solidFill>
+                  <a:srgbClr val="1F3864"/>
+                </a:solidFill>
+                <a:latin typeface="Malgun Gothic" pitchFamily="34" charset="0"/>
+                <a:ea typeface="Malgun Gothic" pitchFamily="34" charset="-122"/>
+                <a:cs typeface="Malgun Gothic" pitchFamily="34" charset="-120"/>
+              </a:rPr>
+              <a:t>판정: </a:t>
+            </a:r>
+            <a:pPr indent="0" marL="0">
+              <a:buNone/>
+            </a:pPr>
+            <a:r>
+              <a:rPr lang="en-US" sz="880" dirty="0">
+                <a:solidFill>
+                  <a:srgbClr val="1F3864"/>
+                </a:solidFill>
+                <a:latin typeface="Malgun Gothic" pitchFamily="34" charset="0"/>
+                <a:ea typeface="Malgun Gothic" pitchFamily="34" charset="-122"/>
+                <a:cs typeface="Malgun Gothic" pitchFamily="34" charset="-120"/>
+              </a:rPr>
+              <a:t>유효 KV 용량 ≥ 3× (QA4) · throughput ≥ 2× (QA2)</a:t>
+            </a:r>
+            <a:endParaRPr lang="en-US" sz="980" dirty="0"/>
+          </a:p>
+        </p:txBody>
+      </p:sp>
+      <p:sp>
+        <p:nvSpPr>
+          <p:cNvPr id="57" name="Shape 55"/>
+          <p:cNvSpPr/>
+          <p:nvPr/>
+        </p:nvSpPr>
+        <p:spPr>
+          <a:xfrm>
+            <a:off x="320040" y="5132832"/>
+            <a:ext cx="5559552" cy="691896"/>
+          </a:xfrm>
+          <a:prstGeom prst="rect">
+            <a:avLst/>
+          </a:prstGeom>
+          <a:solidFill>
+            <a:srgbClr val="F5F6F8"/>
+          </a:solidFill>
+          <a:ln w="12700">
+            <a:solidFill>
+              <a:srgbClr val="A6A6A6"/>
+            </a:solidFill>
+            <a:prstDash val="solid"/>
+          </a:ln>
+        </p:spPr>
+      </p:sp>
+      <p:sp>
+        <p:nvSpPr>
+          <p:cNvPr id="58" name="Shape 56"/>
+          <p:cNvSpPr/>
+          <p:nvPr/>
+        </p:nvSpPr>
+        <p:spPr>
+          <a:xfrm>
+            <a:off x="393192" y="5196840"/>
+            <a:ext cx="237744" cy="237744"/>
+          </a:xfrm>
+          <a:prstGeom prst="ellipse">
+            <a:avLst/>
+          </a:prstGeom>
+          <a:solidFill>
+            <a:srgbClr val="1F3864"/>
+          </a:solidFill>
+          <a:ln/>
+        </p:spPr>
+      </p:sp>
+      <p:sp>
+        <p:nvSpPr>
+          <p:cNvPr id="59" name="Text 57"/>
+          <p:cNvSpPr/>
+          <p:nvPr/>
+        </p:nvSpPr>
+        <p:spPr>
+          <a:xfrm>
+            <a:off x="393192" y="5196840"/>
+            <a:ext cx="237744" cy="237744"/>
           </a:xfrm>
           <a:prstGeom prst="rect">
             <a:avLst/>
@@ -2663,34 +2963,34 @@
           <a:bodyPr wrap="square" rtlCol="0" anchor="ctr"/>
           <a:lstStyle/>
           <a:p>
-            <a:pPr indent="0" marL="0">
-              <a:buNone/>
-            </a:pPr>
-            <a:r>
-              <a:rPr lang="en-US" sz="1150" b="1" dirty="0">
-                <a:solidFill>
-                  <a:srgbClr val="3C5F2C"/>
-                </a:solidFill>
-                <a:latin typeface="Malgun Gothic" pitchFamily="34" charset="0"/>
-                <a:ea typeface="Malgun Gothic" pitchFamily="34" charset="-122"/>
-                <a:cs typeface="Malgun Gothic" pitchFamily="34" charset="-120"/>
-              </a:rPr>
-              <a:t>KV 캐시 인지형 동적 스케줄링 → 처리량 개선</a:t>
-            </a:r>
-            <a:endParaRPr lang="en-US" sz="1150" dirty="0"/>
-          </a:p>
-        </p:txBody>
-      </p:sp>
-      <p:sp>
-        <p:nvSpPr>
-          <p:cNvPr id="55" name="Text 53"/>
-          <p:cNvSpPr/>
-          <p:nvPr/>
-        </p:nvSpPr>
-        <p:spPr>
-          <a:xfrm>
-            <a:off x="6528816" y="4760976"/>
-            <a:ext cx="5214823" cy="899160"/>
+            <a:pPr algn="ctr" indent="0" marL="0">
+              <a:buNone/>
+            </a:pPr>
+            <a:r>
+              <a:rPr lang="en-US" sz="1050" b="1" dirty="0">
+                <a:solidFill>
+                  <a:srgbClr val="FFFFFF"/>
+                </a:solidFill>
+                <a:latin typeface="Malgun Gothic" pitchFamily="34" charset="0"/>
+                <a:ea typeface="Malgun Gothic" pitchFamily="34" charset="-122"/>
+                <a:cs typeface="Malgun Gothic" pitchFamily="34" charset="-120"/>
+              </a:rPr>
+              <a:t>3</a:t>
+            </a:r>
+            <a:endParaRPr lang="en-US" sz="1050" dirty="0"/>
+          </a:p>
+        </p:txBody>
+      </p:sp>
+      <p:sp>
+        <p:nvSpPr>
+          <p:cNvPr id="60" name="Text 58"/>
+          <p:cNvSpPr/>
+          <p:nvPr/>
+        </p:nvSpPr>
+        <p:spPr>
+          <a:xfrm>
+            <a:off x="704088" y="5169408"/>
+            <a:ext cx="5065776" cy="618744"/>
           </a:xfrm>
           <a:prstGeom prst="rect">
             <a:avLst/>
@@ -2702,15 +3002,34 @@
           <a:bodyPr wrap="square" rtlCol="0" anchor="t"/>
           <a:lstStyle/>
           <a:p>
-            <a:pPr marL="127000" indent="-127000">
+            <a:pPr indent="0" marL="0">
               <a:spcAft>
-                <a:spcPts val="300"/>
+                <a:spcPts val="200"/>
               </a:spcAft>
-              <a:buSzPct val="100000"/>
-              <a:buChar char="◆"/>
-            </a:pPr>
-            <a:r>
-              <a:rPr lang="en-US" sz="930" dirty="0">
+              <a:buNone/>
+            </a:pPr>
+            <a:r>
+              <a:rPr lang="en-US" sz="980" b="1" dirty="0">
+                <a:solidFill>
+                  <a:srgbClr val="1F3864"/>
+                </a:solidFill>
+                <a:latin typeface="Malgun Gothic" pitchFamily="34" charset="0"/>
+                <a:ea typeface="Malgun Gothic" pitchFamily="34" charset="-122"/>
+                <a:cs typeface="Malgun Gothic" pitchFamily="34" charset="-120"/>
+              </a:rPr>
+              <a:t>스케줄링 공백 — 스케줄러가 KV를 모른다, KV-blind (잘 두고 고르기의 부재)</a:t>
+            </a:r>
+            <a:endParaRPr lang="en-US" sz="980" dirty="0"/>
+          </a:p>
+          <a:p>
+            <a:pPr indent="0" marL="0">
+              <a:spcAft>
+                <a:spcPts val="200"/>
+              </a:spcAft>
+              <a:buNone/>
+            </a:pPr>
+            <a:r>
+              <a:rPr lang="en-US" sz="860" dirty="0">
                 <a:solidFill>
                   <a:srgbClr val="262626"/>
                 </a:solidFill>
@@ -2718,16 +3037,201 @@
                 <a:ea typeface="Malgun Gothic" pitchFamily="34" charset="-122"/>
                 <a:cs typeface="Malgun Gothic" pitchFamily="34" charset="-120"/>
               </a:rPr>
+              <a:t>admission·라우팅이 cache locality 비인지(재사용 이득 소실), KV 풀 포화 시 preemption·전체 재계산뿐 — 압축/강등/축출 선택 없음</a:t>
+            </a:r>
+            <a:endParaRPr lang="en-US" sz="980" dirty="0"/>
+          </a:p>
+          <a:p>
+            <a:pPr indent="0" marL="0">
+              <a:buNone/>
+            </a:pPr>
+            <a:r>
+              <a:rPr lang="en-US" sz="880" b="1" dirty="0">
+                <a:solidFill>
+                  <a:srgbClr val="B3402A"/>
+                </a:solidFill>
+                <a:latin typeface="Malgun Gothic" pitchFamily="34" charset="0"/>
+                <a:ea typeface="Malgun Gothic" pitchFamily="34" charset="-122"/>
+                <a:cs typeface="Malgun Gothic" pitchFamily="34" charset="-120"/>
+              </a:rPr>
+              <a:t>⇒ 재사용·압축의 이득이 시스템 처리량으로 전환되지 않음 (R-16)</a:t>
+            </a:r>
+            <a:endParaRPr lang="en-US" sz="980" dirty="0"/>
+          </a:p>
+        </p:txBody>
+      </p:sp>
+      <p:sp>
+        <p:nvSpPr>
+          <p:cNvPr id="61" name="Shape 59"/>
+          <p:cNvSpPr/>
+          <p:nvPr/>
+        </p:nvSpPr>
+        <p:spPr>
+          <a:xfrm>
+            <a:off x="5934456" y="5359908"/>
+            <a:ext cx="393192" cy="237744"/>
+          </a:xfrm>
+          <a:prstGeom prst="rightArrow">
+            <a:avLst/>
+          </a:prstGeom>
+          <a:solidFill>
+            <a:srgbClr val="FFC000"/>
+          </a:solidFill>
+          <a:ln/>
+        </p:spPr>
+      </p:sp>
+      <p:sp>
+        <p:nvSpPr>
+          <p:cNvPr id="62" name="Shape 60"/>
+          <p:cNvSpPr/>
+          <p:nvPr/>
+        </p:nvSpPr>
+        <p:spPr>
+          <a:xfrm>
+            <a:off x="6382512" y="5132832"/>
+            <a:ext cx="5489143" cy="691896"/>
+          </a:xfrm>
+          <a:prstGeom prst="rect">
+            <a:avLst/>
+          </a:prstGeom>
+          <a:solidFill>
+            <a:srgbClr val="F3F7F0"/>
+          </a:solidFill>
+          <a:ln w="12700">
+            <a:solidFill>
+              <a:srgbClr val="A6A6A6"/>
+            </a:solidFill>
+            <a:prstDash val="solid"/>
+          </a:ln>
+        </p:spPr>
+      </p:sp>
+      <p:sp>
+        <p:nvSpPr>
+          <p:cNvPr id="63" name="Shape 61"/>
+          <p:cNvSpPr/>
+          <p:nvPr/>
+        </p:nvSpPr>
+        <p:spPr>
+          <a:xfrm>
+            <a:off x="6455664" y="5196840"/>
+            <a:ext cx="585216" cy="237744"/>
+          </a:xfrm>
+          <a:prstGeom prst="roundRect">
+            <a:avLst>
+              <a:gd name="adj" fmla="val 19231"/>
+            </a:avLst>
+          </a:prstGeom>
+          <a:solidFill>
+            <a:srgbClr val="4E7C3A"/>
+          </a:solidFill>
+          <a:ln/>
+        </p:spPr>
+      </p:sp>
+      <p:sp>
+        <p:nvSpPr>
+          <p:cNvPr id="64" name="Text 62"/>
+          <p:cNvSpPr/>
+          <p:nvPr/>
+        </p:nvSpPr>
+        <p:spPr>
+          <a:xfrm>
+            <a:off x="6455664" y="5196840"/>
+            <a:ext cx="585216" cy="237744"/>
+          </a:xfrm>
+          <a:prstGeom prst="rect">
+            <a:avLst/>
+          </a:prstGeom>
+          <a:noFill/>
+          <a:ln/>
+        </p:spPr>
+        <p:txBody>
+          <a:bodyPr wrap="square" rtlCol="0" anchor="ctr"/>
+          <a:lstStyle/>
+          <a:p>
+            <a:pPr algn="ctr" indent="0" marL="0">
+              <a:buNone/>
+            </a:pPr>
+            <a:r>
+              <a:rPr lang="en-US" sz="900" b="1" dirty="0">
+                <a:solidFill>
+                  <a:srgbClr val="FFFFFF"/>
+                </a:solidFill>
+                <a:latin typeface="Malgun Gothic" pitchFamily="34" charset="0"/>
+                <a:ea typeface="Malgun Gothic" pitchFamily="34" charset="-122"/>
+                <a:cs typeface="Malgun Gothic" pitchFamily="34" charset="-120"/>
+              </a:rPr>
+              <a:t>목표 3</a:t>
+            </a:r>
+            <a:endParaRPr lang="en-US" sz="900" dirty="0"/>
+          </a:p>
+        </p:txBody>
+      </p:sp>
+      <p:sp>
+        <p:nvSpPr>
+          <p:cNvPr id="65" name="Text 63"/>
+          <p:cNvSpPr/>
+          <p:nvPr/>
+        </p:nvSpPr>
+        <p:spPr>
+          <a:xfrm>
+            <a:off x="7132320" y="5169408"/>
+            <a:ext cx="4629607" cy="618744"/>
+          </a:xfrm>
+          <a:prstGeom prst="rect">
+            <a:avLst/>
+          </a:prstGeom>
+          <a:noFill/>
+          <a:ln/>
+        </p:spPr>
+        <p:txBody>
+          <a:bodyPr wrap="square" rtlCol="0" anchor="t"/>
+          <a:lstStyle/>
+          <a:p>
+            <a:pPr indent="0" marL="0">
+              <a:spcAft>
+                <a:spcPts val="200"/>
+              </a:spcAft>
+              <a:buNone/>
+            </a:pPr>
+            <a:r>
+              <a:rPr lang="en-US" sz="980" b="1" dirty="0">
+                <a:solidFill>
+                  <a:srgbClr val="3C5F2C"/>
+                </a:solidFill>
+                <a:latin typeface="Malgun Gothic" pitchFamily="34" charset="0"/>
+                <a:ea typeface="Malgun Gothic" pitchFamily="34" charset="-122"/>
+                <a:cs typeface="Malgun Gothic" pitchFamily="34" charset="-120"/>
+              </a:rPr>
+              <a:t>KV 캐시 인지형 동적 스케줄링 → 처리량 개선</a:t>
+            </a:r>
+            <a:endParaRPr lang="en-US" sz="980" dirty="0"/>
+          </a:p>
+          <a:p>
+            <a:pPr indent="0" marL="0">
+              <a:spcAft>
+                <a:spcPts val="200"/>
+              </a:spcAft>
+              <a:buNone/>
+            </a:pPr>
+            <a:r>
+              <a:rPr lang="en-US" sz="860" dirty="0">
+                <a:solidFill>
+                  <a:srgbClr val="262626"/>
+                </a:solidFill>
+                <a:latin typeface="Malgun Gothic" pitchFamily="34" charset="0"/>
+                <a:ea typeface="Malgun Gothic" pitchFamily="34" charset="-122"/>
+                <a:cs typeface="Malgun Gothic" pitchFamily="34" charset="-120"/>
+              </a:rPr>
               <a:t>cache-hit/locality 인지 admission·라우팅 + KV 공간 확보(압축/강등/축출 최적 선택) — 요청별 SLO 차등 (FR-05)</a:t>
             </a:r>
-            <a:endParaRPr lang="en-US" sz="930" dirty="0"/>
+            <a:endParaRPr lang="en-US" sz="980" dirty="0"/>
           </a:p>
           <a:p>
             <a:pPr indent="0" marL="0">
               <a:buNone/>
             </a:pPr>
             <a:r>
-              <a:rPr lang="en-US" sz="960" b="1" dirty="0">
+              <a:rPr lang="en-US" sz="880" b="1" dirty="0">
                 <a:solidFill>
                   <a:srgbClr val="1F3864"/>
                 </a:solidFill>
@@ -2741,7 +3245,7 @@
               <a:buNone/>
             </a:pPr>
             <a:r>
-              <a:rPr lang="en-US" sz="960" dirty="0">
+              <a:rPr lang="en-US" sz="880" dirty="0">
                 <a:solidFill>
                   <a:srgbClr val="1F3864"/>
                 </a:solidFill>
@@ -2751,20 +3255,20 @@
               </a:rPr>
               <a:t>throughput ≥ 2× (QA2) — 축별 ablation으로 순기여 분리</a:t>
             </a:r>
-            <a:endParaRPr lang="en-US" sz="930" dirty="0"/>
-          </a:p>
-        </p:txBody>
-      </p:sp>
-      <p:sp>
-        <p:nvSpPr>
-          <p:cNvPr id="56" name="Shape 54"/>
-          <p:cNvSpPr/>
-          <p:nvPr/>
-        </p:nvSpPr>
-        <p:spPr>
-          <a:xfrm>
-            <a:off x="320040" y="5843016"/>
-            <a:ext cx="11551615" cy="603504"/>
+            <a:endParaRPr lang="en-US" sz="980" dirty="0"/>
+          </a:p>
+        </p:txBody>
+      </p:sp>
+      <p:sp>
+        <p:nvSpPr>
+          <p:cNvPr id="66" name="Shape 64"/>
+          <p:cNvSpPr/>
+          <p:nvPr/>
+        </p:nvSpPr>
+        <p:spPr>
+          <a:xfrm>
+            <a:off x="320040" y="5916168"/>
+            <a:ext cx="11551615" cy="530352"/>
           </a:xfrm>
           <a:prstGeom prst="rect">
             <a:avLst/>
@@ -2782,14 +3286,14 @@
       </p:sp>
       <p:sp>
         <p:nvSpPr>
-          <p:cNvPr id="57" name="Text 55"/>
-          <p:cNvSpPr/>
-          <p:nvPr/>
-        </p:nvSpPr>
-        <p:spPr>
-          <a:xfrm>
-            <a:off x="457200" y="5843016"/>
-            <a:ext cx="11277295" cy="603504"/>
+          <p:cNvPr id="67" name="Text 65"/>
+          <p:cNvSpPr/>
+          <p:nvPr/>
+        </p:nvSpPr>
+        <p:spPr>
+          <a:xfrm>
+            <a:off x="448056" y="5916168"/>
+            <a:ext cx="11295583" cy="530352"/>
           </a:xfrm>
           <a:prstGeom prst="rect">
             <a:avLst/>
@@ -2805,7 +3309,7 @@
               <a:buNone/>
             </a:pPr>
             <a:r>
-              <a:rPr lang="en-US" sz="1050" b="1" dirty="0">
+              <a:rPr lang="en-US" sz="1000" b="1" dirty="0">
                 <a:solidFill>
                   <a:srgbClr val="843C0C"/>
                 </a:solidFill>
@@ -2819,7 +3323,7 @@
               <a:buNone/>
             </a:pPr>
             <a:r>
-              <a:rPr lang="en-US" sz="1050" dirty="0">
+              <a:rPr lang="en-US" sz="1000" dirty="0">
                 <a:solidFill>
                   <a:srgbClr val="262626"/>
                 </a:solidFill>
@@ -2827,13 +3331,13 @@
                 <a:ea typeface="Malgun Gothic" pitchFamily="34" charset="-122"/>
                 <a:cs typeface="Malgun Gothic" pitchFamily="34" charset="-120"/>
               </a:rPr>
-              <a:t>세 공백은 결합되어 있다(재사용은 남는 것을, 압축은 비용을, 스케줄링은 활용을 결정) — 그러나 셋을 조율하는 계층이 어느 런타임에도 없다.  </a:t>
+              <a:t>세 지렛대는 결합되어 있다(재사용은 남는 것을, 압축은 비용을, 스케줄링은 활용을 결정) — 그러나 셋을 조율하는 계층이 어느 런타임에도 없다.  </a:t>
             </a:r>
             <a:pPr indent="0" marL="0">
               <a:buNone/>
             </a:pPr>
             <a:r>
-              <a:rPr lang="en-US" sz="1050" b="1" dirty="0">
+              <a:rPr lang="en-US" sz="1000" b="1" dirty="0">
                 <a:solidFill>
                   <a:srgbClr val="1F3864"/>
                 </a:solidFill>
@@ -2847,7 +3351,7 @@
               <a:buNone/>
             </a:pPr>
             <a:r>
-              <a:rPr lang="en-US" sz="950" dirty="0">
+              <a:rPr lang="en-US" sz="900" dirty="0">
                 <a:solidFill>
                   <a:srgbClr val="7F7F7F"/>
                 </a:solidFill>
@@ -2857,7 +3361,7 @@
               </a:rPr>
               <a:t>  (2단계 진화: 자사 memory-centric 디바이스 확장 — MCR 완성)</a:t>
             </a:r>
-            <a:endParaRPr lang="en-US" sz="1050" dirty="0"/>
+            <a:endParaRPr lang="en-US" sz="1000" dirty="0"/>
           </a:p>
         </p:txBody>
       </p:sp>

--- a/docs/mcr_necessity_kv.pptx
+++ b/docs/mcr_necessity_kv.pptx
@@ -2655,7 +2655,7 @@
                 <a:ea typeface="Malgun Gothic" pitchFamily="34" charset="-122"/>
                 <a:cs typeface="Malgun Gothic" pitchFamily="34" charset="-120"/>
               </a:rPr>
-              <a:t>압축 공백 — 정적·일률 적용, 품질과 피드백 없음 (줄이기의 부재)</a:t>
+              <a:t>압축 공백 — 중요도 판정이 정적·전역 일률 (줄이기의 부재)</a:t>
             </a:r>
             <a:endParaRPr lang="en-US" sz="980" dirty="0"/>
           </a:p>
@@ -2675,7 +2675,7 @@
                 <a:ea typeface="Malgun Gothic" pitchFamily="34" charset="-122"/>
                 <a:cs typeface="Malgun Gothic" pitchFamily="34" charset="-120"/>
               </a:rPr>
-              <a:t>2-bit 양자화·token eviction은 입증됐으나 전역 고정 설정 — 요청별 품질 예산·차등 집행·품질 피드백 루프 부재</a:t>
+              <a:t>중요도 기반 토큰 pruning(H2O·SnapKV)은 입증됐으나 고정 예산·고정 휴리스틱 — 요청별 품질 예산·차등 집행, 재사용과의 조율(쿼리 의존 중요도) 부재</a:t>
             </a:r>
             <a:endParaRPr lang="en-US" sz="980" dirty="0"/>
           </a:p>
@@ -2840,7 +2840,7 @@
                 <a:ea typeface="Malgun Gothic" pitchFamily="34" charset="-122"/>
                 <a:cs typeface="Malgun Gothic" pitchFamily="34" charset="-120"/>
               </a:rPr>
-              <a:t>정확도 유지 KV 압축 → 메모리 병목 해소 → 지연·처리량 개선</a:t>
+              <a:t>정확도 유지 KV 압축(pruning) → 메모리 병목 해소 → 지연·처리량 개선</a:t>
             </a:r>
             <a:endParaRPr lang="en-US" sz="980" dirty="0"/>
           </a:p>
@@ -2860,7 +2860,7 @@
                 <a:ea typeface="Malgun Gothic" pitchFamily="34" charset="-122"/>
                 <a:cs typeface="Malgun Gothic" pitchFamily="34" charset="-120"/>
               </a:rPr>
-              <a:t>품질 bound(ΔF1 ≤ 1%p, QA3 gate) 안에서 요청별 차등 압축 — training-free(C-03) (FR-03·04)</a:t>
+              <a:t>품질 bound(ΔF1 ≤ 1%p, QA3 gate) 안에서 중요도 기반 토큰 pruning을 요청별 차등 적용(양자화는 조합) — training-free(C-03) (FR-03·04)</a:t>
             </a:r>
             <a:endParaRPr lang="en-US" sz="980" dirty="0"/>
           </a:p>

--- a/docs/mcr_necessity_kv.pptx
+++ b/docs/mcr_necessity_kv.pptx
@@ -2498,7 +2498,7 @@
                 <a:ea typeface="Malgun Gothic" pitchFamily="34" charset="-122"/>
                 <a:cs typeface="Malgun Gothic" pitchFamily="34" charset="-120"/>
               </a:rPr>
-              <a:t>prefix + 비접두(chunk) 재사용 · 세션/사용자 영속화 · 복원 vs 재계산 비용 판단 (FR-02)</a:t>
+              <a:t>SOTA(CacheBlend) 채택 후 수정·확장 — 비접두 재사용 확장 · 세션/사용자 영속화 · 복원 vs 재계산 비용 판단 (FR-02)</a:t>
             </a:r>
             <a:endParaRPr lang="en-US" sz="980" dirty="0"/>
           </a:p>
@@ -2529,7 +2529,7 @@
                 <a:ea typeface="Malgun Gothic" pitchFamily="34" charset="-122"/>
                 <a:cs typeface="Malgun Gothic" pitchFamily="34" charset="-120"/>
               </a:rPr>
-              <a:t>TTFT ≥ 2× (QA1) — CacheBlend 2.2–3.3×(B) 앵커</a:t>
+              <a:t>CacheBlend 대비 TTFT ≥ 1.3×(잠정) · 무재사용 대비 ≥ 2× (QA1)</a:t>
             </a:r>
             <a:endParaRPr lang="en-US" sz="980" dirty="0"/>
           </a:p>

--- a/docs/mcr_necessity_kv.pptx
+++ b/docs/mcr_necessity_kv.pptx
@@ -2498,7 +2498,7 @@
                 <a:ea typeface="Malgun Gothic" pitchFamily="34" charset="-122"/>
                 <a:cs typeface="Malgun Gothic" pitchFamily="34" charset="-120"/>
               </a:rPr>
-              <a:t>SOTA(CacheBlend) 채택 후 수정·확장 — 비접두 재사용 확장 · 세션/사용자 영속화 · 복원 vs 재계산 비용 판단 (FR-02)</a:t>
+              <a:t>prefix + 비접두(chunk) 재사용 · 세션/사용자 영속화 · 복원 vs 재계산 비용 판단 (FR-02)</a:t>
             </a:r>
             <a:endParaRPr lang="en-US" sz="980" dirty="0"/>
           </a:p>
@@ -2529,7 +2529,7 @@
                 <a:ea typeface="Malgun Gothic" pitchFamily="34" charset="-122"/>
                 <a:cs typeface="Malgun Gothic" pitchFamily="34" charset="-120"/>
               </a:rPr>
-              <a:t>CacheBlend 대비 TTFT ≥ 1.3×(잠정) · 무재사용 대비 ≥ 2× (QA1)</a:t>
+              <a:t>TTFT ≥ 2× (QA1) — CacheBlend 2.2–3.3×(B) 앵커</a:t>
             </a:r>
             <a:endParaRPr lang="en-US" sz="980" dirty="0"/>
           </a:p>

--- a/docs/mcr_necessity_kv.pptx
+++ b/docs/mcr_necessity_kv.pptx
@@ -2529,7 +2529,7 @@
                 <a:ea typeface="Malgun Gothic" pitchFamily="34" charset="-122"/>
                 <a:cs typeface="Malgun Gothic" pitchFamily="34" charset="-120"/>
               </a:rPr>
-              <a:t>TTFT ≥ 2× (QA1) — CacheBlend 2.2–3.3×(B) 앵커</a:t>
+              <a:t>TTFT ≥ 2× (QA3) — CacheBlend 2.2–3.3×(B) 앵커</a:t>
             </a:r>
             <a:endParaRPr lang="en-US" sz="980" dirty="0"/>
           </a:p>
@@ -2860,7 +2860,7 @@
                 <a:ea typeface="Malgun Gothic" pitchFamily="34" charset="-122"/>
                 <a:cs typeface="Malgun Gothic" pitchFamily="34" charset="-120"/>
               </a:rPr>
-              <a:t>품질 bound(ΔF1 ≤ 1%p, QA3 gate) 안에서 중요도 기반 토큰 pruning을 요청별 차등 적용(양자화는 조합) — training-free(C-03) (FR-03·04)</a:t>
+              <a:t>품질 bound(ΔF1 ≤ 1%p, QA2 gate) 안에서 중요도 기반 토큰 pruning을 요청별 차등 적용(양자화는 조합) — training-free(C-03) (FR-03·04)</a:t>
             </a:r>
             <a:endParaRPr lang="en-US" sz="980" dirty="0"/>
           </a:p>
@@ -2891,7 +2891,7 @@
                 <a:ea typeface="Malgun Gothic" pitchFamily="34" charset="-122"/>
                 <a:cs typeface="Malgun Gothic" pitchFamily="34" charset="-120"/>
               </a:rPr>
-              <a:t>유효 KV 용량 ≥ 3× (QA4) · throughput ≥ 2× (QA2)</a:t>
+              <a:t>유효 KV 용량 ≥ 3× (QA4) · throughput ≥ 2× (QA1)</a:t>
             </a:r>
             <a:endParaRPr lang="en-US" sz="980" dirty="0"/>
           </a:p>
@@ -3253,7 +3253,7 @@
                 <a:ea typeface="Malgun Gothic" pitchFamily="34" charset="-122"/>
                 <a:cs typeface="Malgun Gothic" pitchFamily="34" charset="-120"/>
               </a:rPr>
-              <a:t>throughput ≥ 2× (QA2) — 축별 ablation으로 순기여 분리</a:t>
+              <a:t>throughput ≥ 2× (QA1) — 축별 ablation으로 순기여 분리</a:t>
             </a:r>
             <a:endParaRPr lang="en-US" sz="980" dirty="0"/>
           </a:p>

--- a/docs/mcr_necessity_kv.pptx
+++ b/docs/mcr_necessity_kv.pptx
@@ -1480,7 +1480,7 @@
                 <a:ea typeface="Malgun Gothic" pitchFamily="34" charset="-122"/>
                 <a:cs typeface="Malgun Gothic" pitchFamily="34" charset="-120"/>
               </a:rPr>
-              <a:t>과제 목표 — KV 캐시 최적 운용 AI 런타임 (MCR 1단계)</a:t>
+              <a:t>상위 과제 목표 — 자원 효율로 AI 추론 성능 향상 (MCR 1단계)</a:t>
             </a:r>
             <a:endParaRPr lang="en-US" sz="1150" dirty="0"/>
           </a:p>
@@ -1909,8 +1909,8 @@
         </p:nvSpPr>
         <p:spPr>
           <a:xfrm>
-            <a:off x="6473952" y="1508760"/>
-            <a:ext cx="5306263" cy="246888"/>
+            <a:off x="6473952" y="1499616"/>
+            <a:ext cx="5306263" cy="402336"/>
           </a:xfrm>
           <a:prstGeom prst="rect">
             <a:avLst/>
@@ -1926,7 +1926,7 @@
               <a:buNone/>
             </a:pPr>
             <a:r>
-              <a:rPr lang="en-US" sz="1050" b="1" dirty="0">
+              <a:rPr lang="en-US" sz="980" b="1" dirty="0">
                 <a:solidFill>
                   <a:srgbClr val="3C5F2C"/>
                 </a:solidFill>
@@ -1934,9 +1934,23 @@
                 <a:ea typeface="Malgun Gothic" pitchFamily="34" charset="-122"/>
                 <a:cs typeface="Malgun Gothic" pitchFamily="34" charset="-120"/>
               </a:rPr>
-              <a:t>해법 공간 — 병목을 푸는 지렛대는 셋뿐이다</a:t>
-            </a:r>
-            <a:endParaRPr lang="en-US" sz="1050" dirty="0"/>
+              <a:t>총괄: </a:t>
+            </a:r>
+            <a:pPr indent="0" marL="0">
+              <a:buNone/>
+            </a:pPr>
+            <a:r>
+              <a:rPr lang="en-US" sz="980" b="1" dirty="0">
+                <a:solidFill>
+                  <a:srgbClr val="3C5F2C"/>
+                </a:solidFill>
+                <a:latin typeface="Malgun Gothic" pitchFamily="34" charset="0"/>
+                <a:ea typeface="Malgun Gothic" pitchFamily="34" charset="-122"/>
+                <a:cs typeface="Malgun Gothic" pitchFamily="34" charset="-120"/>
+              </a:rPr>
+              <a:t>연산기의 불필요한 연산은 줄이고 메모리의 사용성은 높여, 동일 HW에서 AI 추론 성능(지연·처리량)을 향상시킨다</a:t>
+            </a:r>
+            <a:endParaRPr lang="en-US" sz="980" dirty="0"/>
           </a:p>
         </p:txBody>
       </p:sp>
@@ -1948,8 +1962,8 @@
         </p:nvSpPr>
         <p:spPr>
           <a:xfrm>
-            <a:off x="6492240" y="1773936"/>
-            <a:ext cx="5269687" cy="1234440"/>
+            <a:off x="6492240" y="1901952"/>
+            <a:ext cx="5269687" cy="1124712"/>
           </a:xfrm>
           <a:prstGeom prst="rect">
             <a:avLst/>
@@ -1962,27 +1976,13 @@
           <a:lstStyle/>
           <a:p>
             <a:pPr indent="0" marL="0">
-              <a:buNone/>
-            </a:pPr>
-            <a:r>
-              <a:rPr lang="en-US" sz="920" dirty="0">
-                <a:solidFill>
-                  <a:srgbClr val="262626"/>
-                </a:solidFill>
-                <a:latin typeface="Malgun Gothic" pitchFamily="34" charset="0"/>
-                <a:ea typeface="Malgun Gothic" pitchFamily="34" charset="-122"/>
-                <a:cs typeface="Malgun Gothic" pitchFamily="34" charset="-120"/>
-              </a:rPr>
-              <a:t>KV 총량·이동량 = </a:t>
-            </a:r>
-            <a:pPr indent="0" marL="0">
               <a:spcAft>
-                <a:spcPts val="400"/>
+                <a:spcPts val="300"/>
               </a:spcAft>
               <a:buNone/>
             </a:pPr>
             <a:r>
-              <a:rPr lang="en-US" sz="920" b="1" dirty="0">
+              <a:rPr lang="en-US" sz="840" dirty="0">
                 <a:solidFill>
                   <a:srgbClr val="1F3864"/>
                 </a:solidFill>
@@ -1990,20 +1990,20 @@
                 <a:ea typeface="Malgun Gothic" pitchFamily="34" charset="-122"/>
                 <a:cs typeface="Malgun Gothic" pitchFamily="34" charset="-120"/>
               </a:rPr>
-              <a:t>① 만드는 횟수 × ② 토큰당 바이트 × ③ 두는 위치·처리 순서</a:t>
-            </a:r>
-            <a:endParaRPr lang="en-US" sz="920" dirty="0"/>
+              <a:t>KV 총량·이동량 = ① 만드는 횟수 × ② 토큰당 바이트 × ③ 두는 위치·순서 — 세 인자가 곧 목표 3축</a:t>
+            </a:r>
+            <a:endParaRPr lang="en-US" sz="840" dirty="0"/>
           </a:p>
           <a:p>
             <a:pPr marL="101600" indent="-101600">
               <a:spcAft>
-                <a:spcPts val="400"/>
+                <a:spcPts val="200"/>
               </a:spcAft>
               <a:buSzPct val="100000"/>
               <a:buChar char="◆"/>
             </a:pPr>
             <a:r>
-              <a:rPr lang="en-US" sz="920" b="1" dirty="0">
+              <a:rPr lang="en-US" sz="860" b="1" dirty="0">
                 <a:solidFill>
                   <a:srgbClr val="3C5F2C"/>
                 </a:solidFill>
@@ -2011,9 +2011,30 @@
                 <a:ea typeface="Malgun Gothic" pitchFamily="34" charset="-122"/>
                 <a:cs typeface="Malgun Gothic" pitchFamily="34" charset="-120"/>
               </a:rPr>
-              <a:t>① 다시 만들지 않기 = 재사용   ② 줄이기 = 압축   ③ 잘 두고 잘 고르기 = KV 인지 스케줄링</a:t>
-            </a:r>
-            <a:endParaRPr lang="en-US" sz="920" dirty="0"/>
+              <a:t>목표 1 [연산 효율] 계산한 결과를 재활용해 불필요한 재연산 제거 → TTFT 단축  (① 축소)</a:t>
+            </a:r>
+            <a:endParaRPr lang="en-US" sz="840" dirty="0"/>
+          </a:p>
+          <a:p>
+            <a:pPr marL="101600" indent="-101600">
+              <a:spcAft>
+                <a:spcPts val="200"/>
+              </a:spcAft>
+              <a:buSzPct val="100000"/>
+              <a:buChar char="◆"/>
+            </a:pPr>
+            <a:r>
+              <a:rPr lang="en-US" sz="860" b="1" dirty="0">
+                <a:solidFill>
+                  <a:srgbClr val="3C5F2C"/>
+                </a:solidFill>
+                <a:latin typeface="Malgun Gothic" pitchFamily="34" charset="0"/>
+                <a:ea typeface="Malgun Gothic" pitchFamily="34" charset="-122"/>
+                <a:cs typeface="Malgun Gothic" pitchFamily="34" charset="-120"/>
+              </a:rPr>
+              <a:t>목표 2 [메모리 효율] 정확도 유지한 채 실효 용량·토큰당 읽기량 개선 → 동시성·처리량 향상  (② 축소)</a:t>
+            </a:r>
+            <a:endParaRPr lang="en-US" sz="840" dirty="0"/>
           </a:p>
           <a:p>
             <a:pPr marL="101600" indent="-101600">
@@ -2021,17 +2042,17 @@
               <a:buChar char="◆"/>
             </a:pPr>
             <a:r>
-              <a:rPr lang="en-US" sz="920" dirty="0">
-                <a:solidFill>
-                  <a:srgbClr val="262626"/>
-                </a:solidFill>
-                <a:latin typeface="Malgun Gothic" pitchFamily="34" charset="0"/>
-                <a:ea typeface="Malgun Gothic" pitchFamily="34" charset="-122"/>
-                <a:cs typeface="Malgun Gothic" pitchFamily="34" charset="-120"/>
-              </a:rPr>
-              <a:t>그런데 현 런타임에는 세 지렛대가 모두 공백이다(좌측 Ⅱ) → 이를 채우는 것이 과제 목표 3축</a:t>
-            </a:r>
-            <a:endParaRPr lang="en-US" sz="920" dirty="0"/>
+              <a:rPr lang="en-US" sz="860" b="1" dirty="0">
+                <a:solidFill>
+                  <a:srgbClr val="3C5F2C"/>
+                </a:solidFill>
+                <a:latin typeface="Malgun Gothic" pitchFamily="34" charset="0"/>
+                <a:ea typeface="Malgun Gothic" pitchFamily="34" charset="-122"/>
+                <a:cs typeface="Malgun Gothic" pitchFamily="34" charset="-120"/>
+              </a:rPr>
+              <a:t>목표 3 [자원 인지 운용] 캐시·메모리·부하 상태 인지 동적 배치·선별 — 개별 개선을 시스템 처리량으로 전환  (③ 최적화)</a:t>
+            </a:r>
+            <a:endParaRPr lang="en-US" sz="840" dirty="0"/>
           </a:p>
         </p:txBody>
       </p:sp>
@@ -2167,7 +2188,7 @@
                 <a:ea typeface="Malgun Gothic" pitchFamily="34" charset="-122"/>
                 <a:cs typeface="Malgun Gothic" pitchFamily="34" charset="-120"/>
               </a:rPr>
-              <a:t>과제 목표 3축 — 좌측 공백 ①②③과 1:1 대응</a:t>
+              <a:t>설계 접근 — 공백 ①②③을 설계 결정(DP)으로 전개, 목표 3축 실현</a:t>
             </a:r>
             <a:endParaRPr lang="en-US" sz="1150" dirty="0"/>
           </a:p>
@@ -2398,7 +2419,7 @@
             </a:avLst>
           </a:prstGeom>
           <a:solidFill>
-            <a:srgbClr val="4E7C3A"/>
+            <a:srgbClr val="ED7D31"/>
           </a:solidFill>
           <a:ln/>
         </p:spPr>
@@ -2428,7 +2449,7 @@
               <a:buNone/>
             </a:pPr>
             <a:r>
-              <a:rPr lang="en-US" sz="900" b="1" dirty="0">
+              <a:rPr lang="en-US" sz="950" b="1" dirty="0">
                 <a:solidFill>
                   <a:srgbClr val="FFFFFF"/>
                 </a:solidFill>
@@ -2436,9 +2457,9 @@
                 <a:ea typeface="Malgun Gothic" pitchFamily="34" charset="-122"/>
                 <a:cs typeface="Malgun Gothic" pitchFamily="34" charset="-120"/>
               </a:rPr>
-              <a:t>목표 1</a:t>
-            </a:r>
-            <a:endParaRPr lang="en-US" sz="900" dirty="0"/>
+              <a:t>DP3</a:t>
+            </a:r>
+            <a:endParaRPr lang="en-US" sz="950" dirty="0"/>
           </a:p>
         </p:txBody>
       </p:sp>
@@ -2463,6 +2484,20 @@
           <a:bodyPr wrap="square" rtlCol="0" anchor="t"/>
           <a:lstStyle/>
           <a:p>
+            <a:pPr indent="0" marL="0">
+              <a:buNone/>
+            </a:pPr>
+            <a:r>
+              <a:rPr lang="en-US" sz="980" b="1" dirty="0">
+                <a:solidFill>
+                  <a:srgbClr val="3C5F2C"/>
+                </a:solidFill>
+                <a:latin typeface="Malgun Gothic" pitchFamily="34" charset="0"/>
+                <a:ea typeface="Malgun Gothic" pitchFamily="34" charset="-122"/>
+                <a:cs typeface="Malgun Gothic" pitchFamily="34" charset="-120"/>
+              </a:rPr>
+              <a:t>KV 재사용 범위·복원 전략  </a:t>
+            </a:r>
             <a:pPr indent="0" marL="0">
               <a:spcAft>
                 <a:spcPts val="200"/>
@@ -2470,15 +2505,15 @@
               <a:buNone/>
             </a:pPr>
             <a:r>
-              <a:rPr lang="en-US" sz="980" b="1" dirty="0">
-                <a:solidFill>
-                  <a:srgbClr val="3C5F2C"/>
-                </a:solidFill>
-                <a:latin typeface="Malgun Gothic" pitchFamily="34" charset="0"/>
-                <a:ea typeface="Malgun Gothic" pitchFamily="34" charset="-122"/>
-                <a:cs typeface="Malgun Gothic" pitchFamily="34" charset="-120"/>
-              </a:rPr>
-              <a:t>KV 재사용성 제고 → 지연시간(TTFT) 개선</a:t>
+              <a:rPr lang="en-US" sz="860" b="1" dirty="0">
+                <a:solidFill>
+                  <a:srgbClr val="1F3864"/>
+                </a:solidFill>
+                <a:latin typeface="Malgun Gothic" pitchFamily="34" charset="0"/>
+                <a:ea typeface="Malgun Gothic" pitchFamily="34" charset="-122"/>
+                <a:cs typeface="Malgun Gothic" pitchFamily="34" charset="-120"/>
+              </a:rPr>
+              <a:t>— 목표 1 [연산 효율] 실현</a:t>
             </a:r>
             <a:endParaRPr lang="en-US" sz="980" dirty="0"/>
           </a:p>
@@ -2498,7 +2533,7 @@
                 <a:ea typeface="Malgun Gothic" pitchFamily="34" charset="-122"/>
                 <a:cs typeface="Malgun Gothic" pitchFamily="34" charset="-120"/>
               </a:rPr>
-              <a:t>prefix + 비접두(chunk) 재사용 · 세션/사용자 영속화 · 복원 vs 재계산 비용 판단 (FR-02)</a:t>
+              <a:t>prefix + 비접두(chunk) 재사용 · 세션/사용자 영속 · 복원 vs 재계산 판단 (FR-02) — 재계산 토큰 선택의 실행 구조를 후보 대결로 결정</a:t>
             </a:r>
             <a:endParaRPr lang="en-US" sz="980" dirty="0"/>
           </a:p>
@@ -2760,7 +2795,7 @@
             </a:avLst>
           </a:prstGeom>
           <a:solidFill>
-            <a:srgbClr val="4E7C3A"/>
+            <a:srgbClr val="E91E8C"/>
           </a:solidFill>
           <a:ln/>
         </p:spPr>
@@ -2790,7 +2825,7 @@
               <a:buNone/>
             </a:pPr>
             <a:r>
-              <a:rPr lang="en-US" sz="900" b="1" dirty="0">
+              <a:rPr lang="en-US" sz="950" b="1" dirty="0">
                 <a:solidFill>
                   <a:srgbClr val="FFFFFF"/>
                 </a:solidFill>
@@ -2798,9 +2833,9 @@
                 <a:ea typeface="Malgun Gothic" pitchFamily="34" charset="-122"/>
                 <a:cs typeface="Malgun Gothic" pitchFamily="34" charset="-120"/>
               </a:rPr>
-              <a:t>목표 2</a:t>
-            </a:r>
-            <a:endParaRPr lang="en-US" sz="900" dirty="0"/>
+              <a:t>DP4</a:t>
+            </a:r>
+            <a:endParaRPr lang="en-US" sz="950" dirty="0"/>
           </a:p>
         </p:txBody>
       </p:sp>
@@ -2825,6 +2860,20 @@
           <a:bodyPr wrap="square" rtlCol="0" anchor="t"/>
           <a:lstStyle/>
           <a:p>
+            <a:pPr indent="0" marL="0">
+              <a:buNone/>
+            </a:pPr>
+            <a:r>
+              <a:rPr lang="en-US" sz="980" b="1" dirty="0">
+                <a:solidFill>
+                  <a:srgbClr val="3C5F2C"/>
+                </a:solidFill>
+                <a:latin typeface="Malgun Gothic" pitchFamily="34" charset="0"/>
+                <a:ea typeface="Malgun Gothic" pitchFamily="34" charset="-122"/>
+                <a:cs typeface="Malgun Gothic" pitchFamily="34" charset="-120"/>
+              </a:rPr>
+              <a:t>정확도를 유지한 KV 캐시 압축  </a:t>
+            </a:r>
             <a:pPr indent="0" marL="0">
               <a:spcAft>
                 <a:spcPts val="200"/>
@@ -2832,15 +2881,15 @@
               <a:buNone/>
             </a:pPr>
             <a:r>
-              <a:rPr lang="en-US" sz="980" b="1" dirty="0">
-                <a:solidFill>
-                  <a:srgbClr val="3C5F2C"/>
-                </a:solidFill>
-                <a:latin typeface="Malgun Gothic" pitchFamily="34" charset="0"/>
-                <a:ea typeface="Malgun Gothic" pitchFamily="34" charset="-122"/>
-                <a:cs typeface="Malgun Gothic" pitchFamily="34" charset="-120"/>
-              </a:rPr>
-              <a:t>정확도 유지 KV 압축(pruning) → 메모리 병목 해소 → 지연·처리량 개선</a:t>
+              <a:rPr lang="en-US" sz="860" b="1" dirty="0">
+                <a:solidFill>
+                  <a:srgbClr val="1F3864"/>
+                </a:solidFill>
+                <a:latin typeface="Malgun Gothic" pitchFamily="34" charset="0"/>
+                <a:ea typeface="Malgun Gothic" pitchFamily="34" charset="-122"/>
+                <a:cs typeface="Malgun Gothic" pitchFamily="34" charset="-120"/>
+              </a:rPr>
+              <a:t>— 목표 2 [메모리 효율] 실현</a:t>
             </a:r>
             <a:endParaRPr lang="en-US" sz="980" dirty="0"/>
           </a:p>
@@ -2860,7 +2909,7 @@
                 <a:ea typeface="Malgun Gothic" pitchFamily="34" charset="-122"/>
                 <a:cs typeface="Malgun Gothic" pitchFamily="34" charset="-120"/>
               </a:rPr>
-              <a:t>품질 bound(ΔF1 ≤ 1%p, QA2 gate) 안에서 중요도 기반 토큰 pruning을 요청별 차등 적용(양자화는 조합) — training-free(C-03) (FR-03·04)</a:t>
+              <a:t>품질 bound(ΔF1 ≤ 1%p, QA2 gate) 안의 요청별 차등 pruning — 집행 시점 × 자산 표현(단일 사본 vs 원본·파생)을 후보 대결로 결정 (FR-03·04, C-03)</a:t>
             </a:r>
             <a:endParaRPr lang="en-US" sz="980" dirty="0"/>
           </a:p>
@@ -3122,7 +3171,7 @@
             </a:avLst>
           </a:prstGeom>
           <a:solidFill>
-            <a:srgbClr val="4E7C3A"/>
+            <a:srgbClr val="7030A0"/>
           </a:solidFill>
           <a:ln/>
         </p:spPr>
@@ -3152,7 +3201,7 @@
               <a:buNone/>
             </a:pPr>
             <a:r>
-              <a:rPr lang="en-US" sz="900" b="1" dirty="0">
+              <a:rPr lang="en-US" sz="950" b="1" dirty="0">
                 <a:solidFill>
                   <a:srgbClr val="FFFFFF"/>
                 </a:solidFill>
@@ -3160,9 +3209,9 @@
                 <a:ea typeface="Malgun Gothic" pitchFamily="34" charset="-122"/>
                 <a:cs typeface="Malgun Gothic" pitchFamily="34" charset="-120"/>
               </a:rPr>
-              <a:t>목표 3</a:t>
-            </a:r>
-            <a:endParaRPr lang="en-US" sz="900" dirty="0"/>
+              <a:t>DP5</a:t>
+            </a:r>
+            <a:endParaRPr lang="en-US" sz="950" dirty="0"/>
           </a:p>
         </p:txBody>
       </p:sp>
@@ -3187,6 +3236,20 @@
           <a:bodyPr wrap="square" rtlCol="0" anchor="t"/>
           <a:lstStyle/>
           <a:p>
+            <a:pPr indent="0" marL="0">
+              <a:buNone/>
+            </a:pPr>
+            <a:r>
+              <a:rPr lang="en-US" sz="980" b="1" dirty="0">
+                <a:solidFill>
+                  <a:srgbClr val="3C5F2C"/>
+                </a:solidFill>
+                <a:latin typeface="Malgun Gothic" pitchFamily="34" charset="0"/>
+                <a:ea typeface="Malgun Gothic" pitchFamily="34" charset="-122"/>
+                <a:cs typeface="Malgun Gothic" pitchFamily="34" charset="-120"/>
+              </a:rPr>
+              <a:t>KV 캐시 인지형 동적 스케줄링  </a:t>
+            </a:r>
             <a:pPr indent="0" marL="0">
               <a:spcAft>
                 <a:spcPts val="200"/>
@@ -3194,15 +3257,15 @@
               <a:buNone/>
             </a:pPr>
             <a:r>
-              <a:rPr lang="en-US" sz="980" b="1" dirty="0">
-                <a:solidFill>
-                  <a:srgbClr val="3C5F2C"/>
-                </a:solidFill>
-                <a:latin typeface="Malgun Gothic" pitchFamily="34" charset="0"/>
-                <a:ea typeface="Malgun Gothic" pitchFamily="34" charset="-122"/>
-                <a:cs typeface="Malgun Gothic" pitchFamily="34" charset="-120"/>
-              </a:rPr>
-              <a:t>KV 캐시 인지형 동적 스케줄링 → 처리량 개선</a:t>
+              <a:rPr lang="en-US" sz="860" b="1" dirty="0">
+                <a:solidFill>
+                  <a:srgbClr val="1F3864"/>
+                </a:solidFill>
+                <a:latin typeface="Malgun Gothic" pitchFamily="34" charset="0"/>
+                <a:ea typeface="Malgun Gothic" pitchFamily="34" charset="-122"/>
+                <a:cs typeface="Malgun Gothic" pitchFamily="34" charset="-120"/>
+              </a:rPr>
+              <a:t>— 목표 3 [자원 인지 운용] 실현</a:t>
             </a:r>
             <a:endParaRPr lang="en-US" sz="980" dirty="0"/>
           </a:p>
@@ -3222,7 +3285,7 @@
                 <a:ea typeface="Malgun Gothic" pitchFamily="34" charset="-122"/>
                 <a:cs typeface="Malgun Gothic" pitchFamily="34" charset="-120"/>
               </a:rPr>
-              <a:t>cache-hit/locality 인지 admission·라우팅 + KV 공간 확보(압축/강등/축출 최적 선택) — 요청별 SLO 차등 (FR-05)</a:t>
+              <a:t>locality 인지 라우팅 + KV 공간 확보(압축/강등/축출 선택) (FR-05) — 라우팅 1차 기준(locality vs 부하)을 후보 대결로 결정</a:t>
             </a:r>
             <a:endParaRPr lang="en-US" sz="980" dirty="0"/>
           </a:p>
@@ -3309,7 +3372,7 @@
               <a:buNone/>
             </a:pPr>
             <a:r>
-              <a:rPr lang="en-US" sz="1000" b="1" dirty="0">
+              <a:rPr lang="en-US" sz="960" b="1" dirty="0">
                 <a:solidFill>
                   <a:srgbClr val="843C0C"/>
                 </a:solidFill>
@@ -3323,7 +3386,7 @@
               <a:buNone/>
             </a:pPr>
             <a:r>
-              <a:rPr lang="en-US" sz="1000" dirty="0">
+              <a:rPr lang="en-US" sz="960" dirty="0">
                 <a:solidFill>
                   <a:srgbClr val="262626"/>
                 </a:solidFill>
@@ -3331,13 +3394,13 @@
                 <a:ea typeface="Malgun Gothic" pitchFamily="34" charset="-122"/>
                 <a:cs typeface="Malgun Gothic" pitchFamily="34" charset="-120"/>
               </a:rPr>
-              <a:t>세 지렛대는 결합되어 있다(재사용은 남는 것을, 압축은 비용을, 스케줄링은 활용을 결정) — 그러나 셋을 조율하는 계층이 어느 런타임에도 없다.  </a:t>
-            </a:r>
-            <a:pPr indent="0" marL="0">
-              <a:buNone/>
-            </a:pPr>
-            <a:r>
-              <a:rPr lang="en-US" sz="1000" b="1" dirty="0">
+              <a:t>세 지렛대는 결합되어 있으나(재사용은 남는 것을, 압축은 비용을, 스케줄링은 활용을 결정) 조율 계층이 어느 런타임에도 없다 → </a:t>
+            </a:r>
+            <a:pPr indent="0" marL="0">
+              <a:buNone/>
+            </a:pPr>
+            <a:r>
+              <a:rPr lang="en-US" sz="960" b="1" dirty="0">
                 <a:solidFill>
                   <a:srgbClr val="1F3864"/>
                 </a:solidFill>
@@ -3345,13 +3408,55 @@
                 <a:ea typeface="Malgun Gothic" pitchFamily="34" charset="-122"/>
                 <a:cs typeface="Malgun Gothic" pitchFamily="34" charset="-120"/>
               </a:rPr>
-              <a:t>∴ 본 과제 = 조율 계층을 갖춘 KV 캐시 최적 운용 런타임</a:t>
-            </a:r>
-            <a:pPr indent="0" marL="0">
-              <a:buNone/>
-            </a:pPr>
-            <a:r>
-              <a:rPr lang="en-US" sz="900" dirty="0">
+              <a:t>DP2 KV 배치·압축의 관리 주체</a:t>
+            </a:r>
+            <a:pPr indent="0" marL="0">
+              <a:buNone/>
+            </a:pPr>
+            <a:r>
+              <a:rPr lang="en-US" sz="960" dirty="0">
+                <a:solidFill>
+                  <a:srgbClr val="262626"/>
+                </a:solidFill>
+                <a:latin typeface="Malgun Gothic" pitchFamily="34" charset="0"/>
+                <a:ea typeface="Malgun Gothic" pitchFamily="34" charset="-122"/>
+                <a:cs typeface="Malgun Gothic" pitchFamily="34" charset="-120"/>
+              </a:rPr>
+              <a:t>가 조율의 소재를, </a:t>
+            </a:r>
+            <a:pPr indent="0" marL="0">
+              <a:buNone/>
+            </a:pPr>
+            <a:r>
+              <a:rPr lang="en-US" sz="960" b="1" dirty="0">
+                <a:solidFill>
+                  <a:srgbClr val="1F3864"/>
+                </a:solidFill>
+                <a:latin typeface="Malgun Gothic" pitchFamily="34" charset="0"/>
+                <a:ea typeface="Malgun Gothic" pitchFamily="34" charset="-122"/>
+                <a:cs typeface="Malgun Gothic" pitchFamily="34" charset="-120"/>
+              </a:rPr>
+              <a:t>DP1 실행 스택 소싱</a:t>
+            </a:r>
+            <a:pPr indent="0" marL="0">
+              <a:buNone/>
+            </a:pPr>
+            <a:r>
+              <a:rPr lang="en-US" sz="960" dirty="0">
+                <a:solidFill>
+                  <a:srgbClr val="262626"/>
+                </a:solidFill>
+                <a:latin typeface="Malgun Gothic" pitchFamily="34" charset="0"/>
+                <a:ea typeface="Malgun Gothic" pitchFamily="34" charset="-122"/>
+                <a:cs typeface="Malgun Gothic" pitchFamily="34" charset="-120"/>
+              </a:rPr>
+              <a:t>이 이 모두가 사는 집을 결정 — 설계 챕터 DP1–DP5로 전개.</a:t>
+            </a:r>
+            <a:pPr indent="0" marL="0">
+              <a:buNone/>
+            </a:pPr>
+            <a:r>
+              <a:rPr lang="en-US" sz="880" dirty="0">
                 <a:solidFill>
                   <a:srgbClr val="7F7F7F"/>
                 </a:solidFill>
@@ -3361,7 +3466,7 @@
               </a:rPr>
               <a:t>  (2단계 진화: 자사 memory-centric 디바이스 확장 — MCR 완성)</a:t>
             </a:r>
-            <a:endParaRPr lang="en-US" sz="1000" dirty="0"/>
+            <a:endParaRPr lang="en-US" sz="960" dirty="0"/>
           </a:p>
         </p:txBody>
       </p:sp>

--- a/docs/mcr_necessity_kv.pptx
+++ b/docs/mcr_necessity_kv.pptx
@@ -1421,7 +1421,7 @@
                 <a:ea typeface="Malgun Gothic" pitchFamily="34" charset="-122"/>
                 <a:cs typeface="Malgun Gothic" pitchFamily="34" charset="-120"/>
               </a:rPr>
-              <a:t>문제 정의 Ⅰ — 물리 병목: KV cache가 용량·대역폭을 동시에 압박</a:t>
+              <a:t>문제 정의 — 물리 병목: KV cache가 용량·대역폭을 동시에 압박</a:t>
             </a:r>
             <a:endParaRPr lang="en-US" sz="1150" dirty="0"/>
           </a:p>
@@ -1480,7 +1480,7 @@
                 <a:ea typeface="Malgun Gothic" pitchFamily="34" charset="-122"/>
                 <a:cs typeface="Malgun Gothic" pitchFamily="34" charset="-120"/>
               </a:rPr>
-              <a:t>상위 과제 목표 — 자원 효율로 AI 추론 성능 향상 (MCR 1단계)</a:t>
+              <a:t>과제 목표 — 자원 효율로 AI 추론 성능 향상 (MCR 1단계)</a:t>
             </a:r>
             <a:endParaRPr lang="en-US" sz="1150" dirty="0"/>
           </a:p>
@@ -1494,8 +1494,8 @@
         </p:nvSpPr>
         <p:spPr>
           <a:xfrm>
-            <a:off x="320040" y="1463040"/>
-            <a:ext cx="2715768" cy="1298448"/>
+            <a:off x="320040" y="1499616"/>
+            <a:ext cx="2715768" cy="4270248"/>
           </a:xfrm>
           <a:prstGeom prst="rect">
             <a:avLst/>
@@ -1519,8 +1519,8 @@
         </p:nvSpPr>
         <p:spPr>
           <a:xfrm>
-            <a:off x="393192" y="1499616"/>
-            <a:ext cx="2569464" cy="237744"/>
+            <a:off x="393192" y="1554480"/>
+            <a:ext cx="2569464" cy="274320"/>
           </a:xfrm>
           <a:prstGeom prst="rect">
             <a:avLst/>
@@ -1536,7 +1536,7 @@
               <a:buNone/>
             </a:pPr>
             <a:r>
-              <a:rPr lang="en-US" sz="1030" b="1" dirty="0">
+              <a:rPr lang="en-US" sz="1150" b="1" dirty="0">
                 <a:solidFill>
                   <a:srgbClr val="1F3864"/>
                 </a:solidFill>
@@ -1546,7 +1546,7 @@
               </a:rPr>
               <a:t>용량 — KV가 HBM을 넘는다</a:t>
             </a:r>
-            <a:endParaRPr lang="en-US" sz="1030" dirty="0"/>
+            <a:endParaRPr lang="en-US" sz="1150" dirty="0"/>
           </a:p>
         </p:txBody>
       </p:sp>
@@ -1558,8 +1558,8 @@
         </p:nvSpPr>
         <p:spPr>
           <a:xfrm>
-            <a:off x="411480" y="1737360"/>
-            <a:ext cx="2551176" cy="969264"/>
+            <a:off x="411480" y="1883664"/>
+            <a:ext cx="2532888" cy="2459736"/>
           </a:xfrm>
           <a:prstGeom prst="rect">
             <a:avLst/>
@@ -1573,13 +1573,13 @@
           <a:p>
             <a:pPr marL="101600" indent="-101600">
               <a:spcAft>
-                <a:spcPts val="200"/>
+                <a:spcPts val="500"/>
               </a:spcAft>
               <a:buSzPct val="100000"/>
               <a:buChar char="◆"/>
             </a:pPr>
             <a:r>
-              <a:rPr lang="en-US" sz="820" dirty="0">
+              <a:rPr lang="en-US" sz="920" dirty="0">
                 <a:solidFill>
                   <a:srgbClr val="262626"/>
                 </a:solidFill>
@@ -1587,20 +1587,20 @@
                 <a:ea typeface="Malgun Gothic" pitchFamily="34" charset="-122"/>
                 <a:cs typeface="Malgun Gothic" pitchFamily="34" charset="-120"/>
               </a:rPr>
-              <a:t>KV ∝ 컨텍스트 × 동시 세션 — 32k 1세션 ≈ 10.5 GB (토큰당 320 KB, Llama-2-70B)</a:t>
-            </a:r>
-            <a:endParaRPr lang="en-US" sz="820" dirty="0"/>
+              <a:t>KV ∝ 컨텍스트 길이 × 동시 세션 수 — 32k 토큰 1세션 ≈ 10.5 GB (토큰당 320 KB, Llama-2-70B)</a:t>
+            </a:r>
+            <a:endParaRPr lang="en-US" sz="920" dirty="0"/>
           </a:p>
           <a:p>
             <a:pPr marL="101600" indent="-101600">
               <a:spcAft>
-                <a:spcPts val="200"/>
+                <a:spcPts val="500"/>
               </a:spcAft>
               <a:buSzPct val="100000"/>
               <a:buChar char="◆"/>
             </a:pPr>
             <a:r>
-              <a:rPr lang="en-US" sz="820" dirty="0">
+              <a:rPr lang="en-US" sz="920" dirty="0">
                 <a:solidFill>
                   <a:srgbClr val="262626"/>
                 </a:solidFill>
@@ -1608,20 +1608,41 @@
                 <a:ea typeface="Malgun Gothic" pitchFamily="34" charset="-122"/>
                 <a:cs typeface="Malgun Gothic" pitchFamily="34" charset="-120"/>
               </a:rPr>
-              <a:t>용량 = batch(동시성)의 상한 = 처리량의 상한</a:t>
-            </a:r>
-            <a:endParaRPr lang="en-US" sz="820" dirty="0"/>
+              <a:t>모델이 아니라 KV가 메모리를 지배 — 컨텍스트·세션이 늘수록 선형 증가</a:t>
+            </a:r>
+            <a:endParaRPr lang="en-US" sz="920" dirty="0"/>
           </a:p>
           <a:p>
             <a:pPr marL="101600" indent="-101600">
               <a:spcAft>
-                <a:spcPts val="200"/>
+                <a:spcPts val="500"/>
               </a:spcAft>
               <a:buSzPct val="100000"/>
               <a:buChar char="◆"/>
             </a:pPr>
             <a:r>
-              <a:rPr lang="en-US" sz="820" dirty="0">
+              <a:rPr lang="en-US" sz="920" b="1" dirty="0">
+                <a:solidFill>
+                  <a:srgbClr val="1F3864"/>
+                </a:solidFill>
+                <a:latin typeface="Malgun Gothic" pitchFamily="34" charset="0"/>
+                <a:ea typeface="Malgun Gothic" pitchFamily="34" charset="-122"/>
+                <a:cs typeface="Malgun Gothic" pitchFamily="34" charset="-120"/>
+              </a:rPr>
+              <a:t>용량 = batch(동시성)의 상한 = 처리량의 상한</a:t>
+            </a:r>
+            <a:endParaRPr lang="en-US" sz="920" dirty="0"/>
+          </a:p>
+          <a:p>
+            <a:pPr marL="101600" indent="-101600">
+              <a:spcAft>
+                <a:spcPts val="500"/>
+              </a:spcAft>
+              <a:buSzPct val="100000"/>
+              <a:buChar char="◆"/>
+            </a:pPr>
+            <a:r>
+              <a:rPr lang="en-US" sz="920" dirty="0">
                 <a:solidFill>
                   <a:srgbClr val="262626"/>
                 </a:solidFill>
@@ -1631,20 +1652,43 @@
               </a:rPr>
               <a:t>초과 시 대기 또는 preemption·전체 재계산뿐 → 지연·처리량 악화 직결</a:t>
             </a:r>
-            <a:endParaRPr lang="en-US" sz="820" dirty="0"/>
+            <a:endParaRPr lang="en-US" sz="920" dirty="0"/>
           </a:p>
         </p:txBody>
       </p:sp>
-      <p:sp>
-        <p:nvSpPr>
-          <p:cNvPr id="26" name="Shape 24"/>
-          <p:cNvSpPr/>
-          <p:nvPr/>
-        </p:nvSpPr>
-        <p:spPr>
-          <a:xfrm>
-            <a:off x="3163824" y="1463040"/>
-            <a:ext cx="2715768" cy="1298448"/>
+      <p:pic>
+        <p:nvPicPr>
+          <p:cNvPr id="26" name="Image 0" descr="/home/user/architect/docs/mcr_assets/bg_kv_evidence.png">    </p:cNvPr>
+          <p:cNvPicPr>
+            <a:picLocks noChangeAspect="1"/>
+          </p:cNvPicPr>
+          <p:nvPr/>
+        </p:nvPicPr>
+        <p:blipFill>
+          <a:blip r:embed="rId1"/>
+          <a:srcRect l="0" r="0" t="0" b="0"/>
+          <a:stretch/>
+        </p:blipFill>
+        <p:spPr>
+          <a:xfrm>
+            <a:off x="429768" y="4379976"/>
+            <a:ext cx="2496312" cy="1298448"/>
+          </a:xfrm>
+          <a:prstGeom prst="rect">
+            <a:avLst/>
+          </a:prstGeom>
+        </p:spPr>
+      </p:pic>
+      <p:sp>
+        <p:nvSpPr>
+          <p:cNvPr id="27" name="Shape 24"/>
+          <p:cNvSpPr/>
+          <p:nvPr/>
+        </p:nvSpPr>
+        <p:spPr>
+          <a:xfrm>
+            <a:off x="3163824" y="1499616"/>
+            <a:ext cx="2715768" cy="4270248"/>
           </a:xfrm>
           <a:prstGeom prst="rect">
             <a:avLst/>
@@ -1662,14 +1706,14 @@
       </p:sp>
       <p:sp>
         <p:nvSpPr>
-          <p:cNvPr id="27" name="Text 25"/>
-          <p:cNvSpPr/>
-          <p:nvPr/>
-        </p:nvSpPr>
-        <p:spPr>
-          <a:xfrm>
-            <a:off x="3236976" y="1499616"/>
-            <a:ext cx="2569464" cy="237744"/>
+          <p:cNvPr id="28" name="Text 25"/>
+          <p:cNvSpPr/>
+          <p:nvPr/>
+        </p:nvSpPr>
+        <p:spPr>
+          <a:xfrm>
+            <a:off x="3236976" y="1554480"/>
+            <a:ext cx="2569464" cy="274320"/>
           </a:xfrm>
           <a:prstGeom prst="rect">
             <a:avLst/>
@@ -1685,7 +1729,7 @@
               <a:buNone/>
             </a:pPr>
             <a:r>
-              <a:rPr lang="en-US" sz="1030" b="1" dirty="0">
+              <a:rPr lang="en-US" sz="1150" b="1" dirty="0">
                 <a:solidFill>
                   <a:srgbClr val="1F3864"/>
                 </a:solidFill>
@@ -1695,20 +1739,20 @@
               </a:rPr>
               <a:t>대역폭 — 매 토큰 KV 전체를 읽는다</a:t>
             </a:r>
-            <a:endParaRPr lang="en-US" sz="1030" dirty="0"/>
+            <a:endParaRPr lang="en-US" sz="1150" dirty="0"/>
           </a:p>
         </p:txBody>
       </p:sp>
       <p:sp>
         <p:nvSpPr>
-          <p:cNvPr id="28" name="Text 26"/>
-          <p:cNvSpPr/>
-          <p:nvPr/>
-        </p:nvSpPr>
-        <p:spPr>
-          <a:xfrm>
-            <a:off x="3255264" y="1737360"/>
-            <a:ext cx="2551176" cy="969264"/>
+          <p:cNvPr id="29" name="Text 26"/>
+          <p:cNvSpPr/>
+          <p:nvPr/>
+        </p:nvSpPr>
+        <p:spPr>
+          <a:xfrm>
+            <a:off x="3255264" y="1883664"/>
+            <a:ext cx="2532888" cy="2459736"/>
           </a:xfrm>
           <a:prstGeom prst="rect">
             <a:avLst/>
@@ -1722,13 +1766,13 @@
           <a:p>
             <a:pPr marL="101600" indent="-101600">
               <a:spcAft>
-                <a:spcPts val="200"/>
+                <a:spcPts val="500"/>
               </a:spcAft>
               <a:buSzPct val="100000"/>
               <a:buChar char="◆"/>
             </a:pPr>
             <a:r>
-              <a:rPr lang="en-US" sz="820" dirty="0">
+              <a:rPr lang="en-US" sz="920" dirty="0">
                 <a:solidFill>
                   <a:srgbClr val="262626"/>
                 </a:solidFill>
@@ -1736,41 +1780,41 @@
                 <a:ea typeface="Malgun Gothic" pitchFamily="34" charset="-122"/>
                 <a:cs typeface="Malgun Gothic" pitchFamily="34" charset="-120"/>
               </a:rPr>
-              <a:t>decode = memory-bandwidth-bound — 대기가 E2E의 70–85%(A), 컨텍스트↑ = TPOT↑</a:t>
-            </a:r>
-            <a:endParaRPr lang="en-US" sz="820" dirty="0"/>
+              <a:t>decode = memory-bandwidth-bound — decode 대기가 E2E의 70–85%(A), 컨텍스트↑ = 토큰당 지연(TPOT)↑</a:t>
+            </a:r>
+            <a:endParaRPr lang="en-US" sz="920" dirty="0"/>
           </a:p>
           <a:p>
             <a:pPr marL="101600" indent="-101600">
               <a:spcAft>
-                <a:spcPts val="200"/>
+                <a:spcPts val="500"/>
               </a:spcAft>
               <a:buSzPct val="100000"/>
               <a:buChar char="◆"/>
             </a:pPr>
             <a:r>
-              <a:rPr lang="en-US" sz="820" dirty="0">
-                <a:solidFill>
-                  <a:srgbClr val="262626"/>
-                </a:solidFill>
-                <a:latin typeface="Malgun Gothic" pitchFamily="34" charset="0"/>
-                <a:ea typeface="Malgun Gothic" pitchFamily="34" charset="-122"/>
-                <a:cs typeface="Malgun Gothic" pitchFamily="34" charset="-120"/>
-              </a:rPr>
-              <a:t>대역폭 포화 시 용량 남아도 연산기 유휴 — 처리량 정체</a:t>
-            </a:r>
-            <a:endParaRPr lang="en-US" sz="820" dirty="0"/>
+              <a:rPr lang="en-US" sz="920" b="1" dirty="0">
+                <a:solidFill>
+                  <a:srgbClr val="1F3864"/>
+                </a:solidFill>
+                <a:latin typeface="Malgun Gothic" pitchFamily="34" charset="0"/>
+                <a:ea typeface="Malgun Gothic" pitchFamily="34" charset="-122"/>
+                <a:cs typeface="Malgun Gothic" pitchFamily="34" charset="-120"/>
+              </a:rPr>
+              <a:t>대역폭 포화 시 용량이 남아도 연산기는 유휴 — 처리량 정체</a:t>
+            </a:r>
+            <a:endParaRPr lang="en-US" sz="920" dirty="0"/>
           </a:p>
           <a:p>
             <a:pPr marL="101600" indent="-101600">
               <a:spcAft>
-                <a:spcPts val="200"/>
+                <a:spcPts val="500"/>
               </a:spcAft>
               <a:buSzPct val="100000"/>
               <a:buChar char="◆"/>
             </a:pPr>
             <a:r>
-              <a:rPr lang="en-US" sz="820" dirty="0">
+              <a:rPr lang="en-US" sz="920" dirty="0">
                 <a:solidFill>
                   <a:srgbClr val="262626"/>
                 </a:solidFill>
@@ -1778,22 +1822,45 @@
                 <a:ea typeface="Malgun Gothic" pitchFamily="34" charset="-122"/>
                 <a:cs typeface="Malgun Gothic" pitchFamily="34" charset="-120"/>
               </a:rPr>
-              <a:t>tier 계단 ~10×씩(HBM→DRAM→SSD) — 복원이 재계산보다 느릴 수도</a:t>
-            </a:r>
-            <a:endParaRPr lang="en-US" sz="820" dirty="0"/>
+              <a:t>메모리 계층 대역폭 계단 ~10×씩 (HBM→DRAM→SSD) — 하위 tier 복원이 재계산보다 느린 역전 구간 존재</a:t>
+            </a:r>
+            <a:endParaRPr lang="en-US" sz="920" dirty="0"/>
           </a:p>
         </p:txBody>
       </p:sp>
-      <p:sp>
-        <p:nvSpPr>
-          <p:cNvPr id="29" name="Shape 27"/>
-          <p:cNvSpPr/>
-          <p:nvPr/>
-        </p:nvSpPr>
-        <p:spPr>
-          <a:xfrm>
-            <a:off x="320040" y="2807208"/>
-            <a:ext cx="5559552" cy="274320"/>
+      <p:pic>
+        <p:nvPicPr>
+          <p:cNvPr id="30" name="Image 1" descr="/home/user/architect/docs/mcr_assets/nec_tier_ladder.png">    </p:cNvPr>
+          <p:cNvPicPr>
+            <a:picLocks noChangeAspect="1"/>
+          </p:cNvPicPr>
+          <p:nvPr/>
+        </p:nvPicPr>
+        <p:blipFill>
+          <a:blip r:embed="rId2"/>
+          <a:srcRect l="0" r="0" t="0" b="0"/>
+          <a:stretch/>
+        </p:blipFill>
+        <p:spPr>
+          <a:xfrm>
+            <a:off x="3273552" y="4379976"/>
+            <a:ext cx="2496312" cy="1298448"/>
+          </a:xfrm>
+          <a:prstGeom prst="rect">
+            <a:avLst/>
+          </a:prstGeom>
+        </p:spPr>
+      </p:pic>
+      <p:sp>
+        <p:nvSpPr>
+          <p:cNvPr id="31" name="Shape 27"/>
+          <p:cNvSpPr/>
+          <p:nvPr/>
+        </p:nvSpPr>
+        <p:spPr>
+          <a:xfrm>
+            <a:off x="320040" y="5879592"/>
+            <a:ext cx="5559552" cy="566928"/>
           </a:xfrm>
           <a:prstGeom prst="rect">
             <a:avLst/>
@@ -1811,14 +1878,14 @@
       </p:sp>
       <p:sp>
         <p:nvSpPr>
-          <p:cNvPr id="30" name="Text 28"/>
-          <p:cNvSpPr/>
-          <p:nvPr/>
-        </p:nvSpPr>
-        <p:spPr>
-          <a:xfrm>
-            <a:off x="393192" y="2807208"/>
-            <a:ext cx="5413248" cy="274320"/>
+          <p:cNvPr id="32" name="Text 28"/>
+          <p:cNvSpPr/>
+          <p:nvPr/>
+        </p:nvSpPr>
+        <p:spPr>
+          <a:xfrm>
+            <a:off x="411480" y="5879592"/>
+            <a:ext cx="5376672" cy="566928"/>
           </a:xfrm>
           <a:prstGeom prst="rect">
             <a:avLst/>
@@ -1834,7 +1901,7 @@
               <a:buNone/>
             </a:pPr>
             <a:r>
-              <a:rPr lang="en-US" sz="880" b="1" dirty="0">
+              <a:rPr lang="en-US" sz="960" b="1" dirty="0">
                 <a:solidFill>
                   <a:srgbClr val="1F3864"/>
                 </a:solidFill>
@@ -1848,7 +1915,7 @@
               <a:buNone/>
             </a:pPr>
             <a:r>
-              <a:rPr lang="en-US" sz="880" dirty="0">
+              <a:rPr lang="en-US" sz="960" dirty="0">
                 <a:solidFill>
                   <a:srgbClr val="262626"/>
                 </a:solidFill>
@@ -1856,13 +1923,13 @@
                 <a:ea typeface="Malgun Gothic" pitchFamily="34" charset="-122"/>
                 <a:cs typeface="Malgun Gothic" pitchFamily="34" charset="-120"/>
               </a:rPr>
-              <a:t>offload로 용량을 풀면 대역폭 계단에 부딪힌다(용량 ↔ 대역폭 트레이드오프) — 어디에 두고·얼마나 줄이고·언제 다시 만들지의 </a:t>
+              <a:t>offload로 용량을 풀면 대역폭 계단에 부딪힌다(용량 ↔ 대역폭 트레이드오프) — 두 병목은 따로 풀 수 없고, HW 증설이 아닌 </a:t>
             </a:r>
             <a:pPr indent="0" marL="0">
               <a:buNone/>
             </a:pPr>
             <a:r>
-              <a:rPr lang="en-US" sz="880" b="1" dirty="0">
+              <a:rPr lang="en-US" sz="960" b="1" dirty="0">
                 <a:solidFill>
                   <a:srgbClr val="1F3864"/>
                 </a:solidFill>
@@ -1870,22 +1937,212 @@
                 <a:ea typeface="Malgun Gothic" pitchFamily="34" charset="-122"/>
                 <a:cs typeface="Malgun Gothic" pitchFamily="34" charset="-120"/>
               </a:rPr>
-              <a:t>운용 결정이 성능을 결정</a:t>
-            </a:r>
-            <a:endParaRPr lang="en-US" sz="880" dirty="0"/>
+              <a:t>자원 사용 방식의 개선</a:t>
+            </a:r>
+            <a:pPr indent="0" marL="0">
+              <a:buNone/>
+            </a:pPr>
+            <a:r>
+              <a:rPr lang="en-US" sz="960" dirty="0">
+                <a:solidFill>
+                  <a:srgbClr val="262626"/>
+                </a:solidFill>
+                <a:latin typeface="Malgun Gothic" pitchFamily="34" charset="0"/>
+                <a:ea typeface="Malgun Gothic" pitchFamily="34" charset="-122"/>
+                <a:cs typeface="Malgun Gothic" pitchFamily="34" charset="-120"/>
+              </a:rPr>
+              <a:t>이 요구된다</a:t>
+            </a:r>
+            <a:endParaRPr lang="en-US" sz="960" dirty="0"/>
           </a:p>
         </p:txBody>
       </p:sp>
       <p:sp>
         <p:nvSpPr>
-          <p:cNvPr id="31" name="Shape 29"/>
-          <p:cNvSpPr/>
-          <p:nvPr/>
-        </p:nvSpPr>
-        <p:spPr>
-          <a:xfrm>
-            <a:off x="6382512" y="1463040"/>
-            <a:ext cx="5489143" cy="1618488"/>
+          <p:cNvPr id="33" name="Shape 29"/>
+          <p:cNvSpPr/>
+          <p:nvPr/>
+        </p:nvSpPr>
+        <p:spPr>
+          <a:xfrm>
+            <a:off x="5934456" y="3826764"/>
+            <a:ext cx="393192" cy="292608"/>
+          </a:xfrm>
+          <a:prstGeom prst="rightArrow">
+            <a:avLst/>
+          </a:prstGeom>
+          <a:solidFill>
+            <a:srgbClr val="9AA0A6"/>
+          </a:solidFill>
+          <a:ln/>
+        </p:spPr>
+      </p:sp>
+      <p:sp>
+        <p:nvSpPr>
+          <p:cNvPr id="34" name="Shape 30"/>
+          <p:cNvSpPr/>
+          <p:nvPr/>
+        </p:nvSpPr>
+        <p:spPr>
+          <a:xfrm>
+            <a:off x="6382512" y="1499616"/>
+            <a:ext cx="5489143" cy="658368"/>
+          </a:xfrm>
+          <a:prstGeom prst="rect">
+            <a:avLst/>
+          </a:prstGeom>
+          <a:solidFill>
+            <a:srgbClr val="F3F7F0"/>
+          </a:solidFill>
+          <a:ln w="15240">
+            <a:solidFill>
+              <a:srgbClr val="4E7C3A"/>
+            </a:solidFill>
+            <a:prstDash val="solid"/>
+          </a:ln>
+        </p:spPr>
+      </p:sp>
+      <p:sp>
+        <p:nvSpPr>
+          <p:cNvPr id="35" name="Text 31"/>
+          <p:cNvSpPr/>
+          <p:nvPr/>
+        </p:nvSpPr>
+        <p:spPr>
+          <a:xfrm>
+            <a:off x="6492240" y="1499616"/>
+            <a:ext cx="5269687" cy="658368"/>
+          </a:xfrm>
+          <a:prstGeom prst="rect">
+            <a:avLst/>
+          </a:prstGeom>
+          <a:noFill/>
+          <a:ln/>
+        </p:spPr>
+        <p:txBody>
+          <a:bodyPr wrap="square" rtlCol="0" anchor="ctr"/>
+          <a:lstStyle/>
+          <a:p>
+            <a:pPr indent="0" marL="0">
+              <a:buNone/>
+            </a:pPr>
+            <a:r>
+              <a:rPr lang="en-US" sz="1060" b="1" dirty="0">
+                <a:solidFill>
+                  <a:srgbClr val="3C5F2C"/>
+                </a:solidFill>
+                <a:latin typeface="Malgun Gothic" pitchFamily="34" charset="0"/>
+                <a:ea typeface="Malgun Gothic" pitchFamily="34" charset="-122"/>
+                <a:cs typeface="Malgun Gothic" pitchFamily="34" charset="-120"/>
+              </a:rPr>
+              <a:t>총괄: </a:t>
+            </a:r>
+            <a:pPr indent="0" marL="0">
+              <a:buNone/>
+            </a:pPr>
+            <a:r>
+              <a:rPr lang="en-US" sz="1060" b="1" dirty="0">
+                <a:solidFill>
+                  <a:srgbClr val="3C5F2C"/>
+                </a:solidFill>
+                <a:latin typeface="Malgun Gothic" pitchFamily="34" charset="0"/>
+                <a:ea typeface="Malgun Gothic" pitchFamily="34" charset="-122"/>
+                <a:cs typeface="Malgun Gothic" pitchFamily="34" charset="-120"/>
+              </a:rPr>
+              <a:t>연산기의 불필요한 연산은 줄이고 메모리의 사용성은 높여, 동일 HW에서 AI 추론 성능(지연·처리량)을 향상시킨다</a:t>
+            </a:r>
+            <a:endParaRPr lang="en-US" sz="1060" dirty="0"/>
+          </a:p>
+        </p:txBody>
+      </p:sp>
+      <p:sp>
+        <p:nvSpPr>
+          <p:cNvPr id="36" name="Shape 32"/>
+          <p:cNvSpPr/>
+          <p:nvPr/>
+        </p:nvSpPr>
+        <p:spPr>
+          <a:xfrm>
+            <a:off x="6382512" y="2249424"/>
+            <a:ext cx="5489143" cy="420624"/>
+          </a:xfrm>
+          <a:prstGeom prst="rect">
+            <a:avLst/>
+          </a:prstGeom>
+          <a:solidFill>
+            <a:srgbClr val="FFF2CC"/>
+          </a:solidFill>
+          <a:ln w="9525">
+            <a:solidFill>
+              <a:srgbClr val="843C0C"/>
+            </a:solidFill>
+            <a:prstDash val="solid"/>
+          </a:ln>
+        </p:spPr>
+      </p:sp>
+      <p:sp>
+        <p:nvSpPr>
+          <p:cNvPr id="37" name="Text 33"/>
+          <p:cNvSpPr/>
+          <p:nvPr/>
+        </p:nvSpPr>
+        <p:spPr>
+          <a:xfrm>
+            <a:off x="6492240" y="2249424"/>
+            <a:ext cx="5269687" cy="420624"/>
+          </a:xfrm>
+          <a:prstGeom prst="rect">
+            <a:avLst/>
+          </a:prstGeom>
+          <a:noFill/>
+          <a:ln/>
+        </p:spPr>
+        <p:txBody>
+          <a:bodyPr wrap="square" rtlCol="0" anchor="ctr"/>
+          <a:lstStyle/>
+          <a:p>
+            <a:pPr indent="0" marL="0">
+              <a:buNone/>
+            </a:pPr>
+            <a:r>
+              <a:rPr lang="en-US" sz="940" b="1" dirty="0">
+                <a:solidFill>
+                  <a:srgbClr val="1F3864"/>
+                </a:solidFill>
+                <a:latin typeface="Malgun Gothic" pitchFamily="34" charset="0"/>
+                <a:ea typeface="Malgun Gothic" pitchFamily="34" charset="-122"/>
+                <a:cs typeface="Malgun Gothic" pitchFamily="34" charset="-120"/>
+              </a:rPr>
+              <a:t>KV 총량·이동량 = ① 만드는 횟수 × ② 토큰당 바이트 × ③ 두는 위치·처리 순서</a:t>
+            </a:r>
+            <a:pPr indent="0" marL="0">
+              <a:buNone/>
+            </a:pPr>
+            <a:r>
+              <a:rPr lang="en-US" sz="920" dirty="0">
+                <a:solidFill>
+                  <a:srgbClr val="843C0C"/>
+                </a:solidFill>
+                <a:latin typeface="Malgun Gothic" pitchFamily="34" charset="0"/>
+                <a:ea typeface="Malgun Gothic" pitchFamily="34" charset="-122"/>
+                <a:cs typeface="Malgun Gothic" pitchFamily="34" charset="-120"/>
+              </a:rPr>
+              <a:t>  — 공식의 세 인자가 곧 목표 3축</a:t>
+            </a:r>
+            <a:endParaRPr lang="en-US" sz="940" dirty="0"/>
+          </a:p>
+        </p:txBody>
+      </p:sp>
+      <p:sp>
+        <p:nvSpPr>
+          <p:cNvPr id="38" name="Shape 34"/>
+          <p:cNvSpPr/>
+          <p:nvPr/>
+        </p:nvSpPr>
+        <p:spPr>
+          <a:xfrm>
+            <a:off x="6382512" y="2779776"/>
+            <a:ext cx="5489143" cy="1149096"/>
           </a:xfrm>
           <a:prstGeom prst="rect">
             <a:avLst/>
@@ -1903,14 +2160,36 @@
       </p:sp>
       <p:sp>
         <p:nvSpPr>
-          <p:cNvPr id="32" name="Text 30"/>
-          <p:cNvSpPr/>
-          <p:nvPr/>
-        </p:nvSpPr>
-        <p:spPr>
-          <a:xfrm>
-            <a:off x="6473952" y="1499616"/>
-            <a:ext cx="5306263" cy="402336"/>
+          <p:cNvPr id="39" name="Shape 35"/>
+          <p:cNvSpPr/>
+          <p:nvPr/>
+        </p:nvSpPr>
+        <p:spPr>
+          <a:xfrm>
+            <a:off x="6473952" y="2862072"/>
+            <a:ext cx="603504" cy="256032"/>
+          </a:xfrm>
+          <a:prstGeom prst="roundRect">
+            <a:avLst>
+              <a:gd name="adj" fmla="val 17857"/>
+            </a:avLst>
+          </a:prstGeom>
+          <a:solidFill>
+            <a:srgbClr val="4E7C3A"/>
+          </a:solidFill>
+          <a:ln/>
+        </p:spPr>
+      </p:sp>
+      <p:sp>
+        <p:nvSpPr>
+          <p:cNvPr id="40" name="Text 36"/>
+          <p:cNvSpPr/>
+          <p:nvPr/>
+        </p:nvSpPr>
+        <p:spPr>
+          <a:xfrm>
+            <a:off x="6473952" y="2862072"/>
+            <a:ext cx="603504" cy="256032"/>
           </a:xfrm>
           <a:prstGeom prst="rect">
             <a:avLst/>
@@ -1922,48 +2201,34 @@
           <a:bodyPr wrap="square" rtlCol="0" anchor="ctr"/>
           <a:lstStyle/>
           <a:p>
-            <a:pPr indent="0" marL="0">
-              <a:buNone/>
-            </a:pPr>
-            <a:r>
-              <a:rPr lang="en-US" sz="980" b="1" dirty="0">
-                <a:solidFill>
-                  <a:srgbClr val="3C5F2C"/>
-                </a:solidFill>
-                <a:latin typeface="Malgun Gothic" pitchFamily="34" charset="0"/>
-                <a:ea typeface="Malgun Gothic" pitchFamily="34" charset="-122"/>
-                <a:cs typeface="Malgun Gothic" pitchFamily="34" charset="-120"/>
-              </a:rPr>
-              <a:t>총괄: </a:t>
-            </a:r>
-            <a:pPr indent="0" marL="0">
-              <a:buNone/>
-            </a:pPr>
-            <a:r>
-              <a:rPr lang="en-US" sz="980" b="1" dirty="0">
-                <a:solidFill>
-                  <a:srgbClr val="3C5F2C"/>
-                </a:solidFill>
-                <a:latin typeface="Malgun Gothic" pitchFamily="34" charset="0"/>
-                <a:ea typeface="Malgun Gothic" pitchFamily="34" charset="-122"/>
-                <a:cs typeface="Malgun Gothic" pitchFamily="34" charset="-120"/>
-              </a:rPr>
-              <a:t>연산기의 불필요한 연산은 줄이고 메모리의 사용성은 높여, 동일 HW에서 AI 추론 성능(지연·처리량)을 향상시킨다</a:t>
-            </a:r>
-            <a:endParaRPr lang="en-US" sz="980" dirty="0"/>
+            <a:pPr algn="ctr" indent="0" marL="0">
+              <a:buNone/>
+            </a:pPr>
+            <a:r>
+              <a:rPr lang="en-US" sz="950" b="1" dirty="0">
+                <a:solidFill>
+                  <a:srgbClr val="FFFFFF"/>
+                </a:solidFill>
+                <a:latin typeface="Malgun Gothic" pitchFamily="34" charset="0"/>
+                <a:ea typeface="Malgun Gothic" pitchFamily="34" charset="-122"/>
+                <a:cs typeface="Malgun Gothic" pitchFamily="34" charset="-120"/>
+              </a:rPr>
+              <a:t>목표 1</a:t>
+            </a:r>
+            <a:endParaRPr lang="en-US" sz="950" dirty="0"/>
           </a:p>
         </p:txBody>
       </p:sp>
       <p:sp>
         <p:nvSpPr>
-          <p:cNvPr id="33" name="Text 31"/>
-          <p:cNvSpPr/>
-          <p:nvPr/>
-        </p:nvSpPr>
-        <p:spPr>
-          <a:xfrm>
-            <a:off x="6492240" y="1901952"/>
-            <a:ext cx="5269687" cy="1124712"/>
+          <p:cNvPr id="41" name="Text 37"/>
+          <p:cNvSpPr/>
+          <p:nvPr/>
+        </p:nvSpPr>
+        <p:spPr>
+          <a:xfrm>
+            <a:off x="7187184" y="2834640"/>
+            <a:ext cx="4556455" cy="1039368"/>
           </a:xfrm>
           <a:prstGeom prst="rect">
             <a:avLst/>
@@ -1975,6 +2240,20 @@
           <a:bodyPr wrap="square" rtlCol="0" anchor="t"/>
           <a:lstStyle/>
           <a:p>
+            <a:pPr indent="0" marL="0">
+              <a:buNone/>
+            </a:pPr>
+            <a:r>
+              <a:rPr lang="en-US" sz="1040" b="1" dirty="0">
+                <a:solidFill>
+                  <a:srgbClr val="3C5F2C"/>
+                </a:solidFill>
+                <a:latin typeface="Malgun Gothic" pitchFamily="34" charset="0"/>
+                <a:ea typeface="Malgun Gothic" pitchFamily="34" charset="-122"/>
+                <a:cs typeface="Malgun Gothic" pitchFamily="34" charset="-120"/>
+              </a:rPr>
+              <a:t>[연산 효율]  이미 계산한 결과를 재활용해 불필요한 재연산을 제거한다  </a:t>
+            </a:r>
             <a:pPr indent="0" marL="0">
               <a:spcAft>
                 <a:spcPts val="300"/>
@@ -1982,7 +2261,44 @@
               <a:buNone/>
             </a:pPr>
             <a:r>
-              <a:rPr lang="en-US" sz="840" dirty="0">
+              <a:rPr lang="en-US" sz="880" dirty="0">
+                <a:solidFill>
+                  <a:srgbClr val="843C0C"/>
+                </a:solidFill>
+                <a:latin typeface="Malgun Gothic" pitchFamily="34" charset="0"/>
+                <a:ea typeface="Malgun Gothic" pitchFamily="34" charset="-122"/>
+                <a:cs typeface="Malgun Gothic" pitchFamily="34" charset="-120"/>
+              </a:rPr>
+              <a:t>(브리지 ① 축소)</a:t>
+            </a:r>
+            <a:endParaRPr lang="en-US" sz="1040" dirty="0"/>
+          </a:p>
+          <a:p>
+            <a:pPr indent="0" marL="0">
+              <a:spcAft>
+                <a:spcPts val="300"/>
+              </a:spcAft>
+              <a:buNone/>
+            </a:pPr>
+            <a:r>
+              <a:rPr lang="en-US" sz="920" dirty="0">
+                <a:solidFill>
+                  <a:srgbClr val="262626"/>
+                </a:solidFill>
+                <a:latin typeface="Malgun Gothic" pitchFamily="34" charset="0"/>
+                <a:ea typeface="Malgun Gothic" pitchFamily="34" charset="-122"/>
+                <a:cs typeface="Malgun Gothic" pitchFamily="34" charset="-120"/>
+              </a:rPr>
+              <a:t>같은 컨텍스트를 매 요청 다시 만드는 연산을 없애 응답 시작 지연을 줄인다</a:t>
+            </a:r>
+            <a:endParaRPr lang="en-US" sz="1040" dirty="0"/>
+          </a:p>
+          <a:p>
+            <a:pPr indent="0" marL="0">
+              <a:buNone/>
+            </a:pPr>
+            <a:r>
+              <a:rPr lang="en-US" sz="920" b="1" dirty="0">
                 <a:solidFill>
                   <a:srgbClr val="1F3864"/>
                 </a:solidFill>
@@ -1990,226 +2306,42 @@
                 <a:ea typeface="Malgun Gothic" pitchFamily="34" charset="-122"/>
                 <a:cs typeface="Malgun Gothic" pitchFamily="34" charset="-120"/>
               </a:rPr>
-              <a:t>KV 총량·이동량 = ① 만드는 횟수 × ② 토큰당 바이트 × ③ 두는 위치·순서 — 세 인자가 곧 목표 3축</a:t>
-            </a:r>
-            <a:endParaRPr lang="en-US" sz="840" dirty="0"/>
-          </a:p>
-          <a:p>
-            <a:pPr marL="101600" indent="-101600">
-              <a:spcAft>
-                <a:spcPts val="200"/>
-              </a:spcAft>
-              <a:buSzPct val="100000"/>
-              <a:buChar char="◆"/>
-            </a:pPr>
-            <a:r>
-              <a:rPr lang="en-US" sz="860" b="1" dirty="0">
-                <a:solidFill>
-                  <a:srgbClr val="3C5F2C"/>
-                </a:solidFill>
-                <a:latin typeface="Malgun Gothic" pitchFamily="34" charset="0"/>
-                <a:ea typeface="Malgun Gothic" pitchFamily="34" charset="-122"/>
-                <a:cs typeface="Malgun Gothic" pitchFamily="34" charset="-120"/>
-              </a:rPr>
-              <a:t>목표 1 [연산 효율] 계산한 결과를 재활용해 불필요한 재연산 제거 → TTFT 단축  (① 축소)</a:t>
-            </a:r>
-            <a:endParaRPr lang="en-US" sz="840" dirty="0"/>
-          </a:p>
-          <a:p>
-            <a:pPr marL="101600" indent="-101600">
-              <a:spcAft>
-                <a:spcPts val="200"/>
-              </a:spcAft>
-              <a:buSzPct val="100000"/>
-              <a:buChar char="◆"/>
-            </a:pPr>
-            <a:r>
-              <a:rPr lang="en-US" sz="860" b="1" dirty="0">
-                <a:solidFill>
-                  <a:srgbClr val="3C5F2C"/>
-                </a:solidFill>
-                <a:latin typeface="Malgun Gothic" pitchFamily="34" charset="0"/>
-                <a:ea typeface="Malgun Gothic" pitchFamily="34" charset="-122"/>
-                <a:cs typeface="Malgun Gothic" pitchFamily="34" charset="-120"/>
-              </a:rPr>
-              <a:t>목표 2 [메모리 효율] 정확도 유지한 채 실효 용량·토큰당 읽기량 개선 → 동시성·처리량 향상  (② 축소)</a:t>
-            </a:r>
-            <a:endParaRPr lang="en-US" sz="840" dirty="0"/>
-          </a:p>
-          <a:p>
-            <a:pPr marL="101600" indent="-101600">
-              <a:buSzPct val="100000"/>
-              <a:buChar char="◆"/>
-            </a:pPr>
-            <a:r>
-              <a:rPr lang="en-US" sz="860" b="1" dirty="0">
-                <a:solidFill>
-                  <a:srgbClr val="3C5F2C"/>
-                </a:solidFill>
-                <a:latin typeface="Malgun Gothic" pitchFamily="34" charset="0"/>
-                <a:ea typeface="Malgun Gothic" pitchFamily="34" charset="-122"/>
-                <a:cs typeface="Malgun Gothic" pitchFamily="34" charset="-120"/>
-              </a:rPr>
-              <a:t>목표 3 [자원 인지 운용] 캐시·메모리·부하 상태 인지 동적 배치·선별 — 개별 개선을 시스템 처리량으로 전환  (③ 최적화)</a:t>
-            </a:r>
-            <a:endParaRPr lang="en-US" sz="840" dirty="0"/>
+              <a:t>판정: </a:t>
+            </a:r>
+            <a:pPr indent="0" marL="0">
+              <a:buNone/>
+            </a:pPr>
+            <a:r>
+              <a:rPr lang="en-US" sz="920" dirty="0">
+                <a:solidFill>
+                  <a:srgbClr val="1F3864"/>
+                </a:solidFill>
+                <a:latin typeface="Malgun Gothic" pitchFamily="34" charset="0"/>
+                <a:ea typeface="Malgun Gothic" pitchFamily="34" charset="-122"/>
+                <a:cs typeface="Malgun Gothic" pitchFamily="34" charset="-120"/>
+              </a:rPr>
+              <a:t>TTFT 단축 배율 ≥ 2× (QA3)</a:t>
+            </a:r>
+            <a:endParaRPr lang="en-US" sz="1040" dirty="0"/>
           </a:p>
         </p:txBody>
       </p:sp>
       <p:sp>
         <p:nvSpPr>
-          <p:cNvPr id="34" name="Shape 32"/>
-          <p:cNvSpPr/>
-          <p:nvPr/>
-        </p:nvSpPr>
-        <p:spPr>
-          <a:xfrm>
-            <a:off x="5934456" y="2144268"/>
-            <a:ext cx="393192" cy="256032"/>
-          </a:xfrm>
-          <a:prstGeom prst="rightArrow">
-            <a:avLst/>
-          </a:prstGeom>
-          <a:solidFill>
-            <a:srgbClr val="9AA0A6"/>
-          </a:solidFill>
-          <a:ln/>
-        </p:spPr>
-      </p:sp>
-      <p:sp>
-        <p:nvSpPr>
-          <p:cNvPr id="35" name="Shape 33"/>
-          <p:cNvSpPr/>
-          <p:nvPr/>
-        </p:nvSpPr>
-        <p:spPr>
-          <a:xfrm>
-            <a:off x="320040" y="3163824"/>
-            <a:ext cx="5559552" cy="310896"/>
-          </a:xfrm>
-          <a:prstGeom prst="rect">
-            <a:avLst/>
-          </a:prstGeom>
-          <a:solidFill>
-            <a:srgbClr val="1F3864"/>
-          </a:solidFill>
-          <a:ln/>
-        </p:spPr>
-      </p:sp>
-      <p:sp>
-        <p:nvSpPr>
-          <p:cNvPr id="36" name="Text 34"/>
-          <p:cNvSpPr/>
-          <p:nvPr/>
-        </p:nvSpPr>
-        <p:spPr>
-          <a:xfrm>
-            <a:off x="365760" y="3163824"/>
-            <a:ext cx="5468112" cy="310896"/>
-          </a:xfrm>
-          <a:prstGeom prst="rect">
-            <a:avLst/>
-          </a:prstGeom>
-          <a:noFill/>
-          <a:ln/>
-        </p:spPr>
-        <p:txBody>
-          <a:bodyPr wrap="square" lIns="0" tIns="0" rIns="0" bIns="0" rtlCol="0" anchor="ctr"/>
-          <a:lstStyle/>
-          <a:p>
-            <a:pPr algn="ctr" indent="0" marL="0">
-              <a:buNone/>
-            </a:pPr>
-            <a:r>
-              <a:rPr lang="en-US" sz="1150" b="1" dirty="0">
-                <a:solidFill>
-                  <a:srgbClr val="FFFFFF"/>
-                </a:solidFill>
-                <a:latin typeface="Malgun Gothic" pitchFamily="34" charset="0"/>
-                <a:ea typeface="Malgun Gothic" pitchFamily="34" charset="-122"/>
-                <a:cs typeface="Malgun Gothic" pitchFamily="34" charset="-120"/>
-              </a:rPr>
-              <a:t>문제 정의 Ⅱ — 운용 공백: 세 지렛대가 현 런타임에 없다 (우선순위 순)</a:t>
-            </a:r>
-            <a:endParaRPr lang="en-US" sz="1150" dirty="0"/>
-          </a:p>
-        </p:txBody>
-      </p:sp>
-      <p:sp>
-        <p:nvSpPr>
-          <p:cNvPr id="37" name="Shape 35"/>
-          <p:cNvSpPr/>
-          <p:nvPr/>
-        </p:nvSpPr>
-        <p:spPr>
-          <a:xfrm>
-            <a:off x="6382512" y="3163824"/>
-            <a:ext cx="5489143" cy="310896"/>
-          </a:xfrm>
-          <a:prstGeom prst="rect">
-            <a:avLst/>
-          </a:prstGeom>
-          <a:solidFill>
-            <a:srgbClr val="4E7C3A"/>
-          </a:solidFill>
-          <a:ln/>
-        </p:spPr>
-      </p:sp>
-      <p:sp>
-        <p:nvSpPr>
-          <p:cNvPr id="38" name="Text 36"/>
-          <p:cNvSpPr/>
-          <p:nvPr/>
-        </p:nvSpPr>
-        <p:spPr>
-          <a:xfrm>
-            <a:off x="6428232" y="3163824"/>
-            <a:ext cx="5397703" cy="310896"/>
-          </a:xfrm>
-          <a:prstGeom prst="rect">
-            <a:avLst/>
-          </a:prstGeom>
-          <a:noFill/>
-          <a:ln/>
-        </p:spPr>
-        <p:txBody>
-          <a:bodyPr wrap="square" lIns="0" tIns="0" rIns="0" bIns="0" rtlCol="0" anchor="ctr"/>
-          <a:lstStyle/>
-          <a:p>
-            <a:pPr algn="ctr" indent="0" marL="0">
-              <a:buNone/>
-            </a:pPr>
-            <a:r>
-              <a:rPr lang="en-US" sz="1150" b="1" dirty="0">
-                <a:solidFill>
-                  <a:srgbClr val="FFFFFF"/>
-                </a:solidFill>
-                <a:latin typeface="Malgun Gothic" pitchFamily="34" charset="0"/>
-                <a:ea typeface="Malgun Gothic" pitchFamily="34" charset="-122"/>
-                <a:cs typeface="Malgun Gothic" pitchFamily="34" charset="-120"/>
-              </a:rPr>
-              <a:t>설계 접근 — 공백 ①②③을 설계 결정(DP)으로 전개, 목표 3축 실현</a:t>
-            </a:r>
-            <a:endParaRPr lang="en-US" sz="1150" dirty="0"/>
-          </a:p>
-        </p:txBody>
-      </p:sp>
-      <p:sp>
-        <p:nvSpPr>
-          <p:cNvPr id="39" name="Shape 37"/>
-          <p:cNvSpPr/>
-          <p:nvPr/>
-        </p:nvSpPr>
-        <p:spPr>
-          <a:xfrm>
-            <a:off x="320040" y="3566160"/>
-            <a:ext cx="5559552" cy="691896"/>
-          </a:xfrm>
-          <a:prstGeom prst="rect">
-            <a:avLst/>
-          </a:prstGeom>
-          <a:solidFill>
-            <a:srgbClr val="F5F6F8"/>
+          <p:cNvPr id="42" name="Shape 38"/>
+          <p:cNvSpPr/>
+          <p:nvPr/>
+        </p:nvSpPr>
+        <p:spPr>
+          <a:xfrm>
+            <a:off x="6382512" y="4038600"/>
+            <a:ext cx="5489143" cy="1149096"/>
+          </a:xfrm>
+          <a:prstGeom prst="rect">
+            <a:avLst/>
+          </a:prstGeom>
+          <a:solidFill>
+            <a:srgbClr val="F3F7F0"/>
           </a:solidFill>
           <a:ln w="12700">
             <a:solidFill>
@@ -2221,34 +2353,36 @@
       </p:sp>
       <p:sp>
         <p:nvSpPr>
-          <p:cNvPr id="40" name="Shape 38"/>
-          <p:cNvSpPr/>
-          <p:nvPr/>
-        </p:nvSpPr>
-        <p:spPr>
-          <a:xfrm>
-            <a:off x="393192" y="3630168"/>
-            <a:ext cx="237744" cy="237744"/>
-          </a:xfrm>
-          <a:prstGeom prst="ellipse">
-            <a:avLst/>
-          </a:prstGeom>
-          <a:solidFill>
-            <a:srgbClr val="1F3864"/>
-          </a:solidFill>
-          <a:ln/>
-        </p:spPr>
-      </p:sp>
-      <p:sp>
-        <p:nvSpPr>
-          <p:cNvPr id="41" name="Text 39"/>
-          <p:cNvSpPr/>
-          <p:nvPr/>
-        </p:nvSpPr>
-        <p:spPr>
-          <a:xfrm>
-            <a:off x="393192" y="3630168"/>
-            <a:ext cx="237744" cy="237744"/>
+          <p:cNvPr id="43" name="Shape 39"/>
+          <p:cNvSpPr/>
+          <p:nvPr/>
+        </p:nvSpPr>
+        <p:spPr>
+          <a:xfrm>
+            <a:off x="6473952" y="4120896"/>
+            <a:ext cx="603504" cy="256032"/>
+          </a:xfrm>
+          <a:prstGeom prst="roundRect">
+            <a:avLst>
+              <a:gd name="adj" fmla="val 17857"/>
+            </a:avLst>
+          </a:prstGeom>
+          <a:solidFill>
+            <a:srgbClr val="4E7C3A"/>
+          </a:solidFill>
+          <a:ln/>
+        </p:spPr>
+      </p:sp>
+      <p:sp>
+        <p:nvSpPr>
+          <p:cNvPr id="44" name="Text 40"/>
+          <p:cNvSpPr/>
+          <p:nvPr/>
+        </p:nvSpPr>
+        <p:spPr>
+          <a:xfrm>
+            <a:off x="6473952" y="4120896"/>
+            <a:ext cx="603504" cy="256032"/>
           </a:xfrm>
           <a:prstGeom prst="rect">
             <a:avLst/>
@@ -2264,7 +2398,7 @@
               <a:buNone/>
             </a:pPr>
             <a:r>
-              <a:rPr lang="en-US" sz="1050" b="1" dirty="0">
+              <a:rPr lang="en-US" sz="950" b="1" dirty="0">
                 <a:solidFill>
                   <a:srgbClr val="FFFFFF"/>
                 </a:solidFill>
@@ -2272,22 +2406,22 @@
                 <a:ea typeface="Malgun Gothic" pitchFamily="34" charset="-122"/>
                 <a:cs typeface="Malgun Gothic" pitchFamily="34" charset="-120"/>
               </a:rPr>
-              <a:t>1</a:t>
-            </a:r>
-            <a:endParaRPr lang="en-US" sz="1050" dirty="0"/>
+              <a:t>목표 2</a:t>
+            </a:r>
+            <a:endParaRPr lang="en-US" sz="950" dirty="0"/>
           </a:p>
         </p:txBody>
       </p:sp>
       <p:sp>
         <p:nvSpPr>
-          <p:cNvPr id="42" name="Text 40"/>
-          <p:cNvSpPr/>
-          <p:nvPr/>
-        </p:nvSpPr>
-        <p:spPr>
-          <a:xfrm>
-            <a:off x="704088" y="3602736"/>
-            <a:ext cx="5065776" cy="618744"/>
+          <p:cNvPr id="45" name="Text 41"/>
+          <p:cNvSpPr/>
+          <p:nvPr/>
+        </p:nvSpPr>
+        <p:spPr>
+          <a:xfrm>
+            <a:off x="7187184" y="4093464"/>
+            <a:ext cx="4556455" cy="1039368"/>
           </a:xfrm>
           <a:prstGeom prst="rect">
             <a:avLst/>
@@ -2300,33 +2434,47 @@
           <a:lstStyle/>
           <a:p>
             <a:pPr indent="0" marL="0">
-              <a:spcAft>
-                <a:spcPts val="200"/>
-              </a:spcAft>
-              <a:buNone/>
-            </a:pPr>
-            <a:r>
-              <a:rPr lang="en-US" sz="980" b="1" dirty="0">
-                <a:solidFill>
-                  <a:srgbClr val="1F3864"/>
-                </a:solidFill>
-                <a:latin typeface="Malgun Gothic" pitchFamily="34" charset="0"/>
-                <a:ea typeface="Malgun Gothic" pitchFamily="34" charset="-122"/>
-                <a:cs typeface="Malgun Gothic" pitchFamily="34" charset="-120"/>
-              </a:rPr>
-              <a:t>재사용 공백 — prefix 일치·일회성 버퍼에 갇힘 (다시 만들지 않기의 부재)</a:t>
-            </a:r>
-            <a:endParaRPr lang="en-US" sz="980" dirty="0"/>
-          </a:p>
-          <a:p>
+              <a:buNone/>
+            </a:pPr>
+            <a:r>
+              <a:rPr lang="en-US" sz="1040" b="1" dirty="0">
+                <a:solidFill>
+                  <a:srgbClr val="3C5F2C"/>
+                </a:solidFill>
+                <a:latin typeface="Malgun Gothic" pitchFamily="34" charset="0"/>
+                <a:ea typeface="Malgun Gothic" pitchFamily="34" charset="-122"/>
+                <a:cs typeface="Malgun Gothic" pitchFamily="34" charset="-120"/>
+              </a:rPr>
+              <a:t>[메모리 효율]  정확도를 유지한 채 메모리의 실효 용량·토큰당 읽기량을 개선한다  </a:t>
+            </a:r>
             <a:pPr indent="0" marL="0">
               <a:spcAft>
-                <a:spcPts val="200"/>
+                <a:spcPts val="300"/>
               </a:spcAft>
               <a:buNone/>
             </a:pPr>
             <a:r>
-              <a:rPr lang="en-US" sz="860" dirty="0">
+              <a:rPr lang="en-US" sz="880" dirty="0">
+                <a:solidFill>
+                  <a:srgbClr val="843C0C"/>
+                </a:solidFill>
+                <a:latin typeface="Malgun Gothic" pitchFamily="34" charset="0"/>
+                <a:ea typeface="Malgun Gothic" pitchFamily="34" charset="-122"/>
+                <a:cs typeface="Malgun Gothic" pitchFamily="34" charset="-120"/>
+              </a:rPr>
+              <a:t>(브리지 ② 축소)</a:t>
+            </a:r>
+            <a:endParaRPr lang="en-US" sz="1040" dirty="0"/>
+          </a:p>
+          <a:p>
+            <a:pPr indent="0" marL="0">
+              <a:spcAft>
+                <a:spcPts val="300"/>
+              </a:spcAft>
+              <a:buNone/>
+            </a:pPr>
+            <a:r>
+              <a:rPr lang="en-US" sz="920" dirty="0">
                 <a:solidFill>
                   <a:srgbClr val="262626"/>
                 </a:solidFill>
@@ -2334,59 +2482,53 @@
                 <a:ea typeface="Malgun Gothic" pitchFamily="34" charset="-122"/>
                 <a:cs typeface="Malgun Gothic" pitchFamily="34" charset="-120"/>
               </a:rPr>
-              <a:t>prefix 정확 일치 시만 hit(vLLM·SGLang), 요청 종료 시 폐기 — 비접두 재사용·세션/사용자 영속화·복원 vs 재계산 판단 없음</a:t>
-            </a:r>
-            <a:endParaRPr lang="en-US" sz="980" dirty="0"/>
+              <a:t>같은 HBM으로 더 많은 컨텍스트를 수용하고(동시성) 매 토큰 읽기량을 줄인다(대역폭) — 품질 bound가 전제(QA2 gate)</a:t>
+            </a:r>
+            <a:endParaRPr lang="en-US" sz="1040" dirty="0"/>
           </a:p>
           <a:p>
             <a:pPr indent="0" marL="0">
               <a:buNone/>
             </a:pPr>
             <a:r>
-              <a:rPr lang="en-US" sz="880" b="1" dirty="0">
-                <a:solidFill>
-                  <a:srgbClr val="B3402A"/>
-                </a:solidFill>
-                <a:latin typeface="Malgun Gothic" pitchFamily="34" charset="0"/>
-                <a:ea typeface="Malgun Gothic" pitchFamily="34" charset="-122"/>
-                <a:cs typeface="Malgun Gothic" pitchFamily="34" charset="-120"/>
-              </a:rPr>
-              <a:t>⇒ 수십 k 토큰을 매 요청 전체 re-prefill — TTFT 지배 (R-03·04·05)</a:t>
-            </a:r>
-            <a:endParaRPr lang="en-US" sz="980" dirty="0"/>
+              <a:rPr lang="en-US" sz="920" b="1" dirty="0">
+                <a:solidFill>
+                  <a:srgbClr val="1F3864"/>
+                </a:solidFill>
+                <a:latin typeface="Malgun Gothic" pitchFamily="34" charset="0"/>
+                <a:ea typeface="Malgun Gothic" pitchFamily="34" charset="-122"/>
+                <a:cs typeface="Malgun Gothic" pitchFamily="34" charset="-120"/>
+              </a:rPr>
+              <a:t>판정: </a:t>
+            </a:r>
+            <a:pPr indent="0" marL="0">
+              <a:buNone/>
+            </a:pPr>
+            <a:r>
+              <a:rPr lang="en-US" sz="920" dirty="0">
+                <a:solidFill>
+                  <a:srgbClr val="1F3864"/>
+                </a:solidFill>
+                <a:latin typeface="Malgun Gothic" pitchFamily="34" charset="0"/>
+                <a:ea typeface="Malgun Gothic" pitchFamily="34" charset="-122"/>
+                <a:cs typeface="Malgun Gothic" pitchFamily="34" charset="-120"/>
+              </a:rPr>
+              <a:t>유효 KV 용량 ≥ 3× (QA4) · throughput ≥ 2× (QA1)</a:t>
+            </a:r>
+            <a:endParaRPr lang="en-US" sz="1040" dirty="0"/>
           </a:p>
         </p:txBody>
       </p:sp>
       <p:sp>
         <p:nvSpPr>
-          <p:cNvPr id="43" name="Shape 41"/>
-          <p:cNvSpPr/>
-          <p:nvPr/>
-        </p:nvSpPr>
-        <p:spPr>
-          <a:xfrm>
-            <a:off x="5934456" y="3793236"/>
-            <a:ext cx="393192" cy="237744"/>
-          </a:xfrm>
-          <a:prstGeom prst="rightArrow">
-            <a:avLst/>
-          </a:prstGeom>
-          <a:solidFill>
-            <a:srgbClr val="FFC000"/>
-          </a:solidFill>
-          <a:ln/>
-        </p:spPr>
-      </p:sp>
-      <p:sp>
-        <p:nvSpPr>
-          <p:cNvPr id="44" name="Shape 42"/>
-          <p:cNvSpPr/>
-          <p:nvPr/>
-        </p:nvSpPr>
-        <p:spPr>
-          <a:xfrm>
-            <a:off x="6382512" y="3566160"/>
-            <a:ext cx="5489143" cy="691896"/>
+          <p:cNvPr id="46" name="Shape 42"/>
+          <p:cNvSpPr/>
+          <p:nvPr/>
+        </p:nvSpPr>
+        <p:spPr>
+          <a:xfrm>
+            <a:off x="6382512" y="5297424"/>
+            <a:ext cx="5489143" cy="1149096"/>
           </a:xfrm>
           <a:prstGeom prst="rect">
             <a:avLst/>
@@ -2404,36 +2546,36 @@
       </p:sp>
       <p:sp>
         <p:nvSpPr>
-          <p:cNvPr id="45" name="Shape 43"/>
-          <p:cNvSpPr/>
-          <p:nvPr/>
-        </p:nvSpPr>
-        <p:spPr>
-          <a:xfrm>
-            <a:off x="6455664" y="3630168"/>
-            <a:ext cx="585216" cy="237744"/>
+          <p:cNvPr id="47" name="Shape 43"/>
+          <p:cNvSpPr/>
+          <p:nvPr/>
+        </p:nvSpPr>
+        <p:spPr>
+          <a:xfrm>
+            <a:off x="6473952" y="5379720"/>
+            <a:ext cx="603504" cy="256032"/>
           </a:xfrm>
           <a:prstGeom prst="roundRect">
             <a:avLst>
-              <a:gd name="adj" fmla="val 19231"/>
+              <a:gd name="adj" fmla="val 17857"/>
             </a:avLst>
           </a:prstGeom>
           <a:solidFill>
-            <a:srgbClr val="ED7D31"/>
-          </a:solidFill>
-          <a:ln/>
-        </p:spPr>
-      </p:sp>
-      <p:sp>
-        <p:nvSpPr>
-          <p:cNvPr id="46" name="Text 44"/>
-          <p:cNvSpPr/>
-          <p:nvPr/>
-        </p:nvSpPr>
-        <p:spPr>
-          <a:xfrm>
-            <a:off x="6455664" y="3630168"/>
-            <a:ext cx="585216" cy="237744"/>
+            <a:srgbClr val="4E7C3A"/>
+          </a:solidFill>
+          <a:ln/>
+        </p:spPr>
+      </p:sp>
+      <p:sp>
+        <p:nvSpPr>
+          <p:cNvPr id="48" name="Text 44"/>
+          <p:cNvSpPr/>
+          <p:nvPr/>
+        </p:nvSpPr>
+        <p:spPr>
+          <a:xfrm>
+            <a:off x="6473952" y="5379720"/>
+            <a:ext cx="603504" cy="256032"/>
           </a:xfrm>
           <a:prstGeom prst="rect">
             <a:avLst/>
@@ -2457,7 +2599,7 @@
                 <a:ea typeface="Malgun Gothic" pitchFamily="34" charset="-122"/>
                 <a:cs typeface="Malgun Gothic" pitchFamily="34" charset="-120"/>
               </a:rPr>
-              <a:t>DP3</a:t>
+              <a:t>목표 3</a:t>
             </a:r>
             <a:endParaRPr lang="en-US" sz="950" dirty="0"/>
           </a:p>
@@ -2465,14 +2607,14 @@
       </p:sp>
       <p:sp>
         <p:nvSpPr>
-          <p:cNvPr id="47" name="Text 45"/>
-          <p:cNvSpPr/>
-          <p:nvPr/>
-        </p:nvSpPr>
-        <p:spPr>
-          <a:xfrm>
-            <a:off x="7132320" y="3602736"/>
-            <a:ext cx="4629607" cy="618744"/>
+          <p:cNvPr id="49" name="Text 45"/>
+          <p:cNvSpPr/>
+          <p:nvPr/>
+        </p:nvSpPr>
+        <p:spPr>
+          <a:xfrm>
+            <a:off x="7187184" y="5352288"/>
+            <a:ext cx="4556455" cy="1039368"/>
           </a:xfrm>
           <a:prstGeom prst="rect">
             <a:avLst/>
@@ -2488,7 +2630,7 @@
               <a:buNone/>
             </a:pPr>
             <a:r>
-              <a:rPr lang="en-US" sz="980" b="1" dirty="0">
+              <a:rPr lang="en-US" sz="1040" b="1" dirty="0">
                 <a:solidFill>
                   <a:srgbClr val="3C5F2C"/>
                 </a:solidFill>
@@ -2496,36 +2638,36 @@
                 <a:ea typeface="Malgun Gothic" pitchFamily="34" charset="-122"/>
                 <a:cs typeface="Malgun Gothic" pitchFamily="34" charset="-120"/>
               </a:rPr>
-              <a:t>KV 재사용 범위·복원 전략  </a:t>
+              <a:t>[자원 인지 운용]  캐시·메모리·부하 상태를 인지해 요청과 데이터를 동적으로 배치·선별한다  </a:t>
             </a:r>
             <a:pPr indent="0" marL="0">
               <a:spcAft>
-                <a:spcPts val="200"/>
+                <a:spcPts val="300"/>
               </a:spcAft>
               <a:buNone/>
             </a:pPr>
             <a:r>
-              <a:rPr lang="en-US" sz="860" b="1" dirty="0">
-                <a:solidFill>
-                  <a:srgbClr val="1F3864"/>
-                </a:solidFill>
-                <a:latin typeface="Malgun Gothic" pitchFamily="34" charset="0"/>
-                <a:ea typeface="Malgun Gothic" pitchFamily="34" charset="-122"/>
-                <a:cs typeface="Malgun Gothic" pitchFamily="34" charset="-120"/>
-              </a:rPr>
-              <a:t>— 목표 1 [연산 효율] 실현</a:t>
-            </a:r>
-            <a:endParaRPr lang="en-US" sz="980" dirty="0"/>
+              <a:rPr lang="en-US" sz="880" dirty="0">
+                <a:solidFill>
+                  <a:srgbClr val="843C0C"/>
+                </a:solidFill>
+                <a:latin typeface="Malgun Gothic" pitchFamily="34" charset="0"/>
+                <a:ea typeface="Malgun Gothic" pitchFamily="34" charset="-122"/>
+                <a:cs typeface="Malgun Gothic" pitchFamily="34" charset="-120"/>
+              </a:rPr>
+              <a:t>(브리지 ③ 최적화)</a:t>
+            </a:r>
+            <a:endParaRPr lang="en-US" sz="1040" dirty="0"/>
           </a:p>
           <a:p>
             <a:pPr indent="0" marL="0">
               <a:spcAft>
-                <a:spcPts val="200"/>
+                <a:spcPts val="300"/>
               </a:spcAft>
               <a:buNone/>
             </a:pPr>
             <a:r>
-              <a:rPr lang="en-US" sz="860" dirty="0">
+              <a:rPr lang="en-US" sz="920" dirty="0">
                 <a:solidFill>
                   <a:srgbClr val="262626"/>
                 </a:solidFill>
@@ -2533,16 +2675,16 @@
                 <a:ea typeface="Malgun Gothic" pitchFamily="34" charset="-122"/>
                 <a:cs typeface="Malgun Gothic" pitchFamily="34" charset="-120"/>
               </a:rPr>
-              <a:t>prefix + 비접두(chunk) 재사용 · 세션/사용자 영속 · 복원 vs 재계산 판단 (FR-02) — 재계산 토큰 선택의 실행 구조를 후보 대결로 결정</a:t>
-            </a:r>
-            <a:endParaRPr lang="en-US" sz="980" dirty="0"/>
+              <a:t>유휴 자원 없이, 개별 효율 개선(목표 1·2)을 시스템 전체 처리량으로 전환한다</a:t>
+            </a:r>
+            <a:endParaRPr lang="en-US" sz="1040" dirty="0"/>
           </a:p>
           <a:p>
             <a:pPr indent="0" marL="0">
               <a:buNone/>
             </a:pPr>
             <a:r>
-              <a:rPr lang="en-US" sz="880" b="1" dirty="0">
+              <a:rPr lang="en-US" sz="920" b="1" dirty="0">
                 <a:solidFill>
                   <a:srgbClr val="1F3864"/>
                 </a:solidFill>
@@ -2556,7 +2698,7 @@
               <a:buNone/>
             </a:pPr>
             <a:r>
-              <a:rPr lang="en-US" sz="880" dirty="0">
+              <a:rPr lang="en-US" sz="920" dirty="0">
                 <a:solidFill>
                   <a:srgbClr val="1F3864"/>
                 </a:solidFill>
@@ -2564,909 +2706,9 @@
                 <a:ea typeface="Malgun Gothic" pitchFamily="34" charset="-122"/>
                 <a:cs typeface="Malgun Gothic" pitchFamily="34" charset="-120"/>
               </a:rPr>
-              <a:t>TTFT ≥ 2× (QA3) — CacheBlend 2.2–3.3×(B) 앵커</a:t>
-            </a:r>
-            <a:endParaRPr lang="en-US" sz="980" dirty="0"/>
-          </a:p>
-        </p:txBody>
-      </p:sp>
-      <p:sp>
-        <p:nvSpPr>
-          <p:cNvPr id="48" name="Shape 46"/>
-          <p:cNvSpPr/>
-          <p:nvPr/>
-        </p:nvSpPr>
-        <p:spPr>
-          <a:xfrm>
-            <a:off x="320040" y="4349496"/>
-            <a:ext cx="5559552" cy="691896"/>
-          </a:xfrm>
-          <a:prstGeom prst="rect">
-            <a:avLst/>
-          </a:prstGeom>
-          <a:solidFill>
-            <a:srgbClr val="F5F6F8"/>
-          </a:solidFill>
-          <a:ln w="12700">
-            <a:solidFill>
-              <a:srgbClr val="A6A6A6"/>
-            </a:solidFill>
-            <a:prstDash val="solid"/>
-          </a:ln>
-        </p:spPr>
-      </p:sp>
-      <p:sp>
-        <p:nvSpPr>
-          <p:cNvPr id="49" name="Shape 47"/>
-          <p:cNvSpPr/>
-          <p:nvPr/>
-        </p:nvSpPr>
-        <p:spPr>
-          <a:xfrm>
-            <a:off x="393192" y="4413504"/>
-            <a:ext cx="237744" cy="237744"/>
-          </a:xfrm>
-          <a:prstGeom prst="ellipse">
-            <a:avLst/>
-          </a:prstGeom>
-          <a:solidFill>
-            <a:srgbClr val="1F3864"/>
-          </a:solidFill>
-          <a:ln/>
-        </p:spPr>
-      </p:sp>
-      <p:sp>
-        <p:nvSpPr>
-          <p:cNvPr id="50" name="Text 48"/>
-          <p:cNvSpPr/>
-          <p:nvPr/>
-        </p:nvSpPr>
-        <p:spPr>
-          <a:xfrm>
-            <a:off x="393192" y="4413504"/>
-            <a:ext cx="237744" cy="237744"/>
-          </a:xfrm>
-          <a:prstGeom prst="rect">
-            <a:avLst/>
-          </a:prstGeom>
-          <a:noFill/>
-          <a:ln/>
-        </p:spPr>
-        <p:txBody>
-          <a:bodyPr wrap="square" rtlCol="0" anchor="ctr"/>
-          <a:lstStyle/>
-          <a:p>
-            <a:pPr algn="ctr" indent="0" marL="0">
-              <a:buNone/>
-            </a:pPr>
-            <a:r>
-              <a:rPr lang="en-US" sz="1050" b="1" dirty="0">
-                <a:solidFill>
-                  <a:srgbClr val="FFFFFF"/>
-                </a:solidFill>
-                <a:latin typeface="Malgun Gothic" pitchFamily="34" charset="0"/>
-                <a:ea typeface="Malgun Gothic" pitchFamily="34" charset="-122"/>
-                <a:cs typeface="Malgun Gothic" pitchFamily="34" charset="-120"/>
-              </a:rPr>
-              <a:t>2</a:t>
-            </a:r>
-            <a:endParaRPr lang="en-US" sz="1050" dirty="0"/>
-          </a:p>
-        </p:txBody>
-      </p:sp>
-      <p:sp>
-        <p:nvSpPr>
-          <p:cNvPr id="51" name="Text 49"/>
-          <p:cNvSpPr/>
-          <p:nvPr/>
-        </p:nvSpPr>
-        <p:spPr>
-          <a:xfrm>
-            <a:off x="704088" y="4386072"/>
-            <a:ext cx="5065776" cy="618744"/>
-          </a:xfrm>
-          <a:prstGeom prst="rect">
-            <a:avLst/>
-          </a:prstGeom>
-          <a:noFill/>
-          <a:ln/>
-        </p:spPr>
-        <p:txBody>
-          <a:bodyPr wrap="square" rtlCol="0" anchor="t"/>
-          <a:lstStyle/>
-          <a:p>
-            <a:pPr indent="0" marL="0">
-              <a:spcAft>
-                <a:spcPts val="200"/>
-              </a:spcAft>
-              <a:buNone/>
-            </a:pPr>
-            <a:r>
-              <a:rPr lang="en-US" sz="980" b="1" dirty="0">
-                <a:solidFill>
-                  <a:srgbClr val="1F3864"/>
-                </a:solidFill>
-                <a:latin typeface="Malgun Gothic" pitchFamily="34" charset="0"/>
-                <a:ea typeface="Malgun Gothic" pitchFamily="34" charset="-122"/>
-                <a:cs typeface="Malgun Gothic" pitchFamily="34" charset="-120"/>
-              </a:rPr>
-              <a:t>압축 공백 — 중요도 판정이 정적·전역 일률 (줄이기의 부재)</a:t>
-            </a:r>
-            <a:endParaRPr lang="en-US" sz="980" dirty="0"/>
-          </a:p>
-          <a:p>
-            <a:pPr indent="0" marL="0">
-              <a:spcAft>
-                <a:spcPts val="200"/>
-              </a:spcAft>
-              <a:buNone/>
-            </a:pPr>
-            <a:r>
-              <a:rPr lang="en-US" sz="860" dirty="0">
-                <a:solidFill>
-                  <a:srgbClr val="262626"/>
-                </a:solidFill>
-                <a:latin typeface="Malgun Gothic" pitchFamily="34" charset="0"/>
-                <a:ea typeface="Malgun Gothic" pitchFamily="34" charset="-122"/>
-                <a:cs typeface="Malgun Gothic" pitchFamily="34" charset="-120"/>
-              </a:rPr>
-              <a:t>중요도 기반 토큰 pruning(H2O·SnapKV)은 입증됐으나 고정 예산·고정 휴리스틱 — 요청별 품질 예산·차등 집행, 재사용과의 조율(쿼리 의존 중요도) 부재</a:t>
-            </a:r>
-            <a:endParaRPr lang="en-US" sz="980" dirty="0"/>
-          </a:p>
-          <a:p>
-            <a:pPr indent="0" marL="0">
-              <a:buNone/>
-            </a:pPr>
-            <a:r>
-              <a:rPr lang="en-US" sz="880" b="1" dirty="0">
-                <a:solidFill>
-                  <a:srgbClr val="B3402A"/>
-                </a:solidFill>
-                <a:latin typeface="Malgun Gothic" pitchFamily="34" charset="0"/>
-                <a:ea typeface="Malgun Gothic" pitchFamily="34" charset="-122"/>
-                <a:cs typeface="Malgun Gothic" pitchFamily="34" charset="-120"/>
-              </a:rPr>
-              <a:t>⇒ 용량·대역폭 이중 병목 지속, 품질 리스크 통제 불가 (R-01·02·06)</a:t>
-            </a:r>
-            <a:endParaRPr lang="en-US" sz="980" dirty="0"/>
-          </a:p>
-        </p:txBody>
-      </p:sp>
-      <p:sp>
-        <p:nvSpPr>
-          <p:cNvPr id="52" name="Shape 50"/>
-          <p:cNvSpPr/>
-          <p:nvPr/>
-        </p:nvSpPr>
-        <p:spPr>
-          <a:xfrm>
-            <a:off x="5934456" y="4576572"/>
-            <a:ext cx="393192" cy="237744"/>
-          </a:xfrm>
-          <a:prstGeom prst="rightArrow">
-            <a:avLst/>
-          </a:prstGeom>
-          <a:solidFill>
-            <a:srgbClr val="FFC000"/>
-          </a:solidFill>
-          <a:ln/>
-        </p:spPr>
-      </p:sp>
-      <p:sp>
-        <p:nvSpPr>
-          <p:cNvPr id="53" name="Shape 51"/>
-          <p:cNvSpPr/>
-          <p:nvPr/>
-        </p:nvSpPr>
-        <p:spPr>
-          <a:xfrm>
-            <a:off x="6382512" y="4349496"/>
-            <a:ext cx="5489143" cy="691896"/>
-          </a:xfrm>
-          <a:prstGeom prst="rect">
-            <a:avLst/>
-          </a:prstGeom>
-          <a:solidFill>
-            <a:srgbClr val="F3F7F0"/>
-          </a:solidFill>
-          <a:ln w="12700">
-            <a:solidFill>
-              <a:srgbClr val="A6A6A6"/>
-            </a:solidFill>
-            <a:prstDash val="solid"/>
-          </a:ln>
-        </p:spPr>
-      </p:sp>
-      <p:sp>
-        <p:nvSpPr>
-          <p:cNvPr id="54" name="Shape 52"/>
-          <p:cNvSpPr/>
-          <p:nvPr/>
-        </p:nvSpPr>
-        <p:spPr>
-          <a:xfrm>
-            <a:off x="6455664" y="4413504"/>
-            <a:ext cx="585216" cy="237744"/>
-          </a:xfrm>
-          <a:prstGeom prst="roundRect">
-            <a:avLst>
-              <a:gd name="adj" fmla="val 19231"/>
-            </a:avLst>
-          </a:prstGeom>
-          <a:solidFill>
-            <a:srgbClr val="E91E8C"/>
-          </a:solidFill>
-          <a:ln/>
-        </p:spPr>
-      </p:sp>
-      <p:sp>
-        <p:nvSpPr>
-          <p:cNvPr id="55" name="Text 53"/>
-          <p:cNvSpPr/>
-          <p:nvPr/>
-        </p:nvSpPr>
-        <p:spPr>
-          <a:xfrm>
-            <a:off x="6455664" y="4413504"/>
-            <a:ext cx="585216" cy="237744"/>
-          </a:xfrm>
-          <a:prstGeom prst="rect">
-            <a:avLst/>
-          </a:prstGeom>
-          <a:noFill/>
-          <a:ln/>
-        </p:spPr>
-        <p:txBody>
-          <a:bodyPr wrap="square" rtlCol="0" anchor="ctr"/>
-          <a:lstStyle/>
-          <a:p>
-            <a:pPr algn="ctr" indent="0" marL="0">
-              <a:buNone/>
-            </a:pPr>
-            <a:r>
-              <a:rPr lang="en-US" sz="950" b="1" dirty="0">
-                <a:solidFill>
-                  <a:srgbClr val="FFFFFF"/>
-                </a:solidFill>
-                <a:latin typeface="Malgun Gothic" pitchFamily="34" charset="0"/>
-                <a:ea typeface="Malgun Gothic" pitchFamily="34" charset="-122"/>
-                <a:cs typeface="Malgun Gothic" pitchFamily="34" charset="-120"/>
-              </a:rPr>
-              <a:t>DP4</a:t>
-            </a:r>
-            <a:endParaRPr lang="en-US" sz="950" dirty="0"/>
-          </a:p>
-        </p:txBody>
-      </p:sp>
-      <p:sp>
-        <p:nvSpPr>
-          <p:cNvPr id="56" name="Text 54"/>
-          <p:cNvSpPr/>
-          <p:nvPr/>
-        </p:nvSpPr>
-        <p:spPr>
-          <a:xfrm>
-            <a:off x="7132320" y="4386072"/>
-            <a:ext cx="4629607" cy="618744"/>
-          </a:xfrm>
-          <a:prstGeom prst="rect">
-            <a:avLst/>
-          </a:prstGeom>
-          <a:noFill/>
-          <a:ln/>
-        </p:spPr>
-        <p:txBody>
-          <a:bodyPr wrap="square" rtlCol="0" anchor="t"/>
-          <a:lstStyle/>
-          <a:p>
-            <a:pPr indent="0" marL="0">
-              <a:buNone/>
-            </a:pPr>
-            <a:r>
-              <a:rPr lang="en-US" sz="980" b="1" dirty="0">
-                <a:solidFill>
-                  <a:srgbClr val="3C5F2C"/>
-                </a:solidFill>
-                <a:latin typeface="Malgun Gothic" pitchFamily="34" charset="0"/>
-                <a:ea typeface="Malgun Gothic" pitchFamily="34" charset="-122"/>
-                <a:cs typeface="Malgun Gothic" pitchFamily="34" charset="-120"/>
-              </a:rPr>
-              <a:t>정확도를 유지한 KV 캐시 압축  </a:t>
-            </a:r>
-            <a:pPr indent="0" marL="0">
-              <a:spcAft>
-                <a:spcPts val="200"/>
-              </a:spcAft>
-              <a:buNone/>
-            </a:pPr>
-            <a:r>
-              <a:rPr lang="en-US" sz="860" b="1" dirty="0">
-                <a:solidFill>
-                  <a:srgbClr val="1F3864"/>
-                </a:solidFill>
-                <a:latin typeface="Malgun Gothic" pitchFamily="34" charset="0"/>
-                <a:ea typeface="Malgun Gothic" pitchFamily="34" charset="-122"/>
-                <a:cs typeface="Malgun Gothic" pitchFamily="34" charset="-120"/>
-              </a:rPr>
-              <a:t>— 목표 2 [메모리 효율] 실현</a:t>
-            </a:r>
-            <a:endParaRPr lang="en-US" sz="980" dirty="0"/>
-          </a:p>
-          <a:p>
-            <a:pPr indent="0" marL="0">
-              <a:spcAft>
-                <a:spcPts val="200"/>
-              </a:spcAft>
-              <a:buNone/>
-            </a:pPr>
-            <a:r>
-              <a:rPr lang="en-US" sz="860" dirty="0">
-                <a:solidFill>
-                  <a:srgbClr val="262626"/>
-                </a:solidFill>
-                <a:latin typeface="Malgun Gothic" pitchFamily="34" charset="0"/>
-                <a:ea typeface="Malgun Gothic" pitchFamily="34" charset="-122"/>
-                <a:cs typeface="Malgun Gothic" pitchFamily="34" charset="-120"/>
-              </a:rPr>
-              <a:t>품질 bound(ΔF1 ≤ 1%p, QA2 gate) 안의 요청별 차등 pruning — 집행 시점 × 자산 표현(단일 사본 vs 원본·파생)을 후보 대결로 결정 (FR-03·04, C-03)</a:t>
-            </a:r>
-            <a:endParaRPr lang="en-US" sz="980" dirty="0"/>
-          </a:p>
-          <a:p>
-            <a:pPr indent="0" marL="0">
-              <a:buNone/>
-            </a:pPr>
-            <a:r>
-              <a:rPr lang="en-US" sz="880" b="1" dirty="0">
-                <a:solidFill>
-                  <a:srgbClr val="1F3864"/>
-                </a:solidFill>
-                <a:latin typeface="Malgun Gothic" pitchFamily="34" charset="0"/>
-                <a:ea typeface="Malgun Gothic" pitchFamily="34" charset="-122"/>
-                <a:cs typeface="Malgun Gothic" pitchFamily="34" charset="-120"/>
-              </a:rPr>
-              <a:t>판정: </a:t>
-            </a:r>
-            <a:pPr indent="0" marL="0">
-              <a:buNone/>
-            </a:pPr>
-            <a:r>
-              <a:rPr lang="en-US" sz="880" dirty="0">
-                <a:solidFill>
-                  <a:srgbClr val="1F3864"/>
-                </a:solidFill>
-                <a:latin typeface="Malgun Gothic" pitchFamily="34" charset="0"/>
-                <a:ea typeface="Malgun Gothic" pitchFamily="34" charset="-122"/>
-                <a:cs typeface="Malgun Gothic" pitchFamily="34" charset="-120"/>
-              </a:rPr>
-              <a:t>유효 KV 용량 ≥ 3× (QA4) · throughput ≥ 2× (QA1)</a:t>
-            </a:r>
-            <a:endParaRPr lang="en-US" sz="980" dirty="0"/>
-          </a:p>
-        </p:txBody>
-      </p:sp>
-      <p:sp>
-        <p:nvSpPr>
-          <p:cNvPr id="57" name="Shape 55"/>
-          <p:cNvSpPr/>
-          <p:nvPr/>
-        </p:nvSpPr>
-        <p:spPr>
-          <a:xfrm>
-            <a:off x="320040" y="5132832"/>
-            <a:ext cx="5559552" cy="691896"/>
-          </a:xfrm>
-          <a:prstGeom prst="rect">
-            <a:avLst/>
-          </a:prstGeom>
-          <a:solidFill>
-            <a:srgbClr val="F5F6F8"/>
-          </a:solidFill>
-          <a:ln w="12700">
-            <a:solidFill>
-              <a:srgbClr val="A6A6A6"/>
-            </a:solidFill>
-            <a:prstDash val="solid"/>
-          </a:ln>
-        </p:spPr>
-      </p:sp>
-      <p:sp>
-        <p:nvSpPr>
-          <p:cNvPr id="58" name="Shape 56"/>
-          <p:cNvSpPr/>
-          <p:nvPr/>
-        </p:nvSpPr>
-        <p:spPr>
-          <a:xfrm>
-            <a:off x="393192" y="5196840"/>
-            <a:ext cx="237744" cy="237744"/>
-          </a:xfrm>
-          <a:prstGeom prst="ellipse">
-            <a:avLst/>
-          </a:prstGeom>
-          <a:solidFill>
-            <a:srgbClr val="1F3864"/>
-          </a:solidFill>
-          <a:ln/>
-        </p:spPr>
-      </p:sp>
-      <p:sp>
-        <p:nvSpPr>
-          <p:cNvPr id="59" name="Text 57"/>
-          <p:cNvSpPr/>
-          <p:nvPr/>
-        </p:nvSpPr>
-        <p:spPr>
-          <a:xfrm>
-            <a:off x="393192" y="5196840"/>
-            <a:ext cx="237744" cy="237744"/>
-          </a:xfrm>
-          <a:prstGeom prst="rect">
-            <a:avLst/>
-          </a:prstGeom>
-          <a:noFill/>
-          <a:ln/>
-        </p:spPr>
-        <p:txBody>
-          <a:bodyPr wrap="square" rtlCol="0" anchor="ctr"/>
-          <a:lstStyle/>
-          <a:p>
-            <a:pPr algn="ctr" indent="0" marL="0">
-              <a:buNone/>
-            </a:pPr>
-            <a:r>
-              <a:rPr lang="en-US" sz="1050" b="1" dirty="0">
-                <a:solidFill>
-                  <a:srgbClr val="FFFFFF"/>
-                </a:solidFill>
-                <a:latin typeface="Malgun Gothic" pitchFamily="34" charset="0"/>
-                <a:ea typeface="Malgun Gothic" pitchFamily="34" charset="-122"/>
-                <a:cs typeface="Malgun Gothic" pitchFamily="34" charset="-120"/>
-              </a:rPr>
-              <a:t>3</a:t>
-            </a:r>
-            <a:endParaRPr lang="en-US" sz="1050" dirty="0"/>
-          </a:p>
-        </p:txBody>
-      </p:sp>
-      <p:sp>
-        <p:nvSpPr>
-          <p:cNvPr id="60" name="Text 58"/>
-          <p:cNvSpPr/>
-          <p:nvPr/>
-        </p:nvSpPr>
-        <p:spPr>
-          <a:xfrm>
-            <a:off x="704088" y="5169408"/>
-            <a:ext cx="5065776" cy="618744"/>
-          </a:xfrm>
-          <a:prstGeom prst="rect">
-            <a:avLst/>
-          </a:prstGeom>
-          <a:noFill/>
-          <a:ln/>
-        </p:spPr>
-        <p:txBody>
-          <a:bodyPr wrap="square" rtlCol="0" anchor="t"/>
-          <a:lstStyle/>
-          <a:p>
-            <a:pPr indent="0" marL="0">
-              <a:spcAft>
-                <a:spcPts val="200"/>
-              </a:spcAft>
-              <a:buNone/>
-            </a:pPr>
-            <a:r>
-              <a:rPr lang="en-US" sz="980" b="1" dirty="0">
-                <a:solidFill>
-                  <a:srgbClr val="1F3864"/>
-                </a:solidFill>
-                <a:latin typeface="Malgun Gothic" pitchFamily="34" charset="0"/>
-                <a:ea typeface="Malgun Gothic" pitchFamily="34" charset="-122"/>
-                <a:cs typeface="Malgun Gothic" pitchFamily="34" charset="-120"/>
-              </a:rPr>
-              <a:t>스케줄링 공백 — 스케줄러가 KV를 모른다, KV-blind (잘 두고 고르기의 부재)</a:t>
-            </a:r>
-            <a:endParaRPr lang="en-US" sz="980" dirty="0"/>
-          </a:p>
-          <a:p>
-            <a:pPr indent="0" marL="0">
-              <a:spcAft>
-                <a:spcPts val="200"/>
-              </a:spcAft>
-              <a:buNone/>
-            </a:pPr>
-            <a:r>
-              <a:rPr lang="en-US" sz="860" dirty="0">
-                <a:solidFill>
-                  <a:srgbClr val="262626"/>
-                </a:solidFill>
-                <a:latin typeface="Malgun Gothic" pitchFamily="34" charset="0"/>
-                <a:ea typeface="Malgun Gothic" pitchFamily="34" charset="-122"/>
-                <a:cs typeface="Malgun Gothic" pitchFamily="34" charset="-120"/>
-              </a:rPr>
-              <a:t>admission·라우팅이 cache locality 비인지(재사용 이득 소실), KV 풀 포화 시 preemption·전체 재계산뿐 — 압축/강등/축출 선택 없음</a:t>
-            </a:r>
-            <a:endParaRPr lang="en-US" sz="980" dirty="0"/>
-          </a:p>
-          <a:p>
-            <a:pPr indent="0" marL="0">
-              <a:buNone/>
-            </a:pPr>
-            <a:r>
-              <a:rPr lang="en-US" sz="880" b="1" dirty="0">
-                <a:solidFill>
-                  <a:srgbClr val="B3402A"/>
-                </a:solidFill>
-                <a:latin typeface="Malgun Gothic" pitchFamily="34" charset="0"/>
-                <a:ea typeface="Malgun Gothic" pitchFamily="34" charset="-122"/>
-                <a:cs typeface="Malgun Gothic" pitchFamily="34" charset="-120"/>
-              </a:rPr>
-              <a:t>⇒ 재사용·압축의 이득이 시스템 처리량으로 전환되지 않음 (R-16)</a:t>
-            </a:r>
-            <a:endParaRPr lang="en-US" sz="980" dirty="0"/>
-          </a:p>
-        </p:txBody>
-      </p:sp>
-      <p:sp>
-        <p:nvSpPr>
-          <p:cNvPr id="61" name="Shape 59"/>
-          <p:cNvSpPr/>
-          <p:nvPr/>
-        </p:nvSpPr>
-        <p:spPr>
-          <a:xfrm>
-            <a:off x="5934456" y="5359908"/>
-            <a:ext cx="393192" cy="237744"/>
-          </a:xfrm>
-          <a:prstGeom prst="rightArrow">
-            <a:avLst/>
-          </a:prstGeom>
-          <a:solidFill>
-            <a:srgbClr val="FFC000"/>
-          </a:solidFill>
-          <a:ln/>
-        </p:spPr>
-      </p:sp>
-      <p:sp>
-        <p:nvSpPr>
-          <p:cNvPr id="62" name="Shape 60"/>
-          <p:cNvSpPr/>
-          <p:nvPr/>
-        </p:nvSpPr>
-        <p:spPr>
-          <a:xfrm>
-            <a:off x="6382512" y="5132832"/>
-            <a:ext cx="5489143" cy="691896"/>
-          </a:xfrm>
-          <a:prstGeom prst="rect">
-            <a:avLst/>
-          </a:prstGeom>
-          <a:solidFill>
-            <a:srgbClr val="F3F7F0"/>
-          </a:solidFill>
-          <a:ln w="12700">
-            <a:solidFill>
-              <a:srgbClr val="A6A6A6"/>
-            </a:solidFill>
-            <a:prstDash val="solid"/>
-          </a:ln>
-        </p:spPr>
-      </p:sp>
-      <p:sp>
-        <p:nvSpPr>
-          <p:cNvPr id="63" name="Shape 61"/>
-          <p:cNvSpPr/>
-          <p:nvPr/>
-        </p:nvSpPr>
-        <p:spPr>
-          <a:xfrm>
-            <a:off x="6455664" y="5196840"/>
-            <a:ext cx="585216" cy="237744"/>
-          </a:xfrm>
-          <a:prstGeom prst="roundRect">
-            <a:avLst>
-              <a:gd name="adj" fmla="val 19231"/>
-            </a:avLst>
-          </a:prstGeom>
-          <a:solidFill>
-            <a:srgbClr val="7030A0"/>
-          </a:solidFill>
-          <a:ln/>
-        </p:spPr>
-      </p:sp>
-      <p:sp>
-        <p:nvSpPr>
-          <p:cNvPr id="64" name="Text 62"/>
-          <p:cNvSpPr/>
-          <p:nvPr/>
-        </p:nvSpPr>
-        <p:spPr>
-          <a:xfrm>
-            <a:off x="6455664" y="5196840"/>
-            <a:ext cx="585216" cy="237744"/>
-          </a:xfrm>
-          <a:prstGeom prst="rect">
-            <a:avLst/>
-          </a:prstGeom>
-          <a:noFill/>
-          <a:ln/>
-        </p:spPr>
-        <p:txBody>
-          <a:bodyPr wrap="square" rtlCol="0" anchor="ctr"/>
-          <a:lstStyle/>
-          <a:p>
-            <a:pPr algn="ctr" indent="0" marL="0">
-              <a:buNone/>
-            </a:pPr>
-            <a:r>
-              <a:rPr lang="en-US" sz="950" b="1" dirty="0">
-                <a:solidFill>
-                  <a:srgbClr val="FFFFFF"/>
-                </a:solidFill>
-                <a:latin typeface="Malgun Gothic" pitchFamily="34" charset="0"/>
-                <a:ea typeface="Malgun Gothic" pitchFamily="34" charset="-122"/>
-                <a:cs typeface="Malgun Gothic" pitchFamily="34" charset="-120"/>
-              </a:rPr>
-              <a:t>DP5</a:t>
-            </a:r>
-            <a:endParaRPr lang="en-US" sz="950" dirty="0"/>
-          </a:p>
-        </p:txBody>
-      </p:sp>
-      <p:sp>
-        <p:nvSpPr>
-          <p:cNvPr id="65" name="Text 63"/>
-          <p:cNvSpPr/>
-          <p:nvPr/>
-        </p:nvSpPr>
-        <p:spPr>
-          <a:xfrm>
-            <a:off x="7132320" y="5169408"/>
-            <a:ext cx="4629607" cy="618744"/>
-          </a:xfrm>
-          <a:prstGeom prst="rect">
-            <a:avLst/>
-          </a:prstGeom>
-          <a:noFill/>
-          <a:ln/>
-        </p:spPr>
-        <p:txBody>
-          <a:bodyPr wrap="square" rtlCol="0" anchor="t"/>
-          <a:lstStyle/>
-          <a:p>
-            <a:pPr indent="0" marL="0">
-              <a:buNone/>
-            </a:pPr>
-            <a:r>
-              <a:rPr lang="en-US" sz="980" b="1" dirty="0">
-                <a:solidFill>
-                  <a:srgbClr val="3C5F2C"/>
-                </a:solidFill>
-                <a:latin typeface="Malgun Gothic" pitchFamily="34" charset="0"/>
-                <a:ea typeface="Malgun Gothic" pitchFamily="34" charset="-122"/>
-                <a:cs typeface="Malgun Gothic" pitchFamily="34" charset="-120"/>
-              </a:rPr>
-              <a:t>KV 캐시 인지형 동적 스케줄링  </a:t>
-            </a:r>
-            <a:pPr indent="0" marL="0">
-              <a:spcAft>
-                <a:spcPts val="200"/>
-              </a:spcAft>
-              <a:buNone/>
-            </a:pPr>
-            <a:r>
-              <a:rPr lang="en-US" sz="860" b="1" dirty="0">
-                <a:solidFill>
-                  <a:srgbClr val="1F3864"/>
-                </a:solidFill>
-                <a:latin typeface="Malgun Gothic" pitchFamily="34" charset="0"/>
-                <a:ea typeface="Malgun Gothic" pitchFamily="34" charset="-122"/>
-                <a:cs typeface="Malgun Gothic" pitchFamily="34" charset="-120"/>
-              </a:rPr>
-              <a:t>— 목표 3 [자원 인지 운용] 실현</a:t>
-            </a:r>
-            <a:endParaRPr lang="en-US" sz="980" dirty="0"/>
-          </a:p>
-          <a:p>
-            <a:pPr indent="0" marL="0">
-              <a:spcAft>
-                <a:spcPts val="200"/>
-              </a:spcAft>
-              <a:buNone/>
-            </a:pPr>
-            <a:r>
-              <a:rPr lang="en-US" sz="860" dirty="0">
-                <a:solidFill>
-                  <a:srgbClr val="262626"/>
-                </a:solidFill>
-                <a:latin typeface="Malgun Gothic" pitchFamily="34" charset="0"/>
-                <a:ea typeface="Malgun Gothic" pitchFamily="34" charset="-122"/>
-                <a:cs typeface="Malgun Gothic" pitchFamily="34" charset="-120"/>
-              </a:rPr>
-              <a:t>locality 인지 라우팅 + KV 공간 확보(압축/강등/축출 선택) (FR-05) — 라우팅 1차 기준(locality vs 부하)을 후보 대결로 결정</a:t>
-            </a:r>
-            <a:endParaRPr lang="en-US" sz="980" dirty="0"/>
-          </a:p>
-          <a:p>
-            <a:pPr indent="0" marL="0">
-              <a:buNone/>
-            </a:pPr>
-            <a:r>
-              <a:rPr lang="en-US" sz="880" b="1" dirty="0">
-                <a:solidFill>
-                  <a:srgbClr val="1F3864"/>
-                </a:solidFill>
-                <a:latin typeface="Malgun Gothic" pitchFamily="34" charset="0"/>
-                <a:ea typeface="Malgun Gothic" pitchFamily="34" charset="-122"/>
-                <a:cs typeface="Malgun Gothic" pitchFamily="34" charset="-120"/>
-              </a:rPr>
-              <a:t>판정: </a:t>
-            </a:r>
-            <a:pPr indent="0" marL="0">
-              <a:buNone/>
-            </a:pPr>
-            <a:r>
-              <a:rPr lang="en-US" sz="880" dirty="0">
-                <a:solidFill>
-                  <a:srgbClr val="1F3864"/>
-                </a:solidFill>
-                <a:latin typeface="Malgun Gothic" pitchFamily="34" charset="0"/>
-                <a:ea typeface="Malgun Gothic" pitchFamily="34" charset="-122"/>
-                <a:cs typeface="Malgun Gothic" pitchFamily="34" charset="-120"/>
-              </a:rPr>
               <a:t>throughput ≥ 2× (QA1) — 축별 ablation으로 순기여 분리</a:t>
             </a:r>
-            <a:endParaRPr lang="en-US" sz="980" dirty="0"/>
-          </a:p>
-        </p:txBody>
-      </p:sp>
-      <p:sp>
-        <p:nvSpPr>
-          <p:cNvPr id="66" name="Shape 64"/>
-          <p:cNvSpPr/>
-          <p:nvPr/>
-        </p:nvSpPr>
-        <p:spPr>
-          <a:xfrm>
-            <a:off x="320040" y="5916168"/>
-            <a:ext cx="11551615" cy="530352"/>
-          </a:xfrm>
-          <a:prstGeom prst="rect">
-            <a:avLst/>
-          </a:prstGeom>
-          <a:solidFill>
-            <a:srgbClr val="FFF2CC"/>
-          </a:solidFill>
-          <a:ln w="12700">
-            <a:solidFill>
-              <a:srgbClr val="843C0C"/>
-            </a:solidFill>
-            <a:prstDash val="solid"/>
-          </a:ln>
-        </p:spPr>
-      </p:sp>
-      <p:sp>
-        <p:nvSpPr>
-          <p:cNvPr id="67" name="Text 65"/>
-          <p:cNvSpPr/>
-          <p:nvPr/>
-        </p:nvSpPr>
-        <p:spPr>
-          <a:xfrm>
-            <a:off x="448056" y="5916168"/>
-            <a:ext cx="11295583" cy="530352"/>
-          </a:xfrm>
-          <a:prstGeom prst="rect">
-            <a:avLst/>
-          </a:prstGeom>
-          <a:noFill/>
-          <a:ln/>
-        </p:spPr>
-        <p:txBody>
-          <a:bodyPr wrap="square" rtlCol="0" anchor="ctr"/>
-          <a:lstStyle/>
-          <a:p>
-            <a:pPr indent="0" marL="0">
-              <a:buNone/>
-            </a:pPr>
-            <a:r>
-              <a:rPr lang="en-US" sz="960" b="1" dirty="0">
-                <a:solidFill>
-                  <a:srgbClr val="843C0C"/>
-                </a:solidFill>
-                <a:latin typeface="Malgun Gothic" pitchFamily="34" charset="0"/>
-                <a:ea typeface="Malgun Gothic" pitchFamily="34" charset="-122"/>
-                <a:cs typeface="Malgun Gothic" pitchFamily="34" charset="-120"/>
-              </a:rPr>
-              <a:t>관통 문제: </a:t>
-            </a:r>
-            <a:pPr indent="0" marL="0">
-              <a:buNone/>
-            </a:pPr>
-            <a:r>
-              <a:rPr lang="en-US" sz="960" dirty="0">
-                <a:solidFill>
-                  <a:srgbClr val="262626"/>
-                </a:solidFill>
-                <a:latin typeface="Malgun Gothic" pitchFamily="34" charset="0"/>
-                <a:ea typeface="Malgun Gothic" pitchFamily="34" charset="-122"/>
-                <a:cs typeface="Malgun Gothic" pitchFamily="34" charset="-120"/>
-              </a:rPr>
-              <a:t>세 지렛대는 결합되어 있으나(재사용은 남는 것을, 압축은 비용을, 스케줄링은 활용을 결정) 조율 계층이 어느 런타임에도 없다 → </a:t>
-            </a:r>
-            <a:pPr indent="0" marL="0">
-              <a:buNone/>
-            </a:pPr>
-            <a:r>
-              <a:rPr lang="en-US" sz="960" b="1" dirty="0">
-                <a:solidFill>
-                  <a:srgbClr val="1F3864"/>
-                </a:solidFill>
-                <a:latin typeface="Malgun Gothic" pitchFamily="34" charset="0"/>
-                <a:ea typeface="Malgun Gothic" pitchFamily="34" charset="-122"/>
-                <a:cs typeface="Malgun Gothic" pitchFamily="34" charset="-120"/>
-              </a:rPr>
-              <a:t>DP2 KV 배치·압축의 관리 주체</a:t>
-            </a:r>
-            <a:pPr indent="0" marL="0">
-              <a:buNone/>
-            </a:pPr>
-            <a:r>
-              <a:rPr lang="en-US" sz="960" dirty="0">
-                <a:solidFill>
-                  <a:srgbClr val="262626"/>
-                </a:solidFill>
-                <a:latin typeface="Malgun Gothic" pitchFamily="34" charset="0"/>
-                <a:ea typeface="Malgun Gothic" pitchFamily="34" charset="-122"/>
-                <a:cs typeface="Malgun Gothic" pitchFamily="34" charset="-120"/>
-              </a:rPr>
-              <a:t>가 조율의 소재를, </a:t>
-            </a:r>
-            <a:pPr indent="0" marL="0">
-              <a:buNone/>
-            </a:pPr>
-            <a:r>
-              <a:rPr lang="en-US" sz="960" b="1" dirty="0">
-                <a:solidFill>
-                  <a:srgbClr val="1F3864"/>
-                </a:solidFill>
-                <a:latin typeface="Malgun Gothic" pitchFamily="34" charset="0"/>
-                <a:ea typeface="Malgun Gothic" pitchFamily="34" charset="-122"/>
-                <a:cs typeface="Malgun Gothic" pitchFamily="34" charset="-120"/>
-              </a:rPr>
-              <a:t>DP1 실행 스택 소싱</a:t>
-            </a:r>
-            <a:pPr indent="0" marL="0">
-              <a:buNone/>
-            </a:pPr>
-            <a:r>
-              <a:rPr lang="en-US" sz="960" dirty="0">
-                <a:solidFill>
-                  <a:srgbClr val="262626"/>
-                </a:solidFill>
-                <a:latin typeface="Malgun Gothic" pitchFamily="34" charset="0"/>
-                <a:ea typeface="Malgun Gothic" pitchFamily="34" charset="-122"/>
-                <a:cs typeface="Malgun Gothic" pitchFamily="34" charset="-120"/>
-              </a:rPr>
-              <a:t>이 이 모두가 사는 집을 결정 — 설계 챕터 DP1–DP5로 전개.</a:t>
-            </a:r>
-            <a:pPr indent="0" marL="0">
-              <a:buNone/>
-            </a:pPr>
-            <a:r>
-              <a:rPr lang="en-US" sz="880" dirty="0">
-                <a:solidFill>
-                  <a:srgbClr val="7F7F7F"/>
-                </a:solidFill>
-                <a:latin typeface="Malgun Gothic" pitchFamily="34" charset="0"/>
-                <a:ea typeface="Malgun Gothic" pitchFamily="34" charset="-122"/>
-                <a:cs typeface="Malgun Gothic" pitchFamily="34" charset="-120"/>
-              </a:rPr>
-              <a:t>  (2단계 진화: 자사 memory-centric 디바이스 확장 — MCR 완성)</a:t>
-            </a:r>
-            <a:endParaRPr lang="en-US" sz="960" dirty="0"/>
+            <a:endParaRPr lang="en-US" sz="1040" dirty="0"/>
           </a:p>
         </p:txBody>
       </p:sp>
